--- a/materials/FinPilot-presentation.pptx
+++ b/materials/FinPilot-presentation.pptx
@@ -18,6 +18,8 @@
     <p:sldId id="266" r:id="rId17"/>
     <p:sldId id="267" r:id="rId18"/>
     <p:sldId id="268" r:id="rId19"/>
+    <p:sldId id="269" r:id="rId20"/>
+    <p:sldId id="270" r:id="rId21"/>
   </p:sldIdLst>
   <p:sldSz cx="12191695" cy="6858000" type="screen4x3"/>
   <p:notesSz cx="6858000" cy="9144000"/>
@@ -514,7 +516,7 @@
           <a:lstStyle/>
           <a:p>
             <a:r>
-              <a:t>第 1 页。按 docs/competition/DEMO.md 的 8 分钟节奏讲述。数字以 VALIDATION.json 为准；不要把合成演示或模拟资金描述成真实用户成果。</a:t>
+              <a:t>第 1 页。按 docs/competition/DEMO.md 的 8 分钟节奏讲述。本版应用数字以 materials/PUBLISH-VALIDATION.json 为准，历史模型数字见 VALIDATION.json；不要把合成演示或模拟资金描述成真实用户成果。</a:t>
             </a:r>
           </a:p>
         </p:txBody>
@@ -584,7 +586,7 @@
           <a:lstStyle/>
           <a:p>
             <a:r>
-              <a:t>第 10 页。按 docs/competition/DEMO.md 的 8 分钟节奏讲述。数字以 VALIDATION.json 为准；不要把合成演示或模拟资金描述成真实用户成果。</a:t>
+              <a:t>第 10 页。按 docs/competition/DEMO.md 的 8 分钟节奏讲述。本版应用数字以 materials/PUBLISH-VALIDATION.json 为准，历史模型数字见 VALIDATION.json；不要把合成演示或模拟资金描述成真实用户成果。</a:t>
             </a:r>
           </a:p>
         </p:txBody>
@@ -654,7 +656,7 @@
           <a:lstStyle/>
           <a:p>
             <a:r>
-              <a:t>第 11 页。按 docs/competition/DEMO.md 的 8 分钟节奏讲述。数字以 VALIDATION.json 为准；不要把合成演示或模拟资金描述成真实用户成果。</a:t>
+              <a:t>第 11 页。按 docs/competition/DEMO.md 的 8 分钟节奏讲述。本版应用数字以 materials/PUBLISH-VALIDATION.json 为准，历史模型数字见 VALIDATION.json；不要把合成演示或模拟资金描述成真实用户成果。</a:t>
             </a:r>
           </a:p>
         </p:txBody>
@@ -724,7 +726,7 @@
           <a:lstStyle/>
           <a:p>
             <a:r>
-              <a:t>第 12 页。按 docs/competition/DEMO.md 的 8 分钟节奏讲述。数字以 VALIDATION.json 为准；不要把合成演示或模拟资金描述成真实用户成果。</a:t>
+              <a:t>第 12 页。按 docs/competition/DEMO.md 的 8 分钟节奏讲述。本版应用数字以 materials/PUBLISH-VALIDATION.json 为准，历史模型数字见 VALIDATION.json；不要把合成演示或模拟资金描述成真实用户成果。</a:t>
             </a:r>
           </a:p>
         </p:txBody>
@@ -794,7 +796,147 @@
           <a:lstStyle/>
           <a:p>
             <a:r>
-              <a:t>第 13 页。按 docs/competition/DEMO.md 的 8 分钟节奏讲述。数字以 VALIDATION.json 为准；不要把合成演示或模拟资金描述成真实用户成果。</a:t>
+              <a:t>第 13 页。按 docs/competition/DEMO.md 的 8 分钟节奏讲述。本版应用数字以 materials/PUBLISH-VALIDATION.json 为准，历史模型数字见 VALIDATION.json；不要把合成演示或模拟资金描述成真实用户成果。</a:t>
+            </a:r>
+          </a:p>
+        </p:txBody>
+      </p:sp>
+      <p:sp>
+        <p:nvSpPr>
+          <p:cNvPr id="4" name="Slide Number Placeholder 3"/>
+          <p:cNvSpPr>
+            <a:spLocks noGrp="1"/>
+          </p:cNvSpPr>
+          <p:nvPr>
+            <p:ph type="sldNum" idx="5" sz="quarter"/>
+          </p:nvPr>
+        </p:nvSpPr>
+        <p:spPr/>
+      </p:sp>
+    </p:spTree>
+  </p:cSld>
+  <p:clrMapOvr>
+    <a:masterClrMapping/>
+  </p:clrMapOvr>
+</p:notes>
+</file>
+
+<file path=ppt/notesSlides/notesSlide14.xml><?xml version="1.0" encoding="utf-8"?>
+<p:notes xmlns:a="http://schemas.openxmlformats.org/drawingml/2006/main" xmlns:p="http://schemas.openxmlformats.org/presentationml/2006/main" xmlns:r="http://schemas.openxmlformats.org/officeDocument/2006/relationships">
+  <p:cSld>
+    <p:spTree>
+      <p:nvGrpSpPr>
+        <p:cNvPr id="1" name=""/>
+        <p:cNvGrpSpPr/>
+        <p:nvPr/>
+      </p:nvGrpSpPr>
+      <p:grpSpPr>
+        <a:xfrm>
+          <a:off x="0" y="0"/>
+          <a:ext cx="0" cy="0"/>
+          <a:chOff x="0" y="0"/>
+          <a:chExt cx="0" cy="0"/>
+        </a:xfrm>
+      </p:grpSpPr>
+      <p:sp>
+        <p:nvSpPr>
+          <p:cNvPr id="2" name="Slide Image Placeholder 1"/>
+          <p:cNvSpPr>
+            <a:spLocks noGrp="1"/>
+          </p:cNvSpPr>
+          <p:nvPr>
+            <p:ph type="sldImg" idx="2"/>
+          </p:nvPr>
+        </p:nvSpPr>
+        <p:spPr/>
+      </p:sp>
+      <p:sp>
+        <p:nvSpPr>
+          <p:cNvPr id="3" name="Notes Placeholder 2"/>
+          <p:cNvSpPr>
+            <a:spLocks noGrp="1"/>
+          </p:cNvSpPr>
+          <p:nvPr>
+            <p:ph type="body" idx="3" sz="quarter"/>
+          </p:nvPr>
+        </p:nvSpPr>
+        <p:spPr/>
+        <p:txBody>
+          <a:bodyPr/>
+          <a:lstStyle/>
+          <a:p>
+            <a:r>
+              <a:t>第 14 页。按 docs/competition/DEMO.md 的 8 分钟节奏讲述。本版应用数字以 materials/PUBLISH-VALIDATION.json 为准，历史模型数字见 VALIDATION.json；不要把合成演示或模拟资金描述成真实用户成果。</a:t>
+            </a:r>
+          </a:p>
+        </p:txBody>
+      </p:sp>
+      <p:sp>
+        <p:nvSpPr>
+          <p:cNvPr id="4" name="Slide Number Placeholder 3"/>
+          <p:cNvSpPr>
+            <a:spLocks noGrp="1"/>
+          </p:cNvSpPr>
+          <p:nvPr>
+            <p:ph type="sldNum" idx="5" sz="quarter"/>
+          </p:nvPr>
+        </p:nvSpPr>
+        <p:spPr/>
+      </p:sp>
+    </p:spTree>
+  </p:cSld>
+  <p:clrMapOvr>
+    <a:masterClrMapping/>
+  </p:clrMapOvr>
+</p:notes>
+</file>
+
+<file path=ppt/notesSlides/notesSlide15.xml><?xml version="1.0" encoding="utf-8"?>
+<p:notes xmlns:a="http://schemas.openxmlformats.org/drawingml/2006/main" xmlns:p="http://schemas.openxmlformats.org/presentationml/2006/main" xmlns:r="http://schemas.openxmlformats.org/officeDocument/2006/relationships">
+  <p:cSld>
+    <p:spTree>
+      <p:nvGrpSpPr>
+        <p:cNvPr id="1" name=""/>
+        <p:cNvGrpSpPr/>
+        <p:nvPr/>
+      </p:nvGrpSpPr>
+      <p:grpSpPr>
+        <a:xfrm>
+          <a:off x="0" y="0"/>
+          <a:ext cx="0" cy="0"/>
+          <a:chOff x="0" y="0"/>
+          <a:chExt cx="0" cy="0"/>
+        </a:xfrm>
+      </p:grpSpPr>
+      <p:sp>
+        <p:nvSpPr>
+          <p:cNvPr id="2" name="Slide Image Placeholder 1"/>
+          <p:cNvSpPr>
+            <a:spLocks noGrp="1"/>
+          </p:cNvSpPr>
+          <p:nvPr>
+            <p:ph type="sldImg" idx="2"/>
+          </p:nvPr>
+        </p:nvSpPr>
+        <p:spPr/>
+      </p:sp>
+      <p:sp>
+        <p:nvSpPr>
+          <p:cNvPr id="3" name="Notes Placeholder 2"/>
+          <p:cNvSpPr>
+            <a:spLocks noGrp="1"/>
+          </p:cNvSpPr>
+          <p:nvPr>
+            <p:ph type="body" idx="3" sz="quarter"/>
+          </p:nvPr>
+        </p:nvSpPr>
+        <p:spPr/>
+        <p:txBody>
+          <a:bodyPr/>
+          <a:lstStyle/>
+          <a:p>
+            <a:r>
+              <a:t>第 15 页。按 docs/competition/DEMO.md 的 8 分钟节奏讲述。本版应用数字以 materials/PUBLISH-VALIDATION.json 为准，历史模型数字见 VALIDATION.json；不要把合成演示或模拟资金描述成真实用户成果。</a:t>
             </a:r>
           </a:p>
         </p:txBody>
@@ -864,7 +1006,7 @@
           <a:lstStyle/>
           <a:p>
             <a:r>
-              <a:t>第 2 页。按 docs/competition/DEMO.md 的 8 分钟节奏讲述。数字以 VALIDATION.json 为准；不要把合成演示或模拟资金描述成真实用户成果。</a:t>
+              <a:t>第 2 页。按 docs/competition/DEMO.md 的 8 分钟节奏讲述。本版应用数字以 materials/PUBLISH-VALIDATION.json 为准，历史模型数字见 VALIDATION.json；不要把合成演示或模拟资金描述成真实用户成果。</a:t>
             </a:r>
           </a:p>
         </p:txBody>
@@ -934,7 +1076,7 @@
           <a:lstStyle/>
           <a:p>
             <a:r>
-              <a:t>第 3 页。按 docs/competition/DEMO.md 的 8 分钟节奏讲述。数字以 VALIDATION.json 为准；不要把合成演示或模拟资金描述成真实用户成果。</a:t>
+              <a:t>第 3 页。按 docs/competition/DEMO.md 的 8 分钟节奏讲述。本版应用数字以 materials/PUBLISH-VALIDATION.json 为准，历史模型数字见 VALIDATION.json；不要把合成演示或模拟资金描述成真实用户成果。</a:t>
             </a:r>
           </a:p>
         </p:txBody>
@@ -1004,7 +1146,7 @@
           <a:lstStyle/>
           <a:p>
             <a:r>
-              <a:t>第 4 页。按 docs/competition/DEMO.md 的 8 分钟节奏讲述。数字以 VALIDATION.json 为准；不要把合成演示或模拟资金描述成真实用户成果。</a:t>
+              <a:t>第 4 页。按 docs/competition/DEMO.md 的 8 分钟节奏讲述。本版应用数字以 materials/PUBLISH-VALIDATION.json 为准，历史模型数字见 VALIDATION.json；不要把合成演示或模拟资金描述成真实用户成果。</a:t>
             </a:r>
           </a:p>
         </p:txBody>
@@ -1074,7 +1216,7 @@
           <a:lstStyle/>
           <a:p>
             <a:r>
-              <a:t>第 5 页。按 docs/competition/DEMO.md 的 8 分钟节奏讲述。数字以 VALIDATION.json 为准；不要把合成演示或模拟资金描述成真实用户成果。</a:t>
+              <a:t>第 5 页。按 docs/competition/DEMO.md 的 8 分钟节奏讲述。本版应用数字以 materials/PUBLISH-VALIDATION.json 为准，历史模型数字见 VALIDATION.json；不要把合成演示或模拟资金描述成真实用户成果。</a:t>
             </a:r>
           </a:p>
         </p:txBody>
@@ -1144,7 +1286,7 @@
           <a:lstStyle/>
           <a:p>
             <a:r>
-              <a:t>第 6 页。按 docs/competition/DEMO.md 的 8 分钟节奏讲述。数字以 VALIDATION.json 为准；不要把合成演示或模拟资金描述成真实用户成果。</a:t>
+              <a:t>第 6 页。按 docs/competition/DEMO.md 的 8 分钟节奏讲述。本版应用数字以 materials/PUBLISH-VALIDATION.json 为准，历史模型数字见 VALIDATION.json；不要把合成演示或模拟资金描述成真实用户成果。</a:t>
             </a:r>
           </a:p>
         </p:txBody>
@@ -1214,7 +1356,7 @@
           <a:lstStyle/>
           <a:p>
             <a:r>
-              <a:t>第 7 页。按 docs/competition/DEMO.md 的 8 分钟节奏讲述。数字以 VALIDATION.json 为准；不要把合成演示或模拟资金描述成真实用户成果。</a:t>
+              <a:t>第 7 页。按 docs/competition/DEMO.md 的 8 分钟节奏讲述。本版应用数字以 materials/PUBLISH-VALIDATION.json 为准，历史模型数字见 VALIDATION.json；不要把合成演示或模拟资金描述成真实用户成果。</a:t>
             </a:r>
           </a:p>
         </p:txBody>
@@ -1284,7 +1426,7 @@
           <a:lstStyle/>
           <a:p>
             <a:r>
-              <a:t>第 8 页。按 docs/competition/DEMO.md 的 8 分钟节奏讲述。数字以 VALIDATION.json 为准；不要把合成演示或模拟资金描述成真实用户成果。</a:t>
+              <a:t>第 8 页。按 docs/competition/DEMO.md 的 8 分钟节奏讲述。本版应用数字以 materials/PUBLISH-VALIDATION.json 为准，历史模型数字见 VALIDATION.json；不要把合成演示或模拟资金描述成真实用户成果。</a:t>
             </a:r>
           </a:p>
         </p:txBody>
@@ -1354,7 +1496,7 @@
           <a:lstStyle/>
           <a:p>
             <a:r>
-              <a:t>第 9 页。按 docs/competition/DEMO.md 的 8 分钟节奏讲述。数字以 VALIDATION.json 为准；不要把合成演示或模拟资金描述成真实用户成果。</a:t>
+              <a:t>第 9 页。按 docs/competition/DEMO.md 的 8 分钟节奏讲述。本版应用数字以 materials/PUBLISH-VALIDATION.json 为准，历史模型数字见 VALIDATION.json；不要把合成演示或模拟资金描述成真实用户成果。</a:t>
             </a:r>
           </a:p>
         </p:txBody>
@@ -4719,7 +4861,7 @@
                 </a:solidFill>
                 <a:latin typeface="Microsoft YaHei"/>
               </a:rPr>
-              <a:t>3 人团队  ｜  8 分钟演示  ｜  比赛原型</a:t>
+              <a:t>2 人团队  ｜  8 分钟演示  ｜  比赛原型</a:t>
             </a:r>
           </a:p>
         </p:txBody>
@@ -4899,7 +5041,7 @@
                 </a:solidFill>
                 <a:latin typeface="Microsoft YaHei"/>
               </a:rPr>
-              <a:t>数据飞轮从明确同意和人工审核开始</a:t>
+              <a:t>投研先核对数据，再组织报告</a:t>
             </a:r>
           </a:p>
         </p:txBody>
@@ -5034,7 +5176,7 @@
         <p:spPr>
           <a:xfrm>
             <a:off x="1024128" y="1572768"/>
-            <a:ext cx="10241280" cy="320040"/>
+            <a:ext cx="6537959" cy="320040"/>
           </a:xfrm>
           <a:prstGeom prst="rect">
             <a:avLst/>
@@ -5059,7 +5201,7 @@
                 </a:solidFill>
                 <a:latin typeface="Microsoft YaHei"/>
               </a:rPr>
-              <a:t>默认关闭，用户控制</a:t>
+              <a:t>异常行情先隔离</a:t>
             </a:r>
           </a:p>
         </p:txBody>
@@ -5073,7 +5215,7 @@
         <p:spPr>
           <a:xfrm>
             <a:off x="1024128" y="1965960"/>
-            <a:ext cx="10241280" cy="530352"/>
+            <a:ext cx="6537959" cy="530352"/>
           </a:xfrm>
           <a:prstGeom prst="rect">
             <a:avLst/>
@@ -5098,7 +5240,7 @@
                 </a:solidFill>
                 <a:latin typeface="Microsoft YaHei"/>
               </a:rPr>
-              <a:t>改正草稿→结构化候选→逐条审核；退出删除未训练反馈</a:t>
+              <a:t>校验 OHLC 基本关系，保留原文件以便追溯</a:t>
             </a:r>
           </a:p>
         </p:txBody>
@@ -5155,7 +5297,7 @@
         <p:spPr>
           <a:xfrm>
             <a:off x="1024128" y="2560320"/>
-            <a:ext cx="10241280" cy="320040"/>
+            <a:ext cx="6537959" cy="320040"/>
           </a:xfrm>
           <a:prstGeom prst="rect">
             <a:avLst/>
@@ -5180,7 +5322,7 @@
                 </a:solidFill>
                 <a:latin typeface="Microsoft YaHei"/>
               </a:rPr>
-              <a:t>最小化分享</a:t>
+              <a:t>不臆造成交额</a:t>
             </a:r>
           </a:p>
         </p:txBody>
@@ -5194,7 +5336,7 @@
         <p:spPr>
           <a:xfrm>
             <a:off x="1024128" y="2953512"/>
-            <a:ext cx="10241280" cy="530352"/>
+            <a:ext cx="6537959" cy="530352"/>
           </a:xfrm>
           <a:prstGeom prst="rect">
             <a:avLst/>
@@ -5219,7 +5361,7 @@
                 </a:solidFill>
                 <a:latin typeface="Microsoft YaHei"/>
               </a:rPr>
-              <a:t>操作种类、登记别名、方案、金额区间；没有原话或精确金额</a:t>
+              <a:t>成交量单位缺失时，不换算资金或推断流向</a:t>
             </a:r>
           </a:p>
         </p:txBody>
@@ -5276,7 +5418,7 @@
         <p:spPr>
           <a:xfrm>
             <a:off x="1024128" y="3547872"/>
-            <a:ext cx="10241280" cy="320040"/>
+            <a:ext cx="6537959" cy="320040"/>
           </a:xfrm>
           <a:prstGeom prst="rect">
             <a:avLst/>
@@ -5301,7 +5443,7 @@
                 </a:solidFill>
                 <a:latin typeface="Microsoft YaHei"/>
               </a:rPr>
-              <a:t>离线训练与发布</a:t>
+              <a:t>只引用核对后的事实</a:t>
             </a:r>
           </a:p>
         </p:txBody>
@@ -5315,7 +5457,7 @@
         <p:spPr>
           <a:xfrm>
             <a:off x="1024128" y="3941063"/>
-            <a:ext cx="10241280" cy="530352"/>
+            <a:ext cx="6537959" cy="530352"/>
           </a:xfrm>
           <a:prstGeom prst="rect">
             <a:avLst/>
@@ -5340,7 +5482,7 @@
                 </a:solidFill>
                 <a:latin typeface="Microsoft YaHei"/>
               </a:rPr>
-              <a:t>按组拆分、固定旧记账测试、完整评测、哈希登记与回滚</a:t>
+              <a:t>日期、价格、标题来自目录，模型只选择已有条目</a:t>
             </a:r>
           </a:p>
         </p:txBody>
@@ -5397,7 +5539,7 @@
         <p:spPr>
           <a:xfrm>
             <a:off x="1024128" y="4535424"/>
-            <a:ext cx="10241280" cy="320040"/>
+            <a:ext cx="6537959" cy="320040"/>
           </a:xfrm>
           <a:prstGeom prst="rect">
             <a:avLst/>
@@ -5422,7 +5564,7 @@
                 </a:solidFill>
                 <a:latin typeface="Microsoft YaHei"/>
               </a:rPr>
-              <a:t>本轮真实边界</a:t>
+              <a:t>明确历史边界</a:t>
             </a:r>
           </a:p>
         </p:txBody>
@@ -5436,7 +5578,7 @@
         <p:spPr>
           <a:xfrm>
             <a:off x="1024128" y="4928616"/>
-            <a:ext cx="10241280" cy="530352"/>
+            <a:ext cx="6537959" cy="530352"/>
           </a:xfrm>
           <a:prstGeom prst="rect">
             <a:avLst/>
@@ -5461,11 +5603,81 @@
                 </a:solidFill>
                 <a:latin typeface="Microsoft YaHei"/>
               </a:rPr>
-              <a:t>隔离开发者演示反馈 1 条；真实用户反馈 0 条，不宣称用户增长</a:t>
-            </a:r>
-          </a:p>
-        </p:txBody>
-      </p:sp>
+              <a:t>可用图表继续保留，异常个股显示待核对</a:t>
+            </a:r>
+          </a:p>
+        </p:txBody>
+      </p:sp>
+      <p:sp>
+        <p:nvSpPr>
+          <p:cNvPr id="18" name="Rounded Rectangle 17"/>
+          <p:cNvSpPr/>
+          <p:nvPr/>
+        </p:nvSpPr>
+        <p:spPr>
+          <a:xfrm>
+            <a:off x="8229600" y="1371600"/>
+            <a:ext cx="2423160" cy="4800600"/>
+          </a:xfrm>
+          <a:prstGeom prst="roundRect">
+            <a:avLst>
+              <a:gd name="adj" fmla="val 12000"/>
+            </a:avLst>
+          </a:prstGeom>
+          <a:solidFill>
+            <a:srgbClr val="17212B"/>
+          </a:solidFill>
+          <a:ln>
+            <a:noFill/>
+          </a:ln>
+        </p:spPr>
+        <p:style>
+          <a:lnRef idx="1">
+            <a:schemeClr val="accent1"/>
+          </a:lnRef>
+          <a:fillRef idx="3">
+            <a:schemeClr val="accent1"/>
+          </a:fillRef>
+          <a:effectRef idx="2">
+            <a:schemeClr val="accent1"/>
+          </a:effectRef>
+          <a:fontRef idx="minor">
+            <a:schemeClr val="lt1"/>
+          </a:fontRef>
+        </p:style>
+        <p:txBody>
+          <a:bodyPr rtlCol="0" anchor="ctr"/>
+          <a:lstStyle/>
+          <a:p>
+            <a:pPr algn="ctr"/>
+          </a:p>
+        </p:txBody>
+      </p:sp>
+      <p:pic>
+        <p:nvPicPr>
+          <p:cNvPr id="19" name="Picture 18" descr="research-quality.png"/>
+          <p:cNvPicPr>
+            <a:picLocks noChangeAspect="1"/>
+          </p:cNvPicPr>
+          <p:nvPr/>
+        </p:nvPicPr>
+        <p:blipFill>
+          <a:blip r:embed="rId2"/>
+          <a:srcRect b="4922"/>
+          <a:stretch>
+            <a:fillRect/>
+          </a:stretch>
+        </p:blipFill>
+        <p:spPr>
+          <a:xfrm>
+            <a:off x="8321040" y="1463040"/>
+            <a:ext cx="2240280" cy="4617720"/>
+          </a:xfrm>
+          <a:prstGeom prst="rect">
+            <a:avLst/>
+          </a:prstGeom>
+        </p:spPr>
+      </p:pic>
     </p:spTree>
   </p:cSld>
   <p:clrMapOvr>
@@ -5571,7 +5783,7 @@
                 </a:solidFill>
                 <a:latin typeface="Microsoft YaHei"/>
               </a:rPr>
-              <a:t>既有模型成绩与应用验证分别列示</a:t>
+              <a:t>安全保护出现在真实操作节点</a:t>
             </a:r>
           </a:p>
         </p:txBody>
@@ -5656,103 +5868,17 @@
       </p:sp>
       <p:sp>
         <p:nvSpPr>
-          <p:cNvPr id="6" name="TextBox 5"/>
-          <p:cNvSpPr txBox="1"/>
-          <p:nvPr/>
-        </p:nvSpPr>
-        <p:spPr>
-          <a:xfrm>
-            <a:off x="804672" y="1481328"/>
-            <a:ext cx="3017520" cy="320040"/>
-          </a:xfrm>
-          <a:prstGeom prst="rect">
-            <a:avLst/>
-          </a:prstGeom>
-          <a:noFill/>
-        </p:spPr>
-        <p:txBody>
-          <a:bodyPr wrap="square" lIns="0" rIns="0" tIns="0" bIns="0">
-            <a:spAutoFit/>
-          </a:bodyPr>
-          <a:lstStyle/>
-          <a:p>
-            <a:pPr>
-              <a:spcAft>
-                <a:spcPts val="1200"/>
-              </a:spcAft>
-            </a:pPr>
-            <a:r>
-              <a:rPr sz="2100" b="1">
-                <a:solidFill>
-                  <a:srgbClr val="17212B"/>
-                </a:solidFill>
-                <a:latin typeface="Microsoft YaHei"/>
-              </a:rPr>
-              <a:t>记账提取</a:t>
-            </a:r>
-          </a:p>
-        </p:txBody>
-      </p:sp>
-      <p:sp>
-        <p:nvSpPr>
-          <p:cNvPr id="7" name="Rounded Rectangle 6"/>
+          <p:cNvPr id="6" name="Rectangle 5"/>
           <p:cNvSpPr/>
           <p:nvPr/>
         </p:nvSpPr>
         <p:spPr>
           <a:xfrm>
-            <a:off x="3657600" y="1527048"/>
-            <a:ext cx="6126480" cy="192024"/>
-          </a:xfrm>
-          <a:prstGeom prst="roundRect">
-            <a:avLst>
-              <a:gd name="adj" fmla="val 12000"/>
-            </a:avLst>
-          </a:prstGeom>
-          <a:solidFill>
-            <a:srgbClr val="DFE6F1"/>
-          </a:solidFill>
-          <a:ln>
-            <a:noFill/>
-          </a:ln>
-        </p:spPr>
-        <p:style>
-          <a:lnRef idx="1">
-            <a:schemeClr val="accent1"/>
-          </a:lnRef>
-          <a:fillRef idx="3">
-            <a:schemeClr val="accent1"/>
-          </a:fillRef>
-          <a:effectRef idx="2">
-            <a:schemeClr val="accent1"/>
-          </a:effectRef>
-          <a:fontRef idx="minor">
-            <a:schemeClr val="lt1"/>
-          </a:fontRef>
-        </p:style>
-        <p:txBody>
-          <a:bodyPr rtlCol="0" anchor="ctr"/>
-          <a:lstStyle/>
-          <a:p>
-            <a:pPr algn="ctr"/>
-          </a:p>
-        </p:txBody>
-      </p:sp>
-      <p:sp>
-        <p:nvSpPr>
-          <p:cNvPr id="8" name="Rounded Rectangle 7"/>
-          <p:cNvSpPr/>
-          <p:nvPr/>
-        </p:nvSpPr>
-        <p:spPr>
-          <a:xfrm>
-            <a:off x="3657600" y="1527048"/>
-            <a:ext cx="6126480" cy="192024"/>
-          </a:xfrm>
-          <a:prstGeom prst="roundRect">
-            <a:avLst>
-              <a:gd name="adj" fmla="val 12000"/>
-            </a:avLst>
+            <a:off x="777240" y="1572768"/>
+            <a:ext cx="91440" cy="640080"/>
+          </a:xfrm>
+          <a:prstGeom prst="rect">
+            <a:avLst/>
           </a:prstGeom>
           <a:solidFill>
             <a:srgbClr val="3448ED"/>
@@ -5785,53 +5911,14 @@
       </p:sp>
       <p:sp>
         <p:nvSpPr>
-          <p:cNvPr id="9" name="TextBox 8"/>
-          <p:cNvSpPr txBox="1"/>
-          <p:nvPr/>
-        </p:nvSpPr>
-        <p:spPr>
-          <a:xfrm>
-            <a:off x="10058400" y="1472184"/>
-            <a:ext cx="1508760" cy="365760"/>
-          </a:xfrm>
-          <a:prstGeom prst="rect">
-            <a:avLst/>
-          </a:prstGeom>
-          <a:noFill/>
-        </p:spPr>
-        <p:txBody>
-          <a:bodyPr wrap="square" lIns="0" rIns="0" tIns="0" bIns="0">
-            <a:spAutoFit/>
-          </a:bodyPr>
-          <a:lstStyle/>
-          <a:p>
-            <a:pPr>
-              <a:spcAft>
-                <a:spcPts val="1200"/>
-              </a:spcAft>
-            </a:pPr>
-            <a:r>
-              <a:rPr sz="2300" b="1">
-                <a:solidFill>
-                  <a:srgbClr val="3448ED"/>
-                </a:solidFill>
-                <a:latin typeface="Microsoft YaHei"/>
-              </a:rPr>
-              <a:t>144/144</a:t>
-            </a:r>
-          </a:p>
-        </p:txBody>
-      </p:sp>
-      <p:sp>
-        <p:nvSpPr>
-          <p:cNvPr id="10" name="TextBox 9"/>
-          <p:cNvSpPr txBox="1"/>
-          <p:nvPr/>
-        </p:nvSpPr>
-        <p:spPr>
-          <a:xfrm>
-            <a:off x="804672" y="2231136"/>
-            <a:ext cx="3017520" cy="320040"/>
+          <p:cNvPr id="7" name="TextBox 6"/>
+          <p:cNvSpPr txBox="1"/>
+          <p:nvPr/>
+        </p:nvSpPr>
+        <p:spPr>
+          <a:xfrm>
+            <a:off x="1024128" y="1572768"/>
+            <a:ext cx="6537959" cy="320040"/>
           </a:xfrm>
           <a:prstGeom prst="rect">
             <a:avLst/>
@@ -5856,71 +5943,63 @@
                 </a:solidFill>
                 <a:latin typeface="Microsoft YaHei"/>
               </a:rPr>
-              <a:t>缺失信息追问</a:t>
-            </a:r>
-          </a:p>
-        </p:txBody>
-      </p:sp>
-      <p:sp>
-        <p:nvSpPr>
-          <p:cNvPr id="11" name="Rounded Rectangle 10"/>
+              <a:t>完整参数确认</a:t>
+            </a:r>
+          </a:p>
+        </p:txBody>
+      </p:sp>
+      <p:sp>
+        <p:nvSpPr>
+          <p:cNvPr id="8" name="TextBox 7"/>
+          <p:cNvSpPr txBox="1"/>
+          <p:nvPr/>
+        </p:nvSpPr>
+        <p:spPr>
+          <a:xfrm>
+            <a:off x="1024128" y="1965960"/>
+            <a:ext cx="6537959" cy="530352"/>
+          </a:xfrm>
+          <a:prstGeom prst="rect">
+            <a:avLst/>
+          </a:prstGeom>
+          <a:noFill/>
+        </p:spPr>
+        <p:txBody>
+          <a:bodyPr wrap="square" lIns="0" rIns="0" tIns="0" bIns="0">
+            <a:spAutoFit/>
+          </a:bodyPr>
+          <a:lstStyle/>
+          <a:p>
+            <a:pPr>
+              <a:spcAft>
+                <a:spcPts val="1200"/>
+              </a:spcAft>
+            </a:pPr>
+            <a:r>
+              <a:rPr sz="1700" b="0">
+                <a:solidFill>
+                  <a:srgbClr val="607086"/>
+                </a:solidFill>
+                <a:latin typeface="Microsoft YaHei"/>
+              </a:rPr>
+              <a:t>收款方、金额、请求摘要与会话绑定</a:t>
+            </a:r>
+          </a:p>
+        </p:txBody>
+      </p:sp>
+      <p:sp>
+        <p:nvSpPr>
+          <p:cNvPr id="9" name="Rectangle 8"/>
           <p:cNvSpPr/>
           <p:nvPr/>
         </p:nvSpPr>
         <p:spPr>
           <a:xfrm>
-            <a:off x="3657600" y="2276856"/>
-            <a:ext cx="6126480" cy="192024"/>
-          </a:xfrm>
-          <a:prstGeom prst="roundRect">
-            <a:avLst>
-              <a:gd name="adj" fmla="val 12000"/>
-            </a:avLst>
-          </a:prstGeom>
-          <a:solidFill>
-            <a:srgbClr val="DFE6F1"/>
-          </a:solidFill>
-          <a:ln>
-            <a:noFill/>
-          </a:ln>
-        </p:spPr>
-        <p:style>
-          <a:lnRef idx="1">
-            <a:schemeClr val="accent1"/>
-          </a:lnRef>
-          <a:fillRef idx="3">
-            <a:schemeClr val="accent1"/>
-          </a:fillRef>
-          <a:effectRef idx="2">
-            <a:schemeClr val="accent1"/>
-          </a:effectRef>
-          <a:fontRef idx="minor">
-            <a:schemeClr val="lt1"/>
-          </a:fontRef>
-        </p:style>
-        <p:txBody>
-          <a:bodyPr rtlCol="0" anchor="ctr"/>
-          <a:lstStyle/>
-          <a:p>
-            <a:pPr algn="ctr"/>
-          </a:p>
-        </p:txBody>
-      </p:sp>
-      <p:sp>
-        <p:nvSpPr>
-          <p:cNvPr id="12" name="Rounded Rectangle 11"/>
-          <p:cNvSpPr/>
-          <p:nvPr/>
-        </p:nvSpPr>
-        <p:spPr>
-          <a:xfrm>
-            <a:off x="3657600" y="2276856"/>
-            <a:ext cx="6126480" cy="192024"/>
-          </a:xfrm>
-          <a:prstGeom prst="roundRect">
-            <a:avLst>
-              <a:gd name="adj" fmla="val 12000"/>
-            </a:avLst>
+            <a:off x="777240" y="2560320"/>
+            <a:ext cx="91440" cy="640080"/>
+          </a:xfrm>
+          <a:prstGeom prst="rect">
+            <a:avLst/>
           </a:prstGeom>
           <a:solidFill>
             <a:srgbClr val="3448ED"/>
@@ -5953,53 +6032,14 @@
       </p:sp>
       <p:sp>
         <p:nvSpPr>
-          <p:cNvPr id="13" name="TextBox 12"/>
-          <p:cNvSpPr txBox="1"/>
-          <p:nvPr/>
-        </p:nvSpPr>
-        <p:spPr>
-          <a:xfrm>
-            <a:off x="10058400" y="2221992"/>
-            <a:ext cx="1508760" cy="365760"/>
-          </a:xfrm>
-          <a:prstGeom prst="rect">
-            <a:avLst/>
-          </a:prstGeom>
-          <a:noFill/>
-        </p:spPr>
-        <p:txBody>
-          <a:bodyPr wrap="square" lIns="0" rIns="0" tIns="0" bIns="0">
-            <a:spAutoFit/>
-          </a:bodyPr>
-          <a:lstStyle/>
-          <a:p>
-            <a:pPr>
-              <a:spcAft>
-                <a:spcPts val="1200"/>
-              </a:spcAft>
-            </a:pPr>
-            <a:r>
-              <a:rPr sz="2300" b="1">
-                <a:solidFill>
-                  <a:srgbClr val="3448ED"/>
-                </a:solidFill>
-                <a:latin typeface="Microsoft YaHei"/>
-              </a:rPr>
-              <a:t>14/14</a:t>
-            </a:r>
-          </a:p>
-        </p:txBody>
-      </p:sp>
-      <p:sp>
-        <p:nvSpPr>
-          <p:cNvPr id="14" name="TextBox 13"/>
-          <p:cNvSpPr txBox="1"/>
-          <p:nvPr/>
-        </p:nvSpPr>
-        <p:spPr>
-          <a:xfrm>
-            <a:off x="804672" y="2980944"/>
-            <a:ext cx="3017520" cy="320040"/>
+          <p:cNvPr id="10" name="TextBox 9"/>
+          <p:cNvSpPr txBox="1"/>
+          <p:nvPr/>
+        </p:nvSpPr>
+        <p:spPr>
+          <a:xfrm>
+            <a:off x="1024128" y="2560320"/>
+            <a:ext cx="6537959" cy="320040"/>
           </a:xfrm>
           <a:prstGeom prst="rect">
             <a:avLst/>
@@ -6024,71 +6064,63 @@
                 </a:solidFill>
                 <a:latin typeface="Microsoft YaHei"/>
               </a:rPr>
-              <a:t>统计摘要</a:t>
-            </a:r>
-          </a:p>
-        </p:txBody>
-      </p:sp>
-      <p:sp>
-        <p:nvSpPr>
-          <p:cNvPr id="15" name="Rounded Rectangle 14"/>
+              <a:t>累计大额动态验证</a:t>
+            </a:r>
+          </a:p>
+        </p:txBody>
+      </p:sp>
+      <p:sp>
+        <p:nvSpPr>
+          <p:cNvPr id="11" name="TextBox 10"/>
+          <p:cNvSpPr txBox="1"/>
+          <p:nvPr/>
+        </p:nvSpPr>
+        <p:spPr>
+          <a:xfrm>
+            <a:off x="1024128" y="2953512"/>
+            <a:ext cx="6537959" cy="530352"/>
+          </a:xfrm>
+          <a:prstGeom prst="rect">
+            <a:avLst/>
+          </a:prstGeom>
+          <a:noFill/>
+        </p:spPr>
+        <p:txBody>
+          <a:bodyPr wrap="square" lIns="0" rIns="0" tIns="0" bIns="0">
+            <a:spAutoFit/>
+          </a:bodyPr>
+          <a:lstStyle/>
+          <a:p>
+            <a:pPr>
+              <a:spcAft>
+                <a:spcPts val="1200"/>
+              </a:spcAft>
+            </a:pPr>
+            <a:r>
+              <a:rPr sz="1700" b="0">
+                <a:solidFill>
+                  <a:srgbClr val="607086"/>
+                </a:solidFill>
+                <a:latin typeface="Microsoft YaHei"/>
+              </a:rPr>
+              <a:t>真实 TOTP 注册与校验，旧验证码不能再用</a:t>
+            </a:r>
+          </a:p>
+        </p:txBody>
+      </p:sp>
+      <p:sp>
+        <p:nvSpPr>
+          <p:cNvPr id="12" name="Rectangle 11"/>
           <p:cNvSpPr/>
           <p:nvPr/>
         </p:nvSpPr>
         <p:spPr>
           <a:xfrm>
-            <a:off x="3657600" y="3026663"/>
-            <a:ext cx="6126480" cy="192024"/>
-          </a:xfrm>
-          <a:prstGeom prst="roundRect">
-            <a:avLst>
-              <a:gd name="adj" fmla="val 12000"/>
-            </a:avLst>
-          </a:prstGeom>
-          <a:solidFill>
-            <a:srgbClr val="DFE6F1"/>
-          </a:solidFill>
-          <a:ln>
-            <a:noFill/>
-          </a:ln>
-        </p:spPr>
-        <p:style>
-          <a:lnRef idx="1">
-            <a:schemeClr val="accent1"/>
-          </a:lnRef>
-          <a:fillRef idx="3">
-            <a:schemeClr val="accent1"/>
-          </a:fillRef>
-          <a:effectRef idx="2">
-            <a:schemeClr val="accent1"/>
-          </a:effectRef>
-          <a:fontRef idx="minor">
-            <a:schemeClr val="lt1"/>
-          </a:fontRef>
-        </p:style>
-        <p:txBody>
-          <a:bodyPr rtlCol="0" anchor="ctr"/>
-          <a:lstStyle/>
-          <a:p>
-            <a:pPr algn="ctr"/>
-          </a:p>
-        </p:txBody>
-      </p:sp>
-      <p:sp>
-        <p:nvSpPr>
-          <p:cNvPr id="16" name="Rounded Rectangle 15"/>
-          <p:cNvSpPr/>
-          <p:nvPr/>
-        </p:nvSpPr>
-        <p:spPr>
-          <a:xfrm>
-            <a:off x="3657600" y="3026663"/>
-            <a:ext cx="6126480" cy="192024"/>
-          </a:xfrm>
-          <a:prstGeom prst="roundRect">
-            <a:avLst>
-              <a:gd name="adj" fmla="val 12000"/>
-            </a:avLst>
+            <a:off x="777240" y="3547872"/>
+            <a:ext cx="91440" cy="640080"/>
+          </a:xfrm>
+          <a:prstGeom prst="rect">
+            <a:avLst/>
           </a:prstGeom>
           <a:solidFill>
             <a:srgbClr val="3448ED"/>
@@ -6121,53 +6153,14 @@
       </p:sp>
       <p:sp>
         <p:nvSpPr>
-          <p:cNvPr id="17" name="TextBox 16"/>
-          <p:cNvSpPr txBox="1"/>
-          <p:nvPr/>
-        </p:nvSpPr>
-        <p:spPr>
-          <a:xfrm>
-            <a:off x="10058400" y="2971800"/>
-            <a:ext cx="1508760" cy="365760"/>
-          </a:xfrm>
-          <a:prstGeom prst="rect">
-            <a:avLst/>
-          </a:prstGeom>
-          <a:noFill/>
-        </p:spPr>
-        <p:txBody>
-          <a:bodyPr wrap="square" lIns="0" rIns="0" tIns="0" bIns="0">
-            <a:spAutoFit/>
-          </a:bodyPr>
-          <a:lstStyle/>
-          <a:p>
-            <a:pPr>
-              <a:spcAft>
-                <a:spcPts val="1200"/>
-              </a:spcAft>
-            </a:pPr>
-            <a:r>
-              <a:rPr sz="2300" b="1">
-                <a:solidFill>
-                  <a:srgbClr val="3448ED"/>
-                </a:solidFill>
-                <a:latin typeface="Microsoft YaHei"/>
-              </a:rPr>
-              <a:t>16/16</a:t>
-            </a:r>
-          </a:p>
-        </p:txBody>
-      </p:sp>
-      <p:sp>
-        <p:nvSpPr>
-          <p:cNvPr id="18" name="TextBox 17"/>
-          <p:cNvSpPr txBox="1"/>
-          <p:nvPr/>
-        </p:nvSpPr>
-        <p:spPr>
-          <a:xfrm>
-            <a:off x="804672" y="3730752"/>
-            <a:ext cx="3017520" cy="320040"/>
+          <p:cNvPr id="13" name="TextBox 12"/>
+          <p:cNvSpPr txBox="1"/>
+          <p:nvPr/>
+        </p:nvSpPr>
+        <p:spPr>
+          <a:xfrm>
+            <a:off x="1024128" y="3547872"/>
+            <a:ext cx="6537959" cy="320040"/>
           </a:xfrm>
           <a:prstGeom prst="rect">
             <a:avLst/>
@@ -6192,71 +6185,63 @@
                 </a:solidFill>
                 <a:latin typeface="Microsoft YaHei"/>
               </a:rPr>
-              <a:t>银行意图</a:t>
-            </a:r>
-          </a:p>
-        </p:txBody>
-      </p:sp>
-      <p:sp>
-        <p:nvSpPr>
-          <p:cNvPr id="19" name="Rounded Rectangle 18"/>
+              <a:t>防重复与持久回执</a:t>
+            </a:r>
+          </a:p>
+        </p:txBody>
+      </p:sp>
+      <p:sp>
+        <p:nvSpPr>
+          <p:cNvPr id="14" name="TextBox 13"/>
+          <p:cNvSpPr txBox="1"/>
+          <p:nvPr/>
+        </p:nvSpPr>
+        <p:spPr>
+          <a:xfrm>
+            <a:off x="1024128" y="3941063"/>
+            <a:ext cx="6537959" cy="530352"/>
+          </a:xfrm>
+          <a:prstGeom prst="rect">
+            <a:avLst/>
+          </a:prstGeom>
+          <a:noFill/>
+        </p:spPr>
+        <p:txBody>
+          <a:bodyPr wrap="square" lIns="0" rIns="0" tIns="0" bIns="0">
+            <a:spAutoFit/>
+          </a:bodyPr>
+          <a:lstStyle/>
+          <a:p>
+            <a:pPr>
+              <a:spcAft>
+                <a:spcPts val="1200"/>
+              </a:spcAft>
+            </a:pPr>
+            <a:r>
+              <a:rPr sz="1700" b="0">
+                <a:solidFill>
+                  <a:srgbClr val="607086"/>
+                </a:solidFill>
+                <a:latin typeface="Microsoft YaHei"/>
+              </a:rPr>
+              <a:t>相同草稿再次打开只返回原操作</a:t>
+            </a:r>
+          </a:p>
+        </p:txBody>
+      </p:sp>
+      <p:sp>
+        <p:nvSpPr>
+          <p:cNvPr id="15" name="Rectangle 14"/>
           <p:cNvSpPr/>
           <p:nvPr/>
         </p:nvSpPr>
         <p:spPr>
           <a:xfrm>
-            <a:off x="3657600" y="3776472"/>
-            <a:ext cx="6126480" cy="192024"/>
-          </a:xfrm>
-          <a:prstGeom prst="roundRect">
-            <a:avLst>
-              <a:gd name="adj" fmla="val 12000"/>
-            </a:avLst>
-          </a:prstGeom>
-          <a:solidFill>
-            <a:srgbClr val="DFE6F1"/>
-          </a:solidFill>
-          <a:ln>
-            <a:noFill/>
-          </a:ln>
-        </p:spPr>
-        <p:style>
-          <a:lnRef idx="1">
-            <a:schemeClr val="accent1"/>
-          </a:lnRef>
-          <a:fillRef idx="3">
-            <a:schemeClr val="accent1"/>
-          </a:fillRef>
-          <a:effectRef idx="2">
-            <a:schemeClr val="accent1"/>
-          </a:effectRef>
-          <a:fontRef idx="minor">
-            <a:schemeClr val="lt1"/>
-          </a:fontRef>
-        </p:style>
-        <p:txBody>
-          <a:bodyPr rtlCol="0" anchor="ctr"/>
-          <a:lstStyle/>
-          <a:p>
-            <a:pPr algn="ctr"/>
-          </a:p>
-        </p:txBody>
-      </p:sp>
-      <p:sp>
-        <p:nvSpPr>
-          <p:cNvPr id="20" name="Rounded Rectangle 19"/>
-          <p:cNvSpPr/>
-          <p:nvPr/>
-        </p:nvSpPr>
-        <p:spPr>
-          <a:xfrm>
-            <a:off x="3657600" y="3776472"/>
-            <a:ext cx="5893828" cy="192024"/>
-          </a:xfrm>
-          <a:prstGeom prst="roundRect">
-            <a:avLst>
-              <a:gd name="adj" fmla="val 12000"/>
-            </a:avLst>
+            <a:off x="777240" y="4535424"/>
+            <a:ext cx="91440" cy="640080"/>
+          </a:xfrm>
+          <a:prstGeom prst="rect">
+            <a:avLst/>
           </a:prstGeom>
           <a:solidFill>
             <a:srgbClr val="3448ED"/>
@@ -6289,53 +6274,14 @@
       </p:sp>
       <p:sp>
         <p:nvSpPr>
-          <p:cNvPr id="21" name="TextBox 20"/>
-          <p:cNvSpPr txBox="1"/>
-          <p:nvPr/>
-        </p:nvSpPr>
-        <p:spPr>
-          <a:xfrm>
-            <a:off x="10058400" y="3721608"/>
-            <a:ext cx="1508760" cy="365760"/>
-          </a:xfrm>
-          <a:prstGeom prst="rect">
-            <a:avLst/>
-          </a:prstGeom>
-          <a:noFill/>
-        </p:spPr>
-        <p:txBody>
-          <a:bodyPr wrap="square" lIns="0" rIns="0" tIns="0" bIns="0">
-            <a:spAutoFit/>
-          </a:bodyPr>
-          <a:lstStyle/>
-          <a:p>
-            <a:pPr>
-              <a:spcAft>
-                <a:spcPts val="1200"/>
-              </a:spcAft>
-            </a:pPr>
-            <a:r>
-              <a:rPr sz="2300" b="1">
-                <a:solidFill>
-                  <a:srgbClr val="3448ED"/>
-                </a:solidFill>
-                <a:latin typeface="Microsoft YaHei"/>
-              </a:rPr>
-              <a:t>76/79</a:t>
-            </a:r>
-          </a:p>
-        </p:txBody>
-      </p:sp>
-      <p:sp>
-        <p:nvSpPr>
-          <p:cNvPr id="22" name="TextBox 21"/>
-          <p:cNvSpPr txBox="1"/>
-          <p:nvPr/>
-        </p:nvSpPr>
-        <p:spPr>
-          <a:xfrm>
-            <a:off x="804672" y="4480560"/>
-            <a:ext cx="3017520" cy="320040"/>
+          <p:cNvPr id="16" name="TextBox 15"/>
+          <p:cNvSpPr txBox="1"/>
+          <p:nvPr/>
+        </p:nvSpPr>
+        <p:spPr>
+          <a:xfrm>
+            <a:off x="1024128" y="4535424"/>
+            <a:ext cx="6537959" cy="320040"/>
           </a:xfrm>
           <a:prstGeom prst="rect">
             <a:avLst/>
@@ -6360,21 +6306,60 @@
                 </a:solidFill>
                 <a:latin typeface="Microsoft YaHei"/>
               </a:rPr>
-              <a:t>画像依据</a:t>
-            </a:r>
-          </a:p>
-        </p:txBody>
-      </p:sp>
-      <p:sp>
-        <p:nvSpPr>
-          <p:cNvPr id="23" name="Rounded Rectangle 22"/>
+              <a:t>未知先核账</a:t>
+            </a:r>
+          </a:p>
+        </p:txBody>
+      </p:sp>
+      <p:sp>
+        <p:nvSpPr>
+          <p:cNvPr id="17" name="TextBox 16"/>
+          <p:cNvSpPr txBox="1"/>
+          <p:nvPr/>
+        </p:nvSpPr>
+        <p:spPr>
+          <a:xfrm>
+            <a:off x="1024128" y="4928616"/>
+            <a:ext cx="6537959" cy="530352"/>
+          </a:xfrm>
+          <a:prstGeom prst="rect">
+            <a:avLst/>
+          </a:prstGeom>
+          <a:noFill/>
+        </p:spPr>
+        <p:txBody>
+          <a:bodyPr wrap="square" lIns="0" rIns="0" tIns="0" bIns="0">
+            <a:spAutoFit/>
+          </a:bodyPr>
+          <a:lstStyle/>
+          <a:p>
+            <a:pPr>
+              <a:spcAft>
+                <a:spcPts val="1200"/>
+              </a:spcAft>
+            </a:pPr>
+            <a:r>
+              <a:rPr sz="1700" b="0">
+                <a:solidFill>
+                  <a:srgbClr val="607086"/>
+                </a:solidFill>
+                <a:latin typeface="Microsoft YaHei"/>
+              </a:rPr>
+              <a:t>暂停后续资金操作，核实后验证恢复，历史不重发</a:t>
+            </a:r>
+          </a:p>
+        </p:txBody>
+      </p:sp>
+      <p:sp>
+        <p:nvSpPr>
+          <p:cNvPr id="18" name="Rounded Rectangle 17"/>
           <p:cNvSpPr/>
           <p:nvPr/>
         </p:nvSpPr>
         <p:spPr>
           <a:xfrm>
-            <a:off x="3657600" y="4526280"/>
-            <a:ext cx="6126480" cy="192024"/>
+            <a:off x="8229600" y="1371600"/>
+            <a:ext cx="2423160" cy="4800600"/>
           </a:xfrm>
           <a:prstGeom prst="roundRect">
             <a:avLst>
@@ -6382,7 +6367,7 @@
             </a:avLst>
           </a:prstGeom>
           <a:solidFill>
-            <a:srgbClr val="DFE6F1"/>
+            <a:srgbClr val="17212B"/>
           </a:solidFill>
           <a:ln>
             <a:noFill/>
@@ -6410,184 +6395,31 @@
           </a:p>
         </p:txBody>
       </p:sp>
-      <p:sp>
-        <p:nvSpPr>
-          <p:cNvPr id="24" name="Rounded Rectangle 23"/>
-          <p:cNvSpPr/>
-          <p:nvPr/>
-        </p:nvSpPr>
-        <p:spPr>
-          <a:xfrm>
-            <a:off x="3657600" y="4526280"/>
-            <a:ext cx="6126480" cy="192024"/>
-          </a:xfrm>
-          <a:prstGeom prst="roundRect">
-            <a:avLst>
-              <a:gd name="adj" fmla="val 12000"/>
-            </a:avLst>
-          </a:prstGeom>
-          <a:solidFill>
-            <a:srgbClr val="3448ED"/>
-          </a:solidFill>
-          <a:ln>
-            <a:noFill/>
-          </a:ln>
-        </p:spPr>
-        <p:style>
-          <a:lnRef idx="1">
-            <a:schemeClr val="accent1"/>
-          </a:lnRef>
-          <a:fillRef idx="3">
-            <a:schemeClr val="accent1"/>
-          </a:fillRef>
-          <a:effectRef idx="2">
-            <a:schemeClr val="accent1"/>
-          </a:effectRef>
-          <a:fontRef idx="minor">
-            <a:schemeClr val="lt1"/>
-          </a:fontRef>
-        </p:style>
-        <p:txBody>
-          <a:bodyPr rtlCol="0" anchor="ctr"/>
-          <a:lstStyle/>
-          <a:p>
-            <a:pPr algn="ctr"/>
-          </a:p>
-        </p:txBody>
-      </p:sp>
-      <p:sp>
-        <p:nvSpPr>
-          <p:cNvPr id="25" name="TextBox 24"/>
-          <p:cNvSpPr txBox="1"/>
-          <p:nvPr/>
-        </p:nvSpPr>
-        <p:spPr>
-          <a:xfrm>
-            <a:off x="10058400" y="4471416"/>
-            <a:ext cx="1508760" cy="365760"/>
-          </a:xfrm>
-          <a:prstGeom prst="rect">
-            <a:avLst/>
-          </a:prstGeom>
-          <a:noFill/>
-        </p:spPr>
-        <p:txBody>
-          <a:bodyPr wrap="square" lIns="0" rIns="0" tIns="0" bIns="0">
-            <a:spAutoFit/>
-          </a:bodyPr>
-          <a:lstStyle/>
-          <a:p>
-            <a:pPr>
-              <a:spcAft>
-                <a:spcPts val="1200"/>
-              </a:spcAft>
-            </a:pPr>
-            <a:r>
-              <a:rPr sz="2300" b="1">
-                <a:solidFill>
-                  <a:srgbClr val="3448ED"/>
-                </a:solidFill>
-                <a:latin typeface="Microsoft YaHei"/>
-              </a:rPr>
-              <a:t>64/64</a:t>
-            </a:r>
-          </a:p>
-        </p:txBody>
-      </p:sp>
-      <p:sp>
-        <p:nvSpPr>
-          <p:cNvPr id="26" name="TextBox 25"/>
-          <p:cNvSpPr txBox="1"/>
-          <p:nvPr/>
-        </p:nvSpPr>
-        <p:spPr>
-          <a:xfrm>
-            <a:off x="804672" y="5367528"/>
-            <a:ext cx="10789920" cy="731520"/>
-          </a:xfrm>
-          <a:prstGeom prst="rect">
-            <a:avLst/>
-          </a:prstGeom>
-          <a:noFill/>
-        </p:spPr>
-        <p:txBody>
-          <a:bodyPr wrap="square" lIns="0" rIns="0" tIns="0" bIns="0">
-            <a:spAutoFit/>
-          </a:bodyPr>
-          <a:lstStyle/>
-          <a:p>
-            <a:pPr>
-              <a:spcAft>
-                <a:spcPts val="1200"/>
-              </a:spcAft>
-            </a:pPr>
-            <a:r>
-              <a:rPr sz="1800" b="0">
-                <a:solidFill>
-                  <a:srgbClr val="607086"/>
-                </a:solidFill>
-                <a:latin typeface="Microsoft YaHei"/>
-              </a:rPr>
-              <a:t>已记录应用回归 104 项；历史评审复测 11 组。</a:t>
-            </a:r>
-          </a:p>
-          <a:p>
-            <a:pPr>
-              <a:spcAft>
-                <a:spcPts val="1200"/>
-              </a:spcAft>
-            </a:pPr>
-            <a:r>
-              <a:rPr sz="1800" b="0">
-                <a:solidFill>
-                  <a:srgbClr val="607086"/>
-                </a:solidFill>
-                <a:latin typeface="Microsoft YaHei"/>
-              </a:rPr>
-              <a:t>19 页 × 3 种宽度；历史银行流程 11 组经双代理与实际模型验收。</a:t>
-            </a:r>
-          </a:p>
-        </p:txBody>
-      </p:sp>
-      <p:sp>
-        <p:nvSpPr>
-          <p:cNvPr id="27" name="TextBox 26"/>
-          <p:cNvSpPr txBox="1"/>
-          <p:nvPr/>
-        </p:nvSpPr>
-        <p:spPr>
-          <a:xfrm>
-            <a:off x="804672" y="6190488"/>
-            <a:ext cx="10241280" cy="228600"/>
-          </a:xfrm>
-          <a:prstGeom prst="rect">
-            <a:avLst/>
-          </a:prstGeom>
-          <a:noFill/>
-        </p:spPr>
-        <p:txBody>
-          <a:bodyPr wrap="square" lIns="0" rIns="0" tIns="0" bIns="0">
-            <a:spAutoFit/>
-          </a:bodyPr>
-          <a:lstStyle/>
-          <a:p>
-            <a:pPr>
-              <a:spcAft>
-                <a:spcPts val="1200"/>
-              </a:spcAft>
-            </a:pPr>
-            <a:r>
-              <a:rPr sz="1300" b="0">
-                <a:solidFill>
-                  <a:srgbClr val="607086"/>
-                </a:solidFill>
-                <a:latin typeface="Microsoft YaHei"/>
-              </a:rPr>
-              <a:t>上图是原 finance-v4 合成开发留出，本轮未重训；回归通过不代表真实收益或银行认证。</a:t>
-            </a:r>
-          </a:p>
-        </p:txBody>
-      </p:sp>
+      <p:pic>
+        <p:nvPicPr>
+          <p:cNvPr id="19" name="Picture 18" descr="confirmation.png"/>
+          <p:cNvPicPr>
+            <a:picLocks noChangeAspect="1"/>
+          </p:cNvPicPr>
+          <p:nvPr/>
+        </p:nvPicPr>
+        <p:blipFill>
+          <a:blip r:embed="rId2"/>
+          <a:srcRect b="4922"/>
+          <a:stretch>
+            <a:fillRect/>
+          </a:stretch>
+        </p:blipFill>
+        <p:spPr>
+          <a:xfrm>
+            <a:off x="8321040" y="1463040"/>
+            <a:ext cx="2240280" cy="4617720"/>
+          </a:xfrm>
+          <a:prstGeom prst="rect">
+            <a:avLst/>
+          </a:prstGeom>
+        </p:spPr>
+      </p:pic>
     </p:spTree>
   </p:cSld>
   <p:clrMapOvr>
@@ -6693,7 +6525,7 @@
                 </a:solidFill>
                 <a:latin typeface="Microsoft YaHei"/>
               </a:rPr>
-              <a:t>架构可复现，能力与权限分开</a:t>
+              <a:t>数据飞轮从明确同意和人工审核开始</a:t>
             </a:r>
           </a:p>
         </p:txBody>
@@ -6778,22 +6610,20 @@
       </p:sp>
       <p:sp>
         <p:nvSpPr>
-          <p:cNvPr id="6" name="Rounded Rectangle 5"/>
+          <p:cNvPr id="6" name="Rectangle 5"/>
           <p:cNvSpPr/>
           <p:nvPr/>
         </p:nvSpPr>
         <p:spPr>
           <a:xfrm>
-            <a:off x="786384" y="1554480"/>
-            <a:ext cx="5394960" cy="1572768"/>
-          </a:xfrm>
-          <a:prstGeom prst="roundRect">
-            <a:avLst>
-              <a:gd name="adj" fmla="val 12000"/>
-            </a:avLst>
+            <a:off x="777240" y="1572768"/>
+            <a:ext cx="91440" cy="640080"/>
+          </a:xfrm>
+          <a:prstGeom prst="rect">
+            <a:avLst/>
           </a:prstGeom>
           <a:solidFill>
-            <a:srgbClr val="FFFFFF"/>
+            <a:srgbClr val="3448ED"/>
           </a:solidFill>
           <a:ln>
             <a:noFill/>
@@ -6829,33 +6659,33 @@
         </p:nvSpPr>
         <p:spPr>
           <a:xfrm>
-            <a:off x="1042416" y="1847088"/>
-            <a:ext cx="4800600" cy="438912"/>
-          </a:xfrm>
-          <a:prstGeom prst="rect">
-            <a:avLst/>
-          </a:prstGeom>
-          <a:noFill/>
-        </p:spPr>
-        <p:txBody>
-          <a:bodyPr wrap="square" lIns="0" rIns="0" tIns="0" bIns="0">
-            <a:spAutoFit/>
-          </a:bodyPr>
-          <a:lstStyle/>
-          <a:p>
-            <a:pPr>
-              <a:spcAft>
-                <a:spcPts val="1200"/>
-              </a:spcAft>
-            </a:pPr>
-            <a:r>
-              <a:rPr sz="2600" b="1">
-                <a:solidFill>
-                  <a:srgbClr val="3448ED"/>
-                </a:solidFill>
-                <a:latin typeface="Microsoft YaHei"/>
-              </a:rPr>
-              <a:t>网页 + 同源代理</a:t>
+            <a:off x="1024128" y="1572768"/>
+            <a:ext cx="10241280" cy="320040"/>
+          </a:xfrm>
+          <a:prstGeom prst="rect">
+            <a:avLst/>
+          </a:prstGeom>
+          <a:noFill/>
+        </p:spPr>
+        <p:txBody>
+          <a:bodyPr wrap="square" lIns="0" rIns="0" tIns="0" bIns="0">
+            <a:spAutoFit/>
+          </a:bodyPr>
+          <a:lstStyle/>
+          <a:p>
+            <a:pPr>
+              <a:spcAft>
+                <a:spcPts val="1200"/>
+              </a:spcAft>
+            </a:pPr>
+            <a:r>
+              <a:rPr sz="2100" b="1">
+                <a:solidFill>
+                  <a:srgbClr val="17212B"/>
+                </a:solidFill>
+                <a:latin typeface="Microsoft YaHei"/>
+              </a:rPr>
+              <a:t>默认关闭，用户控制</a:t>
             </a:r>
           </a:p>
         </p:txBody>
@@ -6868,55 +6698,53 @@
         </p:nvSpPr>
         <p:spPr>
           <a:xfrm>
-            <a:off x="1042416" y="2450591"/>
-            <a:ext cx="4800600" cy="384048"/>
-          </a:xfrm>
-          <a:prstGeom prst="rect">
-            <a:avLst/>
-          </a:prstGeom>
-          <a:noFill/>
-        </p:spPr>
-        <p:txBody>
-          <a:bodyPr wrap="square" lIns="0" rIns="0" tIns="0" bIns="0">
-            <a:spAutoFit/>
-          </a:bodyPr>
-          <a:lstStyle/>
-          <a:p>
-            <a:pPr>
-              <a:spcAft>
-                <a:spcPts val="1200"/>
-              </a:spcAft>
-            </a:pPr>
-            <a:r>
-              <a:rPr sz="2200" b="0">
-                <a:solidFill>
-                  <a:srgbClr val="17212B"/>
-                </a:solidFill>
-                <a:latin typeface="Microsoft YaHei"/>
-              </a:rPr>
-              <a:t>19 页 · 430px 竖版 · 透明玻璃</a:t>
-            </a:r>
-          </a:p>
-        </p:txBody>
-      </p:sp>
-      <p:sp>
-        <p:nvSpPr>
-          <p:cNvPr id="9" name="Rounded Rectangle 8"/>
+            <a:off x="1024128" y="1965960"/>
+            <a:ext cx="10241280" cy="530352"/>
+          </a:xfrm>
+          <a:prstGeom prst="rect">
+            <a:avLst/>
+          </a:prstGeom>
+          <a:noFill/>
+        </p:spPr>
+        <p:txBody>
+          <a:bodyPr wrap="square" lIns="0" rIns="0" tIns="0" bIns="0">
+            <a:spAutoFit/>
+          </a:bodyPr>
+          <a:lstStyle/>
+          <a:p>
+            <a:pPr>
+              <a:spcAft>
+                <a:spcPts val="1200"/>
+              </a:spcAft>
+            </a:pPr>
+            <a:r>
+              <a:rPr sz="1700" b="0">
+                <a:solidFill>
+                  <a:srgbClr val="607086"/>
+                </a:solidFill>
+                <a:latin typeface="Microsoft YaHei"/>
+              </a:rPr>
+              <a:t>改正草稿→结构化候选→逐条审核；退出删除未训练反馈</a:t>
+            </a:r>
+          </a:p>
+        </p:txBody>
+      </p:sp>
+      <p:sp>
+        <p:nvSpPr>
+          <p:cNvPr id="9" name="Rectangle 8"/>
           <p:cNvSpPr/>
           <p:nvPr/>
         </p:nvSpPr>
         <p:spPr>
           <a:xfrm>
-            <a:off x="6528816" y="1554480"/>
-            <a:ext cx="5394960" cy="1572768"/>
-          </a:xfrm>
-          <a:prstGeom prst="roundRect">
-            <a:avLst>
-              <a:gd name="adj" fmla="val 12000"/>
-            </a:avLst>
+            <a:off x="777240" y="2560320"/>
+            <a:ext cx="91440" cy="640080"/>
+          </a:xfrm>
+          <a:prstGeom prst="rect">
+            <a:avLst/>
           </a:prstGeom>
           <a:solidFill>
-            <a:srgbClr val="FFFFFF"/>
+            <a:srgbClr val="3448ED"/>
           </a:solidFill>
           <a:ln>
             <a:noFill/>
@@ -6952,33 +6780,33 @@
         </p:nvSpPr>
         <p:spPr>
           <a:xfrm>
-            <a:off x="6784848" y="1847088"/>
-            <a:ext cx="4800600" cy="438912"/>
-          </a:xfrm>
-          <a:prstGeom prst="rect">
-            <a:avLst/>
-          </a:prstGeom>
-          <a:noFill/>
-        </p:spPr>
-        <p:txBody>
-          <a:bodyPr wrap="square" lIns="0" rIns="0" tIns="0" bIns="0">
-            <a:spAutoFit/>
-          </a:bodyPr>
-          <a:lstStyle/>
-          <a:p>
-            <a:pPr>
-              <a:spcAft>
-                <a:spcPts val="1200"/>
-              </a:spcAft>
-            </a:pPr>
-            <a:r>
-              <a:rPr sz="2600" b="1">
-                <a:solidFill>
-                  <a:srgbClr val="3448ED"/>
-                </a:solidFill>
-                <a:latin typeface="Microsoft YaHei"/>
-              </a:rPr>
-              <a:t>记账 / 投研 / BFF</a:t>
+            <a:off x="1024128" y="2560320"/>
+            <a:ext cx="10241280" cy="320040"/>
+          </a:xfrm>
+          <a:prstGeom prst="rect">
+            <a:avLst/>
+          </a:prstGeom>
+          <a:noFill/>
+        </p:spPr>
+        <p:txBody>
+          <a:bodyPr wrap="square" lIns="0" rIns="0" tIns="0" bIns="0">
+            <a:spAutoFit/>
+          </a:bodyPr>
+          <a:lstStyle/>
+          <a:p>
+            <a:pPr>
+              <a:spcAft>
+                <a:spcPts val="1200"/>
+              </a:spcAft>
+            </a:pPr>
+            <a:r>
+              <a:rPr sz="2100" b="1">
+                <a:solidFill>
+                  <a:srgbClr val="17212B"/>
+                </a:solidFill>
+                <a:latin typeface="Microsoft YaHei"/>
+              </a:rPr>
+              <a:t>最小化分享</a:t>
             </a:r>
           </a:p>
         </p:txBody>
@@ -6991,55 +6819,53 @@
         </p:nvSpPr>
         <p:spPr>
           <a:xfrm>
-            <a:off x="6784848" y="2450591"/>
-            <a:ext cx="4800600" cy="384048"/>
-          </a:xfrm>
-          <a:prstGeom prst="rect">
-            <a:avLst/>
-          </a:prstGeom>
-          <a:noFill/>
-        </p:spPr>
-        <p:txBody>
-          <a:bodyPr wrap="square" lIns="0" rIns="0" tIns="0" bIns="0">
-            <a:spAutoFit/>
-          </a:bodyPr>
-          <a:lstStyle/>
-          <a:p>
-            <a:pPr>
-              <a:spcAft>
-                <a:spcPts val="1200"/>
-              </a:spcAft>
-            </a:pPr>
-            <a:r>
-              <a:rPr sz="2200" b="0">
-                <a:solidFill>
-                  <a:srgbClr val="17212B"/>
-                </a:solidFill>
-                <a:latin typeface="Microsoft YaHei"/>
-              </a:rPr>
-              <a:t>保留原两个服务</a:t>
-            </a:r>
-          </a:p>
-        </p:txBody>
-      </p:sp>
-      <p:sp>
-        <p:nvSpPr>
-          <p:cNvPr id="12" name="Rounded Rectangle 11"/>
+            <a:off x="1024128" y="2953512"/>
+            <a:ext cx="10241280" cy="530352"/>
+          </a:xfrm>
+          <a:prstGeom prst="rect">
+            <a:avLst/>
+          </a:prstGeom>
+          <a:noFill/>
+        </p:spPr>
+        <p:txBody>
+          <a:bodyPr wrap="square" lIns="0" rIns="0" tIns="0" bIns="0">
+            <a:spAutoFit/>
+          </a:bodyPr>
+          <a:lstStyle/>
+          <a:p>
+            <a:pPr>
+              <a:spcAft>
+                <a:spcPts val="1200"/>
+              </a:spcAft>
+            </a:pPr>
+            <a:r>
+              <a:rPr sz="1700" b="0">
+                <a:solidFill>
+                  <a:srgbClr val="607086"/>
+                </a:solidFill>
+                <a:latin typeface="Microsoft YaHei"/>
+              </a:rPr>
+              <a:t>操作种类、登记别名、方案、金额区间；没有原话或精确金额</a:t>
+            </a:r>
+          </a:p>
+        </p:txBody>
+      </p:sp>
+      <p:sp>
+        <p:nvSpPr>
+          <p:cNvPr id="12" name="Rectangle 11"/>
           <p:cNvSpPr/>
           <p:nvPr/>
         </p:nvSpPr>
         <p:spPr>
           <a:xfrm>
-            <a:off x="786384" y="3447287"/>
-            <a:ext cx="5394960" cy="1572768"/>
-          </a:xfrm>
-          <a:prstGeom prst="roundRect">
-            <a:avLst>
-              <a:gd name="adj" fmla="val 12000"/>
-            </a:avLst>
+            <a:off x="777240" y="3547872"/>
+            <a:ext cx="91440" cy="640080"/>
+          </a:xfrm>
+          <a:prstGeom prst="rect">
+            <a:avLst/>
           </a:prstGeom>
           <a:solidFill>
-            <a:srgbClr val="FFFFFF"/>
+            <a:srgbClr val="3448ED"/>
           </a:solidFill>
           <a:ln>
             <a:noFill/>
@@ -7075,33 +6901,33 @@
         </p:nvSpPr>
         <p:spPr>
           <a:xfrm>
-            <a:off x="1042416" y="3739896"/>
-            <a:ext cx="4800600" cy="438912"/>
-          </a:xfrm>
-          <a:prstGeom prst="rect">
-            <a:avLst/>
-          </a:prstGeom>
-          <a:noFill/>
-        </p:spPr>
-        <p:txBody>
-          <a:bodyPr wrap="square" lIns="0" rIns="0" tIns="0" bIns="0">
-            <a:spAutoFit/>
-          </a:bodyPr>
-          <a:lstStyle/>
-          <a:p>
-            <a:pPr>
-              <a:spcAft>
-                <a:spcPts val="1200"/>
-              </a:spcAft>
-            </a:pPr>
-            <a:r>
-              <a:rPr sz="2600" b="1">
-                <a:solidFill>
-                  <a:srgbClr val="3448ED"/>
-                </a:solidFill>
-                <a:latin typeface="Microsoft YaHei"/>
-              </a:rPr>
-              <a:t>本地共享模型</a:t>
+            <a:off x="1024128" y="3547872"/>
+            <a:ext cx="10241280" cy="320040"/>
+          </a:xfrm>
+          <a:prstGeom prst="rect">
+            <a:avLst/>
+          </a:prstGeom>
+          <a:noFill/>
+        </p:spPr>
+        <p:txBody>
+          <a:bodyPr wrap="square" lIns="0" rIns="0" tIns="0" bIns="0">
+            <a:spAutoFit/>
+          </a:bodyPr>
+          <a:lstStyle/>
+          <a:p>
+            <a:pPr>
+              <a:spcAft>
+                <a:spcPts val="1200"/>
+              </a:spcAft>
+            </a:pPr>
+            <a:r>
+              <a:rPr sz="2100" b="1">
+                <a:solidFill>
+                  <a:srgbClr val="17212B"/>
+                </a:solidFill>
+                <a:latin typeface="Microsoft YaHei"/>
+              </a:rPr>
+              <a:t>离线训练与发布</a:t>
             </a:r>
           </a:p>
         </p:txBody>
@@ -7114,55 +6940,53 @@
         </p:nvSpPr>
         <p:spPr>
           <a:xfrm>
-            <a:off x="1042416" y="4343400"/>
-            <a:ext cx="4800600" cy="384048"/>
-          </a:xfrm>
-          <a:prstGeom prst="rect">
-            <a:avLst/>
-          </a:prstGeom>
-          <a:noFill/>
-        </p:spPr>
-        <p:txBody>
-          <a:bodyPr wrap="square" lIns="0" rIns="0" tIns="0" bIns="0">
-            <a:spAutoFit/>
-          </a:bodyPr>
-          <a:lstStyle/>
-          <a:p>
-            <a:pPr>
-              <a:spcAft>
-                <a:spcPts val="1200"/>
-              </a:spcAft>
-            </a:pPr>
-            <a:r>
-              <a:rPr sz="2200" b="0">
-                <a:solidFill>
-                  <a:srgbClr val="17212B"/>
-                </a:solidFill>
-                <a:latin typeface="Microsoft YaHei"/>
-              </a:rPr>
-              <a:t>不直接持有操作权限</a:t>
-            </a:r>
-          </a:p>
-        </p:txBody>
-      </p:sp>
-      <p:sp>
-        <p:nvSpPr>
-          <p:cNvPr id="15" name="Rounded Rectangle 14"/>
+            <a:off x="1024128" y="3941063"/>
+            <a:ext cx="10241280" cy="530352"/>
+          </a:xfrm>
+          <a:prstGeom prst="rect">
+            <a:avLst/>
+          </a:prstGeom>
+          <a:noFill/>
+        </p:spPr>
+        <p:txBody>
+          <a:bodyPr wrap="square" lIns="0" rIns="0" tIns="0" bIns="0">
+            <a:spAutoFit/>
+          </a:bodyPr>
+          <a:lstStyle/>
+          <a:p>
+            <a:pPr>
+              <a:spcAft>
+                <a:spcPts val="1200"/>
+              </a:spcAft>
+            </a:pPr>
+            <a:r>
+              <a:rPr sz="1700" b="0">
+                <a:solidFill>
+                  <a:srgbClr val="607086"/>
+                </a:solidFill>
+                <a:latin typeface="Microsoft YaHei"/>
+              </a:rPr>
+              <a:t>按组拆分、固定旧记账测试、完整评测、哈希登记与回滚</a:t>
+            </a:r>
+          </a:p>
+        </p:txBody>
+      </p:sp>
+      <p:sp>
+        <p:nvSpPr>
+          <p:cNvPr id="15" name="Rectangle 14"/>
           <p:cNvSpPr/>
           <p:nvPr/>
         </p:nvSpPr>
         <p:spPr>
           <a:xfrm>
-            <a:off x="6528816" y="3447287"/>
-            <a:ext cx="5394960" cy="1572768"/>
-          </a:xfrm>
-          <a:prstGeom prst="roundRect">
-            <a:avLst>
-              <a:gd name="adj" fmla="val 12000"/>
-            </a:avLst>
+            <a:off x="777240" y="4535424"/>
+            <a:ext cx="91440" cy="640080"/>
+          </a:xfrm>
+          <a:prstGeom prst="rect">
+            <a:avLst/>
           </a:prstGeom>
           <a:solidFill>
-            <a:srgbClr val="FFFFFF"/>
+            <a:srgbClr val="3448ED"/>
           </a:solidFill>
           <a:ln>
             <a:noFill/>
@@ -7198,33 +7022,33 @@
         </p:nvSpPr>
         <p:spPr>
           <a:xfrm>
-            <a:off x="6784848" y="3739896"/>
-            <a:ext cx="4800600" cy="438912"/>
-          </a:xfrm>
-          <a:prstGeom prst="rect">
-            <a:avLst/>
-          </a:prstGeom>
-          <a:noFill/>
-        </p:spPr>
-        <p:txBody>
-          <a:bodyPr wrap="square" lIns="0" rIns="0" tIns="0" bIns="0">
-            <a:spAutoFit/>
-          </a:bodyPr>
-          <a:lstStyle/>
-          <a:p>
-            <a:pPr>
-              <a:spcAft>
-                <a:spcPts val="1200"/>
-              </a:spcAft>
-            </a:pPr>
-            <a:r>
-              <a:rPr sz="2600" b="1">
-                <a:solidFill>
-                  <a:srgbClr val="3448ED"/>
-                </a:solidFill>
-                <a:latin typeface="Microsoft YaHei"/>
-              </a:rPr>
-              <a:t>MOSAIC + 银行模拟</a:t>
+            <a:off x="1024128" y="4535424"/>
+            <a:ext cx="10241280" cy="320040"/>
+          </a:xfrm>
+          <a:prstGeom prst="rect">
+            <a:avLst/>
+          </a:prstGeom>
+          <a:noFill/>
+        </p:spPr>
+        <p:txBody>
+          <a:bodyPr wrap="square" lIns="0" rIns="0" tIns="0" bIns="0">
+            <a:spAutoFit/>
+          </a:bodyPr>
+          <a:lstStyle/>
+          <a:p>
+            <a:pPr>
+              <a:spcAft>
+                <a:spcPts val="1200"/>
+              </a:spcAft>
+            </a:pPr>
+            <a:r>
+              <a:rPr sz="2100" b="1">
+                <a:solidFill>
+                  <a:srgbClr val="17212B"/>
+                </a:solidFill>
+                <a:latin typeface="Microsoft YaHei"/>
+              </a:rPr>
+              <a:t>本轮真实边界</a:t>
             </a:r>
           </a:p>
         </p:txBody>
@@ -7237,72 +7061,33 @@
         </p:nvSpPr>
         <p:spPr>
           <a:xfrm>
-            <a:off x="6784848" y="4343400"/>
-            <a:ext cx="4800600" cy="384048"/>
-          </a:xfrm>
-          <a:prstGeom prst="rect">
-            <a:avLst/>
-          </a:prstGeom>
-          <a:noFill/>
-        </p:spPr>
-        <p:txBody>
-          <a:bodyPr wrap="square" lIns="0" rIns="0" tIns="0" bIns="0">
-            <a:spAutoFit/>
-          </a:bodyPr>
-          <a:lstStyle/>
-          <a:p>
-            <a:pPr>
-              <a:spcAft>
-                <a:spcPts val="1200"/>
-              </a:spcAft>
-            </a:pPr>
-            <a:r>
-              <a:rPr sz="2200" b="0">
-                <a:solidFill>
-                  <a:srgbClr val="17212B"/>
-                </a:solidFill>
-                <a:latin typeface="Microsoft YaHei"/>
-              </a:rPr>
-              <a:t>独立密钥 · 持久结果</a:t>
-            </a:r>
-          </a:p>
-        </p:txBody>
-      </p:sp>
-      <p:sp>
-        <p:nvSpPr>
-          <p:cNvPr id="18" name="TextBox 17"/>
-          <p:cNvSpPr txBox="1"/>
-          <p:nvPr/>
-        </p:nvSpPr>
-        <p:spPr>
-          <a:xfrm>
-            <a:off x="877824" y="5715000"/>
-            <a:ext cx="10698480" cy="548640"/>
-          </a:xfrm>
-          <a:prstGeom prst="rect">
-            <a:avLst/>
-          </a:prstGeom>
-          <a:noFill/>
-        </p:spPr>
-        <p:txBody>
-          <a:bodyPr wrap="square" lIns="0" rIns="0" tIns="0" bIns="0">
-            <a:spAutoFit/>
-          </a:bodyPr>
-          <a:lstStyle/>
-          <a:p>
-            <a:pPr>
-              <a:spcAft>
-                <a:spcPts val="1200"/>
-              </a:spcAft>
-            </a:pPr>
-            <a:r>
-              <a:rPr sz="2000" b="0">
+            <a:off x="1024128" y="4928616"/>
+            <a:ext cx="10241280" cy="530352"/>
+          </a:xfrm>
+          <a:prstGeom prst="rect">
+            <a:avLst/>
+          </a:prstGeom>
+          <a:noFill/>
+        </p:spPr>
+        <p:txBody>
+          <a:bodyPr wrap="square" lIns="0" rIns="0" tIns="0" bIns="0">
+            <a:spAutoFit/>
+          </a:bodyPr>
+          <a:lstStyle/>
+          <a:p>
+            <a:pPr>
+              <a:spcAft>
+                <a:spcPts val="1200"/>
+              </a:spcAft>
+            </a:pPr>
+            <a:r>
+              <a:rPr sz="1700" b="0">
                 <a:solidFill>
                   <a:srgbClr val="607086"/>
                 </a:solidFill>
                 <a:latin typeface="Microsoft YaHei"/>
               </a:rPr>
-              <a:t>安全内核 MIT；Qwen 基座 Apache；保留来源归属，新增集成单列。</a:t>
+              <a:t>隔离开发者演示反馈 1 条；真实用户反馈 0 条，不宣称用户增长</a:t>
             </a:r>
           </a:p>
         </p:txBody>
@@ -7412,7 +7197,7 @@
                 </a:solidFill>
                 <a:latin typeface="Microsoft YaHei"/>
               </a:rPr>
-              <a:t>赛道匹配，补强项与现有能力分开</a:t>
+              <a:t>既有模型成绩与应用验证分别列示</a:t>
             </a:r>
           </a:p>
         </p:txBody>
@@ -7497,17 +7282,103 @@
       </p:sp>
       <p:sp>
         <p:nvSpPr>
-          <p:cNvPr id="6" name="Rectangle 5"/>
+          <p:cNvPr id="6" name="TextBox 5"/>
+          <p:cNvSpPr txBox="1"/>
+          <p:nvPr/>
+        </p:nvSpPr>
+        <p:spPr>
+          <a:xfrm>
+            <a:off x="804672" y="1481328"/>
+            <a:ext cx="3017520" cy="320040"/>
+          </a:xfrm>
+          <a:prstGeom prst="rect">
+            <a:avLst/>
+          </a:prstGeom>
+          <a:noFill/>
+        </p:spPr>
+        <p:txBody>
+          <a:bodyPr wrap="square" lIns="0" rIns="0" tIns="0" bIns="0">
+            <a:spAutoFit/>
+          </a:bodyPr>
+          <a:lstStyle/>
+          <a:p>
+            <a:pPr>
+              <a:spcAft>
+                <a:spcPts val="1200"/>
+              </a:spcAft>
+            </a:pPr>
+            <a:r>
+              <a:rPr sz="2100" b="1">
+                <a:solidFill>
+                  <a:srgbClr val="17212B"/>
+                </a:solidFill>
+                <a:latin typeface="Microsoft YaHei"/>
+              </a:rPr>
+              <a:t>记账提取</a:t>
+            </a:r>
+          </a:p>
+        </p:txBody>
+      </p:sp>
+      <p:sp>
+        <p:nvSpPr>
+          <p:cNvPr id="7" name="Rounded Rectangle 6"/>
           <p:cNvSpPr/>
           <p:nvPr/>
         </p:nvSpPr>
         <p:spPr>
           <a:xfrm>
-            <a:off x="777240" y="1572768"/>
-            <a:ext cx="91440" cy="640080"/>
-          </a:xfrm>
-          <a:prstGeom prst="rect">
-            <a:avLst/>
+            <a:off x="3657600" y="1527048"/>
+            <a:ext cx="6126480" cy="192024"/>
+          </a:xfrm>
+          <a:prstGeom prst="roundRect">
+            <a:avLst>
+              <a:gd name="adj" fmla="val 12000"/>
+            </a:avLst>
+          </a:prstGeom>
+          <a:solidFill>
+            <a:srgbClr val="DFE6F1"/>
+          </a:solidFill>
+          <a:ln>
+            <a:noFill/>
+          </a:ln>
+        </p:spPr>
+        <p:style>
+          <a:lnRef idx="1">
+            <a:schemeClr val="accent1"/>
+          </a:lnRef>
+          <a:fillRef idx="3">
+            <a:schemeClr val="accent1"/>
+          </a:fillRef>
+          <a:effectRef idx="2">
+            <a:schemeClr val="accent1"/>
+          </a:effectRef>
+          <a:fontRef idx="minor">
+            <a:schemeClr val="lt1"/>
+          </a:fontRef>
+        </p:style>
+        <p:txBody>
+          <a:bodyPr rtlCol="0" anchor="ctr"/>
+          <a:lstStyle/>
+          <a:p>
+            <a:pPr algn="ctr"/>
+          </a:p>
+        </p:txBody>
+      </p:sp>
+      <p:sp>
+        <p:nvSpPr>
+          <p:cNvPr id="8" name="Rounded Rectangle 7"/>
+          <p:cNvSpPr/>
+          <p:nvPr/>
+        </p:nvSpPr>
+        <p:spPr>
+          <a:xfrm>
+            <a:off x="3657600" y="1527048"/>
+            <a:ext cx="6126480" cy="192024"/>
+          </a:xfrm>
+          <a:prstGeom prst="roundRect">
+            <a:avLst>
+              <a:gd name="adj" fmla="val 12000"/>
+            </a:avLst>
           </a:prstGeom>
           <a:solidFill>
             <a:srgbClr val="3448ED"/>
@@ -7540,14 +7411,53 @@
       </p:sp>
       <p:sp>
         <p:nvSpPr>
-          <p:cNvPr id="7" name="TextBox 6"/>
-          <p:cNvSpPr txBox="1"/>
-          <p:nvPr/>
-        </p:nvSpPr>
-        <p:spPr>
-          <a:xfrm>
-            <a:off x="1024128" y="1572768"/>
-            <a:ext cx="10241280" cy="320040"/>
+          <p:cNvPr id="9" name="TextBox 8"/>
+          <p:cNvSpPr txBox="1"/>
+          <p:nvPr/>
+        </p:nvSpPr>
+        <p:spPr>
+          <a:xfrm>
+            <a:off x="10058400" y="1472184"/>
+            <a:ext cx="1508760" cy="365760"/>
+          </a:xfrm>
+          <a:prstGeom prst="rect">
+            <a:avLst/>
+          </a:prstGeom>
+          <a:noFill/>
+        </p:spPr>
+        <p:txBody>
+          <a:bodyPr wrap="square" lIns="0" rIns="0" tIns="0" bIns="0">
+            <a:spAutoFit/>
+          </a:bodyPr>
+          <a:lstStyle/>
+          <a:p>
+            <a:pPr>
+              <a:spcAft>
+                <a:spcPts val="1200"/>
+              </a:spcAft>
+            </a:pPr>
+            <a:r>
+              <a:rPr sz="2300" b="1">
+                <a:solidFill>
+                  <a:srgbClr val="3448ED"/>
+                </a:solidFill>
+                <a:latin typeface="Microsoft YaHei"/>
+              </a:rPr>
+              <a:t>144/144</a:t>
+            </a:r>
+          </a:p>
+        </p:txBody>
+      </p:sp>
+      <p:sp>
+        <p:nvSpPr>
+          <p:cNvPr id="10" name="TextBox 9"/>
+          <p:cNvSpPr txBox="1"/>
+          <p:nvPr/>
+        </p:nvSpPr>
+        <p:spPr>
+          <a:xfrm>
+            <a:off x="804672" y="2231136"/>
+            <a:ext cx="3017520" cy="320040"/>
           </a:xfrm>
           <a:prstGeom prst="rect">
             <a:avLst/>
@@ -7572,63 +7482,71 @@
                 </a:solidFill>
                 <a:latin typeface="Microsoft YaHei"/>
               </a:rPr>
-              <a:t>已实现个人资金管理主线</a:t>
-            </a:r>
-          </a:p>
-        </p:txBody>
-      </p:sp>
-      <p:sp>
-        <p:nvSpPr>
-          <p:cNvPr id="8" name="TextBox 7"/>
-          <p:cNvSpPr txBox="1"/>
-          <p:nvPr/>
-        </p:nvSpPr>
-        <p:spPr>
-          <a:xfrm>
-            <a:off x="1024128" y="1965960"/>
-            <a:ext cx="10241280" cy="530352"/>
-          </a:xfrm>
-          <a:prstGeom prst="rect">
-            <a:avLst/>
-          </a:prstGeom>
-          <a:noFill/>
-        </p:spPr>
-        <p:txBody>
-          <a:bodyPr wrap="square" lIns="0" rIns="0" tIns="0" bIns="0">
-            <a:spAutoFit/>
-          </a:bodyPr>
-          <a:lstStyle/>
-          <a:p>
-            <a:pPr>
-              <a:spcAft>
-                <a:spcPts val="1200"/>
-              </a:spcAft>
-            </a:pPr>
-            <a:r>
-              <a:rPr sz="1700" b="0">
-                <a:solidFill>
-                  <a:srgbClr val="607086"/>
-                </a:solidFill>
-                <a:latin typeface="Microsoft YaHei"/>
-              </a:rPr>
-              <a:t>账单核对、目标预留、风险约束、方案比较与模拟操作</a:t>
-            </a:r>
-          </a:p>
-        </p:txBody>
-      </p:sp>
-      <p:sp>
-        <p:nvSpPr>
-          <p:cNvPr id="9" name="Rectangle 8"/>
+              <a:t>缺失信息追问</a:t>
+            </a:r>
+          </a:p>
+        </p:txBody>
+      </p:sp>
+      <p:sp>
+        <p:nvSpPr>
+          <p:cNvPr id="11" name="Rounded Rectangle 10"/>
           <p:cNvSpPr/>
           <p:nvPr/>
         </p:nvSpPr>
         <p:spPr>
           <a:xfrm>
-            <a:off x="777240" y="2560320"/>
-            <a:ext cx="91440" cy="640080"/>
-          </a:xfrm>
-          <a:prstGeom prst="rect">
-            <a:avLst/>
+            <a:off x="3657600" y="2276856"/>
+            <a:ext cx="6126480" cy="192024"/>
+          </a:xfrm>
+          <a:prstGeom prst="roundRect">
+            <a:avLst>
+              <a:gd name="adj" fmla="val 12000"/>
+            </a:avLst>
+          </a:prstGeom>
+          <a:solidFill>
+            <a:srgbClr val="DFE6F1"/>
+          </a:solidFill>
+          <a:ln>
+            <a:noFill/>
+          </a:ln>
+        </p:spPr>
+        <p:style>
+          <a:lnRef idx="1">
+            <a:schemeClr val="accent1"/>
+          </a:lnRef>
+          <a:fillRef idx="3">
+            <a:schemeClr val="accent1"/>
+          </a:fillRef>
+          <a:effectRef idx="2">
+            <a:schemeClr val="accent1"/>
+          </a:effectRef>
+          <a:fontRef idx="minor">
+            <a:schemeClr val="lt1"/>
+          </a:fontRef>
+        </p:style>
+        <p:txBody>
+          <a:bodyPr rtlCol="0" anchor="ctr"/>
+          <a:lstStyle/>
+          <a:p>
+            <a:pPr algn="ctr"/>
+          </a:p>
+        </p:txBody>
+      </p:sp>
+      <p:sp>
+        <p:nvSpPr>
+          <p:cNvPr id="12" name="Rounded Rectangle 11"/>
+          <p:cNvSpPr/>
+          <p:nvPr/>
+        </p:nvSpPr>
+        <p:spPr>
+          <a:xfrm>
+            <a:off x="3657600" y="2276856"/>
+            <a:ext cx="6126480" cy="192024"/>
+          </a:xfrm>
+          <a:prstGeom prst="roundRect">
+            <a:avLst>
+              <a:gd name="adj" fmla="val 12000"/>
+            </a:avLst>
           </a:prstGeom>
           <a:solidFill>
             <a:srgbClr val="3448ED"/>
@@ -7661,14 +7579,53 @@
       </p:sp>
       <p:sp>
         <p:nvSpPr>
-          <p:cNvPr id="10" name="TextBox 9"/>
-          <p:cNvSpPr txBox="1"/>
-          <p:nvPr/>
-        </p:nvSpPr>
-        <p:spPr>
-          <a:xfrm>
-            <a:off x="1024128" y="2560320"/>
-            <a:ext cx="10241280" cy="320040"/>
+          <p:cNvPr id="13" name="TextBox 12"/>
+          <p:cNvSpPr txBox="1"/>
+          <p:nvPr/>
+        </p:nvSpPr>
+        <p:spPr>
+          <a:xfrm>
+            <a:off x="10058400" y="2221992"/>
+            <a:ext cx="1508760" cy="365760"/>
+          </a:xfrm>
+          <a:prstGeom prst="rect">
+            <a:avLst/>
+          </a:prstGeom>
+          <a:noFill/>
+        </p:spPr>
+        <p:txBody>
+          <a:bodyPr wrap="square" lIns="0" rIns="0" tIns="0" bIns="0">
+            <a:spAutoFit/>
+          </a:bodyPr>
+          <a:lstStyle/>
+          <a:p>
+            <a:pPr>
+              <a:spcAft>
+                <a:spcPts val="1200"/>
+              </a:spcAft>
+            </a:pPr>
+            <a:r>
+              <a:rPr sz="2300" b="1">
+                <a:solidFill>
+                  <a:srgbClr val="3448ED"/>
+                </a:solidFill>
+                <a:latin typeface="Microsoft YaHei"/>
+              </a:rPr>
+              <a:t>14/14</a:t>
+            </a:r>
+          </a:p>
+        </p:txBody>
+      </p:sp>
+      <p:sp>
+        <p:nvSpPr>
+          <p:cNvPr id="14" name="TextBox 13"/>
+          <p:cNvSpPr txBox="1"/>
+          <p:nvPr/>
+        </p:nvSpPr>
+        <p:spPr>
+          <a:xfrm>
+            <a:off x="804672" y="2980944"/>
+            <a:ext cx="3017520" cy="320040"/>
           </a:xfrm>
           <a:prstGeom prst="rect">
             <a:avLst/>
@@ -7693,63 +7650,71 @@
                 </a:solidFill>
                 <a:latin typeface="Microsoft YaHei"/>
               </a:rPr>
-              <a:t>优先补强：让用户看懂</a:t>
-            </a:r>
-          </a:p>
-        </p:txBody>
-      </p:sp>
-      <p:sp>
-        <p:nvSpPr>
-          <p:cNvPr id="11" name="TextBox 10"/>
-          <p:cNvSpPr txBox="1"/>
-          <p:nvPr/>
-        </p:nvSpPr>
-        <p:spPr>
-          <a:xfrm>
-            <a:off x="1024128" y="2953512"/>
-            <a:ext cx="10241280" cy="530352"/>
-          </a:xfrm>
-          <a:prstGeom prst="rect">
-            <a:avLst/>
-          </a:prstGeom>
-          <a:noFill/>
-        </p:spPr>
-        <p:txBody>
-          <a:bodyPr wrap="square" lIns="0" rIns="0" tIns="0" bIns="0">
-            <a:spAutoFit/>
-          </a:bodyPr>
-          <a:lstStyle/>
-          <a:p>
-            <a:pPr>
-              <a:spcAft>
-                <a:spcPts val="1200"/>
-              </a:spcAft>
-            </a:pPr>
-            <a:r>
-              <a:rPr sz="1700" b="0">
-                <a:solidFill>
-                  <a:srgbClr val="607086"/>
-                </a:solidFill>
-                <a:latin typeface="Microsoft YaHei"/>
-              </a:rPr>
-              <a:t>按需术语解释、风险与费用情景、用户理解测试</a:t>
-            </a:r>
-          </a:p>
-        </p:txBody>
-      </p:sp>
-      <p:sp>
-        <p:nvSpPr>
-          <p:cNvPr id="12" name="Rectangle 11"/>
+              <a:t>统计摘要</a:t>
+            </a:r>
+          </a:p>
+        </p:txBody>
+      </p:sp>
+      <p:sp>
+        <p:nvSpPr>
+          <p:cNvPr id="15" name="Rounded Rectangle 14"/>
           <p:cNvSpPr/>
           <p:nvPr/>
         </p:nvSpPr>
         <p:spPr>
           <a:xfrm>
-            <a:off x="777240" y="3547872"/>
-            <a:ext cx="91440" cy="640080"/>
-          </a:xfrm>
-          <a:prstGeom prst="rect">
-            <a:avLst/>
+            <a:off x="3657600" y="3026663"/>
+            <a:ext cx="6126480" cy="192024"/>
+          </a:xfrm>
+          <a:prstGeom prst="roundRect">
+            <a:avLst>
+              <a:gd name="adj" fmla="val 12000"/>
+            </a:avLst>
+          </a:prstGeom>
+          <a:solidFill>
+            <a:srgbClr val="DFE6F1"/>
+          </a:solidFill>
+          <a:ln>
+            <a:noFill/>
+          </a:ln>
+        </p:spPr>
+        <p:style>
+          <a:lnRef idx="1">
+            <a:schemeClr val="accent1"/>
+          </a:lnRef>
+          <a:fillRef idx="3">
+            <a:schemeClr val="accent1"/>
+          </a:fillRef>
+          <a:effectRef idx="2">
+            <a:schemeClr val="accent1"/>
+          </a:effectRef>
+          <a:fontRef idx="minor">
+            <a:schemeClr val="lt1"/>
+          </a:fontRef>
+        </p:style>
+        <p:txBody>
+          <a:bodyPr rtlCol="0" anchor="ctr"/>
+          <a:lstStyle/>
+          <a:p>
+            <a:pPr algn="ctr"/>
+          </a:p>
+        </p:txBody>
+      </p:sp>
+      <p:sp>
+        <p:nvSpPr>
+          <p:cNvPr id="16" name="Rounded Rectangle 15"/>
+          <p:cNvSpPr/>
+          <p:nvPr/>
+        </p:nvSpPr>
+        <p:spPr>
+          <a:xfrm>
+            <a:off x="3657600" y="3026663"/>
+            <a:ext cx="6126480" cy="192024"/>
+          </a:xfrm>
+          <a:prstGeom prst="roundRect">
+            <a:avLst>
+              <a:gd name="adj" fmla="val 12000"/>
+            </a:avLst>
           </a:prstGeom>
           <a:solidFill>
             <a:srgbClr val="3448ED"/>
@@ -7782,14 +7747,53 @@
       </p:sp>
       <p:sp>
         <p:nvSpPr>
-          <p:cNvPr id="13" name="TextBox 12"/>
-          <p:cNvSpPr txBox="1"/>
-          <p:nvPr/>
-        </p:nvSpPr>
-        <p:spPr>
-          <a:xfrm>
-            <a:off x="1024128" y="3547872"/>
-            <a:ext cx="10241280" cy="320040"/>
+          <p:cNvPr id="17" name="TextBox 16"/>
+          <p:cNvSpPr txBox="1"/>
+          <p:nvPr/>
+        </p:nvSpPr>
+        <p:spPr>
+          <a:xfrm>
+            <a:off x="10058400" y="2971800"/>
+            <a:ext cx="1508760" cy="365760"/>
+          </a:xfrm>
+          <a:prstGeom prst="rect">
+            <a:avLst/>
+          </a:prstGeom>
+          <a:noFill/>
+        </p:spPr>
+        <p:txBody>
+          <a:bodyPr wrap="square" lIns="0" rIns="0" tIns="0" bIns="0">
+            <a:spAutoFit/>
+          </a:bodyPr>
+          <a:lstStyle/>
+          <a:p>
+            <a:pPr>
+              <a:spcAft>
+                <a:spcPts val="1200"/>
+              </a:spcAft>
+            </a:pPr>
+            <a:r>
+              <a:rPr sz="2300" b="1">
+                <a:solidFill>
+                  <a:srgbClr val="3448ED"/>
+                </a:solidFill>
+                <a:latin typeface="Microsoft YaHei"/>
+              </a:rPr>
+              <a:t>16/16</a:t>
+            </a:r>
+          </a:p>
+        </p:txBody>
+      </p:sp>
+      <p:sp>
+        <p:nvSpPr>
+          <p:cNvPr id="18" name="TextBox 17"/>
+          <p:cNvSpPr txBox="1"/>
+          <p:nvPr/>
+        </p:nvSpPr>
+        <p:spPr>
+          <a:xfrm>
+            <a:off x="804672" y="3730752"/>
+            <a:ext cx="3017520" cy="320040"/>
           </a:xfrm>
           <a:prstGeom prst="rect">
             <a:avLst/>
@@ -7814,63 +7818,71 @@
                 </a:solidFill>
                 <a:latin typeface="Microsoft YaHei"/>
               </a:rPr>
-              <a:t>后续扩展：完整资产视图</a:t>
-            </a:r>
-          </a:p>
-        </p:txBody>
-      </p:sp>
-      <p:sp>
-        <p:nvSpPr>
-          <p:cNvPr id="14" name="TextBox 13"/>
-          <p:cNvSpPr txBox="1"/>
-          <p:nvPr/>
-        </p:nvSpPr>
-        <p:spPr>
-          <a:xfrm>
-            <a:off x="1024128" y="3941063"/>
-            <a:ext cx="10241280" cy="530352"/>
-          </a:xfrm>
-          <a:prstGeom prst="rect">
-            <a:avLst/>
-          </a:prstGeom>
-          <a:noFill/>
-        </p:spPr>
-        <p:txBody>
-          <a:bodyPr wrap="square" lIns="0" rIns="0" tIns="0" bIns="0">
-            <a:spAutoFit/>
-          </a:bodyPr>
-          <a:lstStyle/>
-          <a:p>
-            <a:pPr>
-              <a:spcAft>
-                <a:spcPts val="1200"/>
-              </a:spcAft>
-            </a:pPr>
-            <a:r>
-              <a:rPr sz="1700" b="0">
-                <a:solidFill>
-                  <a:srgbClr val="607086"/>
-                </a:solidFill>
-                <a:latin typeface="Microsoft YaHei"/>
-              </a:rPr>
-              <a:t>存量资产负债、已有应急金、多资产方案和偏离提醒</a:t>
-            </a:r>
-          </a:p>
-        </p:txBody>
-      </p:sp>
-      <p:sp>
-        <p:nvSpPr>
-          <p:cNvPr id="15" name="Rectangle 14"/>
+              <a:t>银行意图</a:t>
+            </a:r>
+          </a:p>
+        </p:txBody>
+      </p:sp>
+      <p:sp>
+        <p:nvSpPr>
+          <p:cNvPr id="19" name="Rounded Rectangle 18"/>
           <p:cNvSpPr/>
           <p:nvPr/>
         </p:nvSpPr>
         <p:spPr>
           <a:xfrm>
-            <a:off x="777240" y="4535424"/>
-            <a:ext cx="91440" cy="640080"/>
-          </a:xfrm>
-          <a:prstGeom prst="rect">
-            <a:avLst/>
+            <a:off x="3657600" y="3776472"/>
+            <a:ext cx="6126480" cy="192024"/>
+          </a:xfrm>
+          <a:prstGeom prst="roundRect">
+            <a:avLst>
+              <a:gd name="adj" fmla="val 12000"/>
+            </a:avLst>
+          </a:prstGeom>
+          <a:solidFill>
+            <a:srgbClr val="DFE6F1"/>
+          </a:solidFill>
+          <a:ln>
+            <a:noFill/>
+          </a:ln>
+        </p:spPr>
+        <p:style>
+          <a:lnRef idx="1">
+            <a:schemeClr val="accent1"/>
+          </a:lnRef>
+          <a:fillRef idx="3">
+            <a:schemeClr val="accent1"/>
+          </a:fillRef>
+          <a:effectRef idx="2">
+            <a:schemeClr val="accent1"/>
+          </a:effectRef>
+          <a:fontRef idx="minor">
+            <a:schemeClr val="lt1"/>
+          </a:fontRef>
+        </p:style>
+        <p:txBody>
+          <a:bodyPr rtlCol="0" anchor="ctr"/>
+          <a:lstStyle/>
+          <a:p>
+            <a:pPr algn="ctr"/>
+          </a:p>
+        </p:txBody>
+      </p:sp>
+      <p:sp>
+        <p:nvSpPr>
+          <p:cNvPr id="20" name="Rounded Rectangle 19"/>
+          <p:cNvSpPr/>
+          <p:nvPr/>
+        </p:nvSpPr>
+        <p:spPr>
+          <a:xfrm>
+            <a:off x="3657600" y="3776472"/>
+            <a:ext cx="5893828" cy="192024"/>
+          </a:xfrm>
+          <a:prstGeom prst="roundRect">
+            <a:avLst>
+              <a:gd name="adj" fmla="val 12000"/>
+            </a:avLst>
           </a:prstGeom>
           <a:solidFill>
             <a:srgbClr val="3448ED"/>
@@ -7903,6 +7915,1620 @@
       </p:sp>
       <p:sp>
         <p:nvSpPr>
+          <p:cNvPr id="21" name="TextBox 20"/>
+          <p:cNvSpPr txBox="1"/>
+          <p:nvPr/>
+        </p:nvSpPr>
+        <p:spPr>
+          <a:xfrm>
+            <a:off x="10058400" y="3721608"/>
+            <a:ext cx="1508760" cy="365760"/>
+          </a:xfrm>
+          <a:prstGeom prst="rect">
+            <a:avLst/>
+          </a:prstGeom>
+          <a:noFill/>
+        </p:spPr>
+        <p:txBody>
+          <a:bodyPr wrap="square" lIns="0" rIns="0" tIns="0" bIns="0">
+            <a:spAutoFit/>
+          </a:bodyPr>
+          <a:lstStyle/>
+          <a:p>
+            <a:pPr>
+              <a:spcAft>
+                <a:spcPts val="1200"/>
+              </a:spcAft>
+            </a:pPr>
+            <a:r>
+              <a:rPr sz="2300" b="1">
+                <a:solidFill>
+                  <a:srgbClr val="3448ED"/>
+                </a:solidFill>
+                <a:latin typeface="Microsoft YaHei"/>
+              </a:rPr>
+              <a:t>76/79</a:t>
+            </a:r>
+          </a:p>
+        </p:txBody>
+      </p:sp>
+      <p:sp>
+        <p:nvSpPr>
+          <p:cNvPr id="22" name="TextBox 21"/>
+          <p:cNvSpPr txBox="1"/>
+          <p:nvPr/>
+        </p:nvSpPr>
+        <p:spPr>
+          <a:xfrm>
+            <a:off x="804672" y="4480560"/>
+            <a:ext cx="3017520" cy="320040"/>
+          </a:xfrm>
+          <a:prstGeom prst="rect">
+            <a:avLst/>
+          </a:prstGeom>
+          <a:noFill/>
+        </p:spPr>
+        <p:txBody>
+          <a:bodyPr wrap="square" lIns="0" rIns="0" tIns="0" bIns="0">
+            <a:spAutoFit/>
+          </a:bodyPr>
+          <a:lstStyle/>
+          <a:p>
+            <a:pPr>
+              <a:spcAft>
+                <a:spcPts val="1200"/>
+              </a:spcAft>
+            </a:pPr>
+            <a:r>
+              <a:rPr sz="2100" b="1">
+                <a:solidFill>
+                  <a:srgbClr val="17212B"/>
+                </a:solidFill>
+                <a:latin typeface="Microsoft YaHei"/>
+              </a:rPr>
+              <a:t>画像依据</a:t>
+            </a:r>
+          </a:p>
+        </p:txBody>
+      </p:sp>
+      <p:sp>
+        <p:nvSpPr>
+          <p:cNvPr id="23" name="Rounded Rectangle 22"/>
+          <p:cNvSpPr/>
+          <p:nvPr/>
+        </p:nvSpPr>
+        <p:spPr>
+          <a:xfrm>
+            <a:off x="3657600" y="4526280"/>
+            <a:ext cx="6126480" cy="192024"/>
+          </a:xfrm>
+          <a:prstGeom prst="roundRect">
+            <a:avLst>
+              <a:gd name="adj" fmla="val 12000"/>
+            </a:avLst>
+          </a:prstGeom>
+          <a:solidFill>
+            <a:srgbClr val="DFE6F1"/>
+          </a:solidFill>
+          <a:ln>
+            <a:noFill/>
+          </a:ln>
+        </p:spPr>
+        <p:style>
+          <a:lnRef idx="1">
+            <a:schemeClr val="accent1"/>
+          </a:lnRef>
+          <a:fillRef idx="3">
+            <a:schemeClr val="accent1"/>
+          </a:fillRef>
+          <a:effectRef idx="2">
+            <a:schemeClr val="accent1"/>
+          </a:effectRef>
+          <a:fontRef idx="minor">
+            <a:schemeClr val="lt1"/>
+          </a:fontRef>
+        </p:style>
+        <p:txBody>
+          <a:bodyPr rtlCol="0" anchor="ctr"/>
+          <a:lstStyle/>
+          <a:p>
+            <a:pPr algn="ctr"/>
+          </a:p>
+        </p:txBody>
+      </p:sp>
+      <p:sp>
+        <p:nvSpPr>
+          <p:cNvPr id="24" name="Rounded Rectangle 23"/>
+          <p:cNvSpPr/>
+          <p:nvPr/>
+        </p:nvSpPr>
+        <p:spPr>
+          <a:xfrm>
+            <a:off x="3657600" y="4526280"/>
+            <a:ext cx="6126480" cy="192024"/>
+          </a:xfrm>
+          <a:prstGeom prst="roundRect">
+            <a:avLst>
+              <a:gd name="adj" fmla="val 12000"/>
+            </a:avLst>
+          </a:prstGeom>
+          <a:solidFill>
+            <a:srgbClr val="3448ED"/>
+          </a:solidFill>
+          <a:ln>
+            <a:noFill/>
+          </a:ln>
+        </p:spPr>
+        <p:style>
+          <a:lnRef idx="1">
+            <a:schemeClr val="accent1"/>
+          </a:lnRef>
+          <a:fillRef idx="3">
+            <a:schemeClr val="accent1"/>
+          </a:fillRef>
+          <a:effectRef idx="2">
+            <a:schemeClr val="accent1"/>
+          </a:effectRef>
+          <a:fontRef idx="minor">
+            <a:schemeClr val="lt1"/>
+          </a:fontRef>
+        </p:style>
+        <p:txBody>
+          <a:bodyPr rtlCol="0" anchor="ctr"/>
+          <a:lstStyle/>
+          <a:p>
+            <a:pPr algn="ctr"/>
+          </a:p>
+        </p:txBody>
+      </p:sp>
+      <p:sp>
+        <p:nvSpPr>
+          <p:cNvPr id="25" name="TextBox 24"/>
+          <p:cNvSpPr txBox="1"/>
+          <p:nvPr/>
+        </p:nvSpPr>
+        <p:spPr>
+          <a:xfrm>
+            <a:off x="10058400" y="4471416"/>
+            <a:ext cx="1508760" cy="365760"/>
+          </a:xfrm>
+          <a:prstGeom prst="rect">
+            <a:avLst/>
+          </a:prstGeom>
+          <a:noFill/>
+        </p:spPr>
+        <p:txBody>
+          <a:bodyPr wrap="square" lIns="0" rIns="0" tIns="0" bIns="0">
+            <a:spAutoFit/>
+          </a:bodyPr>
+          <a:lstStyle/>
+          <a:p>
+            <a:pPr>
+              <a:spcAft>
+                <a:spcPts val="1200"/>
+              </a:spcAft>
+            </a:pPr>
+            <a:r>
+              <a:rPr sz="2300" b="1">
+                <a:solidFill>
+                  <a:srgbClr val="3448ED"/>
+                </a:solidFill>
+                <a:latin typeface="Microsoft YaHei"/>
+              </a:rPr>
+              <a:t>64/64</a:t>
+            </a:r>
+          </a:p>
+        </p:txBody>
+      </p:sp>
+      <p:sp>
+        <p:nvSpPr>
+          <p:cNvPr id="26" name="TextBox 25"/>
+          <p:cNvSpPr txBox="1"/>
+          <p:nvPr/>
+        </p:nvSpPr>
+        <p:spPr>
+          <a:xfrm>
+            <a:off x="804672" y="5367528"/>
+            <a:ext cx="10789920" cy="731520"/>
+          </a:xfrm>
+          <a:prstGeom prst="rect">
+            <a:avLst/>
+          </a:prstGeom>
+          <a:noFill/>
+        </p:spPr>
+        <p:txBody>
+          <a:bodyPr wrap="square" lIns="0" rIns="0" tIns="0" bIns="0">
+            <a:spAutoFit/>
+          </a:bodyPr>
+          <a:lstStyle/>
+          <a:p>
+            <a:pPr>
+              <a:spcAft>
+                <a:spcPts val="1200"/>
+              </a:spcAft>
+            </a:pPr>
+            <a:r>
+              <a:rPr sz="1800" b="0">
+                <a:solidFill>
+                  <a:srgbClr val="607086"/>
+                </a:solidFill>
+                <a:latin typeface="Microsoft YaHei"/>
+              </a:rPr>
+              <a:t>当前应用回归 129 项；财富流程 10 组。</a:t>
+            </a:r>
+          </a:p>
+          <a:p>
+            <a:pPr>
+              <a:spcAft>
+                <a:spcPts val="1200"/>
+              </a:spcAft>
+            </a:pPr>
+            <a:r>
+              <a:rPr sz="1800" b="0">
+                <a:solidFill>
+                  <a:srgbClr val="607086"/>
+                </a:solidFill>
+                <a:latin typeface="Microsoft YaHei"/>
+              </a:rPr>
+              <a:t>20 页 × 3 种宽度；历史银行流程 11 组使用实际模型验收。</a:t>
+            </a:r>
+          </a:p>
+        </p:txBody>
+      </p:sp>
+      <p:sp>
+        <p:nvSpPr>
+          <p:cNvPr id="27" name="TextBox 26"/>
+          <p:cNvSpPr txBox="1"/>
+          <p:nvPr/>
+        </p:nvSpPr>
+        <p:spPr>
+          <a:xfrm>
+            <a:off x="804672" y="6190488"/>
+            <a:ext cx="10241280" cy="228600"/>
+          </a:xfrm>
+          <a:prstGeom prst="rect">
+            <a:avLst/>
+          </a:prstGeom>
+          <a:noFill/>
+        </p:spPr>
+        <p:txBody>
+          <a:bodyPr wrap="square" lIns="0" rIns="0" tIns="0" bIns="0">
+            <a:spAutoFit/>
+          </a:bodyPr>
+          <a:lstStyle/>
+          <a:p>
+            <a:pPr>
+              <a:spcAft>
+                <a:spcPts val="1200"/>
+              </a:spcAft>
+            </a:pPr>
+            <a:r>
+              <a:rPr sz="1300" b="0">
+                <a:solidFill>
+                  <a:srgbClr val="607086"/>
+                </a:solidFill>
+                <a:latin typeface="Microsoft YaHei"/>
+              </a:rPr>
+              <a:t>上图是原 finance-v4 合成开发留出，本轮未重训；回归通过不代表真实收益或银行认证。</a:t>
+            </a:r>
+          </a:p>
+        </p:txBody>
+      </p:sp>
+    </p:spTree>
+  </p:cSld>
+  <p:clrMapOvr>
+    <a:masterClrMapping/>
+  </p:clrMapOvr>
+</p:sld>
+</file>
+
+<file path=ppt/slides/slide14.xml><?xml version="1.0" encoding="utf-8"?>
+<p:sld xmlns:a="http://schemas.openxmlformats.org/drawingml/2006/main" xmlns:p="http://schemas.openxmlformats.org/presentationml/2006/main" xmlns:r="http://schemas.openxmlformats.org/officeDocument/2006/relationships">
+  <p:cSld>
+    <p:bg>
+      <p:bgPr>
+        <a:solidFill>
+          <a:srgbClr val="F3F6FB"/>
+        </a:solidFill>
+        <a:effectLst/>
+      </p:bgPr>
+    </p:bg>
+    <p:spTree>
+      <p:nvGrpSpPr>
+        <p:cNvPr id="1" name=""/>
+        <p:cNvGrpSpPr/>
+        <p:nvPr/>
+      </p:nvGrpSpPr>
+      <p:grpSpPr/>
+      <p:sp>
+        <p:nvSpPr>
+          <p:cNvPr id="2" name="Rounded Rectangle 1"/>
+          <p:cNvSpPr/>
+          <p:nvPr/>
+        </p:nvSpPr>
+        <p:spPr>
+          <a:xfrm>
+            <a:off x="365760" y="320040"/>
+            <a:ext cx="11457432" cy="859536"/>
+          </a:xfrm>
+          <a:prstGeom prst="roundRect">
+            <a:avLst>
+              <a:gd name="adj" fmla="val 12000"/>
+            </a:avLst>
+          </a:prstGeom>
+          <a:solidFill>
+            <a:srgbClr val="FFFFFF"/>
+          </a:solidFill>
+          <a:ln>
+            <a:noFill/>
+          </a:ln>
+        </p:spPr>
+        <p:style>
+          <a:lnRef idx="1">
+            <a:schemeClr val="accent1"/>
+          </a:lnRef>
+          <a:fillRef idx="3">
+            <a:schemeClr val="accent1"/>
+          </a:fillRef>
+          <a:effectRef idx="2">
+            <a:schemeClr val="accent1"/>
+          </a:effectRef>
+          <a:fontRef idx="minor">
+            <a:schemeClr val="lt1"/>
+          </a:fontRef>
+        </p:style>
+        <p:txBody>
+          <a:bodyPr rtlCol="0" anchor="ctr"/>
+          <a:lstStyle/>
+          <a:p>
+            <a:pPr algn="ctr"/>
+          </a:p>
+        </p:txBody>
+      </p:sp>
+      <p:sp>
+        <p:nvSpPr>
+          <p:cNvPr id="3" name="TextBox 2"/>
+          <p:cNvSpPr txBox="1"/>
+          <p:nvPr/>
+        </p:nvSpPr>
+        <p:spPr>
+          <a:xfrm>
+            <a:off x="658368" y="493776"/>
+            <a:ext cx="9966960" cy="493776"/>
+          </a:xfrm>
+          <a:prstGeom prst="rect">
+            <a:avLst/>
+          </a:prstGeom>
+          <a:noFill/>
+        </p:spPr>
+        <p:txBody>
+          <a:bodyPr wrap="square" lIns="0" rIns="0" tIns="0" bIns="0">
+            <a:spAutoFit/>
+          </a:bodyPr>
+          <a:lstStyle/>
+          <a:p>
+            <a:pPr>
+              <a:spcAft>
+                <a:spcPts val="1200"/>
+              </a:spcAft>
+            </a:pPr>
+            <a:r>
+              <a:rPr sz="3000" b="1">
+                <a:solidFill>
+                  <a:srgbClr val="17212B"/>
+                </a:solidFill>
+                <a:latin typeface="Microsoft YaHei"/>
+              </a:rPr>
+              <a:t>架构可复现，能力与权限分开</a:t>
+            </a:r>
+          </a:p>
+        </p:txBody>
+      </p:sp>
+      <p:sp>
+        <p:nvSpPr>
+          <p:cNvPr id="4" name="TextBox 3"/>
+          <p:cNvSpPr txBox="1"/>
+          <p:nvPr/>
+        </p:nvSpPr>
+        <p:spPr>
+          <a:xfrm>
+            <a:off x="10515600" y="548640"/>
+            <a:ext cx="1143000" cy="320040"/>
+          </a:xfrm>
+          <a:prstGeom prst="rect">
+            <a:avLst/>
+          </a:prstGeom>
+          <a:noFill/>
+        </p:spPr>
+        <p:txBody>
+          <a:bodyPr wrap="square" lIns="0" rIns="0" tIns="0" bIns="0">
+            <a:spAutoFit/>
+          </a:bodyPr>
+          <a:lstStyle/>
+          <a:p>
+            <a:pPr>
+              <a:spcAft>
+                <a:spcPts val="1200"/>
+              </a:spcAft>
+            </a:pPr>
+            <a:r>
+              <a:rPr sz="1700" b="1">
+                <a:solidFill>
+                  <a:srgbClr val="3448ED"/>
+                </a:solidFill>
+                <a:latin typeface="Microsoft YaHei"/>
+              </a:rPr>
+              <a:t>FinPilot</a:t>
+            </a:r>
+          </a:p>
+        </p:txBody>
+      </p:sp>
+      <p:sp>
+        <p:nvSpPr>
+          <p:cNvPr id="5" name="TextBox 4"/>
+          <p:cNvSpPr txBox="1"/>
+          <p:nvPr/>
+        </p:nvSpPr>
+        <p:spPr>
+          <a:xfrm>
+            <a:off x="11292840" y="6419088"/>
+            <a:ext cx="457200" cy="182880"/>
+          </a:xfrm>
+          <a:prstGeom prst="rect">
+            <a:avLst/>
+          </a:prstGeom>
+          <a:noFill/>
+        </p:spPr>
+        <p:txBody>
+          <a:bodyPr wrap="square" lIns="0" rIns="0" tIns="0" bIns="0">
+            <a:spAutoFit/>
+          </a:bodyPr>
+          <a:lstStyle/>
+          <a:p>
+            <a:pPr>
+              <a:spcAft>
+                <a:spcPts val="1200"/>
+              </a:spcAft>
+            </a:pPr>
+            <a:r>
+              <a:rPr sz="1000" b="0">
+                <a:solidFill>
+                  <a:srgbClr val="607086"/>
+                </a:solidFill>
+                <a:latin typeface="Microsoft YaHei"/>
+              </a:rPr>
+              <a:t>14</a:t>
+            </a:r>
+          </a:p>
+        </p:txBody>
+      </p:sp>
+      <p:sp>
+        <p:nvSpPr>
+          <p:cNvPr id="6" name="Rounded Rectangle 5"/>
+          <p:cNvSpPr/>
+          <p:nvPr/>
+        </p:nvSpPr>
+        <p:spPr>
+          <a:xfrm>
+            <a:off x="786384" y="1554480"/>
+            <a:ext cx="5394960" cy="1572768"/>
+          </a:xfrm>
+          <a:prstGeom prst="roundRect">
+            <a:avLst>
+              <a:gd name="adj" fmla="val 12000"/>
+            </a:avLst>
+          </a:prstGeom>
+          <a:solidFill>
+            <a:srgbClr val="FFFFFF"/>
+          </a:solidFill>
+          <a:ln>
+            <a:noFill/>
+          </a:ln>
+        </p:spPr>
+        <p:style>
+          <a:lnRef idx="1">
+            <a:schemeClr val="accent1"/>
+          </a:lnRef>
+          <a:fillRef idx="3">
+            <a:schemeClr val="accent1"/>
+          </a:fillRef>
+          <a:effectRef idx="2">
+            <a:schemeClr val="accent1"/>
+          </a:effectRef>
+          <a:fontRef idx="minor">
+            <a:schemeClr val="lt1"/>
+          </a:fontRef>
+        </p:style>
+        <p:txBody>
+          <a:bodyPr rtlCol="0" anchor="ctr"/>
+          <a:lstStyle/>
+          <a:p>
+            <a:pPr algn="ctr"/>
+          </a:p>
+        </p:txBody>
+      </p:sp>
+      <p:sp>
+        <p:nvSpPr>
+          <p:cNvPr id="7" name="TextBox 6"/>
+          <p:cNvSpPr txBox="1"/>
+          <p:nvPr/>
+        </p:nvSpPr>
+        <p:spPr>
+          <a:xfrm>
+            <a:off x="1042416" y="1847088"/>
+            <a:ext cx="4800600" cy="438912"/>
+          </a:xfrm>
+          <a:prstGeom prst="rect">
+            <a:avLst/>
+          </a:prstGeom>
+          <a:noFill/>
+        </p:spPr>
+        <p:txBody>
+          <a:bodyPr wrap="square" lIns="0" rIns="0" tIns="0" bIns="0">
+            <a:spAutoFit/>
+          </a:bodyPr>
+          <a:lstStyle/>
+          <a:p>
+            <a:pPr>
+              <a:spcAft>
+                <a:spcPts val="1200"/>
+              </a:spcAft>
+            </a:pPr>
+            <a:r>
+              <a:rPr sz="2600" b="1">
+                <a:solidFill>
+                  <a:srgbClr val="3448ED"/>
+                </a:solidFill>
+                <a:latin typeface="Microsoft YaHei"/>
+              </a:rPr>
+              <a:t>网页 + 同源代理</a:t>
+            </a:r>
+          </a:p>
+        </p:txBody>
+      </p:sp>
+      <p:sp>
+        <p:nvSpPr>
+          <p:cNvPr id="8" name="TextBox 7"/>
+          <p:cNvSpPr txBox="1"/>
+          <p:nvPr/>
+        </p:nvSpPr>
+        <p:spPr>
+          <a:xfrm>
+            <a:off x="1042416" y="2450591"/>
+            <a:ext cx="4800600" cy="384048"/>
+          </a:xfrm>
+          <a:prstGeom prst="rect">
+            <a:avLst/>
+          </a:prstGeom>
+          <a:noFill/>
+        </p:spPr>
+        <p:txBody>
+          <a:bodyPr wrap="square" lIns="0" rIns="0" tIns="0" bIns="0">
+            <a:spAutoFit/>
+          </a:bodyPr>
+          <a:lstStyle/>
+          <a:p>
+            <a:pPr>
+              <a:spcAft>
+                <a:spcPts val="1200"/>
+              </a:spcAft>
+            </a:pPr>
+            <a:r>
+              <a:rPr sz="2200" b="0">
+                <a:solidFill>
+                  <a:srgbClr val="17212B"/>
+                </a:solidFill>
+                <a:latin typeface="Microsoft YaHei"/>
+              </a:rPr>
+              <a:t>20 页 · 430px 竖版 · 透明玻璃</a:t>
+            </a:r>
+          </a:p>
+        </p:txBody>
+      </p:sp>
+      <p:sp>
+        <p:nvSpPr>
+          <p:cNvPr id="9" name="Rounded Rectangle 8"/>
+          <p:cNvSpPr/>
+          <p:nvPr/>
+        </p:nvSpPr>
+        <p:spPr>
+          <a:xfrm>
+            <a:off x="6528816" y="1554480"/>
+            <a:ext cx="5394960" cy="1572768"/>
+          </a:xfrm>
+          <a:prstGeom prst="roundRect">
+            <a:avLst>
+              <a:gd name="adj" fmla="val 12000"/>
+            </a:avLst>
+          </a:prstGeom>
+          <a:solidFill>
+            <a:srgbClr val="FFFFFF"/>
+          </a:solidFill>
+          <a:ln>
+            <a:noFill/>
+          </a:ln>
+        </p:spPr>
+        <p:style>
+          <a:lnRef idx="1">
+            <a:schemeClr val="accent1"/>
+          </a:lnRef>
+          <a:fillRef idx="3">
+            <a:schemeClr val="accent1"/>
+          </a:fillRef>
+          <a:effectRef idx="2">
+            <a:schemeClr val="accent1"/>
+          </a:effectRef>
+          <a:fontRef idx="minor">
+            <a:schemeClr val="lt1"/>
+          </a:fontRef>
+        </p:style>
+        <p:txBody>
+          <a:bodyPr rtlCol="0" anchor="ctr"/>
+          <a:lstStyle/>
+          <a:p>
+            <a:pPr algn="ctr"/>
+          </a:p>
+        </p:txBody>
+      </p:sp>
+      <p:sp>
+        <p:nvSpPr>
+          <p:cNvPr id="10" name="TextBox 9"/>
+          <p:cNvSpPr txBox="1"/>
+          <p:nvPr/>
+        </p:nvSpPr>
+        <p:spPr>
+          <a:xfrm>
+            <a:off x="6784848" y="1847088"/>
+            <a:ext cx="4800600" cy="438912"/>
+          </a:xfrm>
+          <a:prstGeom prst="rect">
+            <a:avLst/>
+          </a:prstGeom>
+          <a:noFill/>
+        </p:spPr>
+        <p:txBody>
+          <a:bodyPr wrap="square" lIns="0" rIns="0" tIns="0" bIns="0">
+            <a:spAutoFit/>
+          </a:bodyPr>
+          <a:lstStyle/>
+          <a:p>
+            <a:pPr>
+              <a:spcAft>
+                <a:spcPts val="1200"/>
+              </a:spcAft>
+            </a:pPr>
+            <a:r>
+              <a:rPr sz="2600" b="1">
+                <a:solidFill>
+                  <a:srgbClr val="3448ED"/>
+                </a:solidFill>
+                <a:latin typeface="Microsoft YaHei"/>
+              </a:rPr>
+              <a:t>记账 / 投研 / BFF</a:t>
+            </a:r>
+          </a:p>
+        </p:txBody>
+      </p:sp>
+      <p:sp>
+        <p:nvSpPr>
+          <p:cNvPr id="11" name="TextBox 10"/>
+          <p:cNvSpPr txBox="1"/>
+          <p:nvPr/>
+        </p:nvSpPr>
+        <p:spPr>
+          <a:xfrm>
+            <a:off x="6784848" y="2450591"/>
+            <a:ext cx="4800600" cy="384048"/>
+          </a:xfrm>
+          <a:prstGeom prst="rect">
+            <a:avLst/>
+          </a:prstGeom>
+          <a:noFill/>
+        </p:spPr>
+        <p:txBody>
+          <a:bodyPr wrap="square" lIns="0" rIns="0" tIns="0" bIns="0">
+            <a:spAutoFit/>
+          </a:bodyPr>
+          <a:lstStyle/>
+          <a:p>
+            <a:pPr>
+              <a:spcAft>
+                <a:spcPts val="1200"/>
+              </a:spcAft>
+            </a:pPr>
+            <a:r>
+              <a:rPr sz="2200" b="0">
+                <a:solidFill>
+                  <a:srgbClr val="17212B"/>
+                </a:solidFill>
+                <a:latin typeface="Microsoft YaHei"/>
+              </a:rPr>
+              <a:t>保留原两个服务</a:t>
+            </a:r>
+          </a:p>
+        </p:txBody>
+      </p:sp>
+      <p:sp>
+        <p:nvSpPr>
+          <p:cNvPr id="12" name="Rounded Rectangle 11"/>
+          <p:cNvSpPr/>
+          <p:nvPr/>
+        </p:nvSpPr>
+        <p:spPr>
+          <a:xfrm>
+            <a:off x="786384" y="3447287"/>
+            <a:ext cx="5394960" cy="1572768"/>
+          </a:xfrm>
+          <a:prstGeom prst="roundRect">
+            <a:avLst>
+              <a:gd name="adj" fmla="val 12000"/>
+            </a:avLst>
+          </a:prstGeom>
+          <a:solidFill>
+            <a:srgbClr val="FFFFFF"/>
+          </a:solidFill>
+          <a:ln>
+            <a:noFill/>
+          </a:ln>
+        </p:spPr>
+        <p:style>
+          <a:lnRef idx="1">
+            <a:schemeClr val="accent1"/>
+          </a:lnRef>
+          <a:fillRef idx="3">
+            <a:schemeClr val="accent1"/>
+          </a:fillRef>
+          <a:effectRef idx="2">
+            <a:schemeClr val="accent1"/>
+          </a:effectRef>
+          <a:fontRef idx="minor">
+            <a:schemeClr val="lt1"/>
+          </a:fontRef>
+        </p:style>
+        <p:txBody>
+          <a:bodyPr rtlCol="0" anchor="ctr"/>
+          <a:lstStyle/>
+          <a:p>
+            <a:pPr algn="ctr"/>
+          </a:p>
+        </p:txBody>
+      </p:sp>
+      <p:sp>
+        <p:nvSpPr>
+          <p:cNvPr id="13" name="TextBox 12"/>
+          <p:cNvSpPr txBox="1"/>
+          <p:nvPr/>
+        </p:nvSpPr>
+        <p:spPr>
+          <a:xfrm>
+            <a:off x="1042416" y="3739896"/>
+            <a:ext cx="4800600" cy="438912"/>
+          </a:xfrm>
+          <a:prstGeom prst="rect">
+            <a:avLst/>
+          </a:prstGeom>
+          <a:noFill/>
+        </p:spPr>
+        <p:txBody>
+          <a:bodyPr wrap="square" lIns="0" rIns="0" tIns="0" bIns="0">
+            <a:spAutoFit/>
+          </a:bodyPr>
+          <a:lstStyle/>
+          <a:p>
+            <a:pPr>
+              <a:spcAft>
+                <a:spcPts val="1200"/>
+              </a:spcAft>
+            </a:pPr>
+            <a:r>
+              <a:rPr sz="2600" b="1">
+                <a:solidFill>
+                  <a:srgbClr val="3448ED"/>
+                </a:solidFill>
+                <a:latin typeface="Microsoft YaHei"/>
+              </a:rPr>
+              <a:t>本地共享模型</a:t>
+            </a:r>
+          </a:p>
+        </p:txBody>
+      </p:sp>
+      <p:sp>
+        <p:nvSpPr>
+          <p:cNvPr id="14" name="TextBox 13"/>
+          <p:cNvSpPr txBox="1"/>
+          <p:nvPr/>
+        </p:nvSpPr>
+        <p:spPr>
+          <a:xfrm>
+            <a:off x="1042416" y="4343400"/>
+            <a:ext cx="4800600" cy="384048"/>
+          </a:xfrm>
+          <a:prstGeom prst="rect">
+            <a:avLst/>
+          </a:prstGeom>
+          <a:noFill/>
+        </p:spPr>
+        <p:txBody>
+          <a:bodyPr wrap="square" lIns="0" rIns="0" tIns="0" bIns="0">
+            <a:spAutoFit/>
+          </a:bodyPr>
+          <a:lstStyle/>
+          <a:p>
+            <a:pPr>
+              <a:spcAft>
+                <a:spcPts val="1200"/>
+              </a:spcAft>
+            </a:pPr>
+            <a:r>
+              <a:rPr sz="2200" b="0">
+                <a:solidFill>
+                  <a:srgbClr val="17212B"/>
+                </a:solidFill>
+                <a:latin typeface="Microsoft YaHei"/>
+              </a:rPr>
+              <a:t>不直接持有操作权限</a:t>
+            </a:r>
+          </a:p>
+        </p:txBody>
+      </p:sp>
+      <p:sp>
+        <p:nvSpPr>
+          <p:cNvPr id="15" name="Rounded Rectangle 14"/>
+          <p:cNvSpPr/>
+          <p:nvPr/>
+        </p:nvSpPr>
+        <p:spPr>
+          <a:xfrm>
+            <a:off x="6528816" y="3447287"/>
+            <a:ext cx="5394960" cy="1572768"/>
+          </a:xfrm>
+          <a:prstGeom prst="roundRect">
+            <a:avLst>
+              <a:gd name="adj" fmla="val 12000"/>
+            </a:avLst>
+          </a:prstGeom>
+          <a:solidFill>
+            <a:srgbClr val="FFFFFF"/>
+          </a:solidFill>
+          <a:ln>
+            <a:noFill/>
+          </a:ln>
+        </p:spPr>
+        <p:style>
+          <a:lnRef idx="1">
+            <a:schemeClr val="accent1"/>
+          </a:lnRef>
+          <a:fillRef idx="3">
+            <a:schemeClr val="accent1"/>
+          </a:fillRef>
+          <a:effectRef idx="2">
+            <a:schemeClr val="accent1"/>
+          </a:effectRef>
+          <a:fontRef idx="minor">
+            <a:schemeClr val="lt1"/>
+          </a:fontRef>
+        </p:style>
+        <p:txBody>
+          <a:bodyPr rtlCol="0" anchor="ctr"/>
+          <a:lstStyle/>
+          <a:p>
+            <a:pPr algn="ctr"/>
+          </a:p>
+        </p:txBody>
+      </p:sp>
+      <p:sp>
+        <p:nvSpPr>
+          <p:cNvPr id="16" name="TextBox 15"/>
+          <p:cNvSpPr txBox="1"/>
+          <p:nvPr/>
+        </p:nvSpPr>
+        <p:spPr>
+          <a:xfrm>
+            <a:off x="6784848" y="3739896"/>
+            <a:ext cx="4800600" cy="438912"/>
+          </a:xfrm>
+          <a:prstGeom prst="rect">
+            <a:avLst/>
+          </a:prstGeom>
+          <a:noFill/>
+        </p:spPr>
+        <p:txBody>
+          <a:bodyPr wrap="square" lIns="0" rIns="0" tIns="0" bIns="0">
+            <a:spAutoFit/>
+          </a:bodyPr>
+          <a:lstStyle/>
+          <a:p>
+            <a:pPr>
+              <a:spcAft>
+                <a:spcPts val="1200"/>
+              </a:spcAft>
+            </a:pPr>
+            <a:r>
+              <a:rPr sz="2600" b="1">
+                <a:solidFill>
+                  <a:srgbClr val="3448ED"/>
+                </a:solidFill>
+                <a:latin typeface="Microsoft YaHei"/>
+              </a:rPr>
+              <a:t>MOSAIC + 银行模拟</a:t>
+            </a:r>
+          </a:p>
+        </p:txBody>
+      </p:sp>
+      <p:sp>
+        <p:nvSpPr>
+          <p:cNvPr id="17" name="TextBox 16"/>
+          <p:cNvSpPr txBox="1"/>
+          <p:nvPr/>
+        </p:nvSpPr>
+        <p:spPr>
+          <a:xfrm>
+            <a:off x="6784848" y="4343400"/>
+            <a:ext cx="4800600" cy="384048"/>
+          </a:xfrm>
+          <a:prstGeom prst="rect">
+            <a:avLst/>
+          </a:prstGeom>
+          <a:noFill/>
+        </p:spPr>
+        <p:txBody>
+          <a:bodyPr wrap="square" lIns="0" rIns="0" tIns="0" bIns="0">
+            <a:spAutoFit/>
+          </a:bodyPr>
+          <a:lstStyle/>
+          <a:p>
+            <a:pPr>
+              <a:spcAft>
+                <a:spcPts val="1200"/>
+              </a:spcAft>
+            </a:pPr>
+            <a:r>
+              <a:rPr sz="2200" b="0">
+                <a:solidFill>
+                  <a:srgbClr val="17212B"/>
+                </a:solidFill>
+                <a:latin typeface="Microsoft YaHei"/>
+              </a:rPr>
+              <a:t>独立密钥 · 持久结果</a:t>
+            </a:r>
+          </a:p>
+        </p:txBody>
+      </p:sp>
+      <p:sp>
+        <p:nvSpPr>
+          <p:cNvPr id="18" name="TextBox 17"/>
+          <p:cNvSpPr txBox="1"/>
+          <p:nvPr/>
+        </p:nvSpPr>
+        <p:spPr>
+          <a:xfrm>
+            <a:off x="877824" y="5715000"/>
+            <a:ext cx="10698480" cy="548640"/>
+          </a:xfrm>
+          <a:prstGeom prst="rect">
+            <a:avLst/>
+          </a:prstGeom>
+          <a:noFill/>
+        </p:spPr>
+        <p:txBody>
+          <a:bodyPr wrap="square" lIns="0" rIns="0" tIns="0" bIns="0">
+            <a:spAutoFit/>
+          </a:bodyPr>
+          <a:lstStyle/>
+          <a:p>
+            <a:pPr>
+              <a:spcAft>
+                <a:spcPts val="1200"/>
+              </a:spcAft>
+            </a:pPr>
+            <a:r>
+              <a:rPr sz="2000" b="0">
+                <a:solidFill>
+                  <a:srgbClr val="607086"/>
+                </a:solidFill>
+                <a:latin typeface="Microsoft YaHei"/>
+              </a:rPr>
+              <a:t>安全内核 MIT；Qwen 基座 Apache；保留来源归属，新增集成单列。</a:t>
+            </a:r>
+          </a:p>
+        </p:txBody>
+      </p:sp>
+    </p:spTree>
+  </p:cSld>
+  <p:clrMapOvr>
+    <a:masterClrMapping/>
+  </p:clrMapOvr>
+</p:sld>
+</file>
+
+<file path=ppt/slides/slide15.xml><?xml version="1.0" encoding="utf-8"?>
+<p:sld xmlns:a="http://schemas.openxmlformats.org/drawingml/2006/main" xmlns:p="http://schemas.openxmlformats.org/presentationml/2006/main" xmlns:r="http://schemas.openxmlformats.org/officeDocument/2006/relationships">
+  <p:cSld>
+    <p:bg>
+      <p:bgPr>
+        <a:solidFill>
+          <a:srgbClr val="F3F6FB"/>
+        </a:solidFill>
+        <a:effectLst/>
+      </p:bgPr>
+    </p:bg>
+    <p:spTree>
+      <p:nvGrpSpPr>
+        <p:cNvPr id="1" name=""/>
+        <p:cNvGrpSpPr/>
+        <p:nvPr/>
+      </p:nvGrpSpPr>
+      <p:grpSpPr/>
+      <p:sp>
+        <p:nvSpPr>
+          <p:cNvPr id="2" name="Rounded Rectangle 1"/>
+          <p:cNvSpPr/>
+          <p:nvPr/>
+        </p:nvSpPr>
+        <p:spPr>
+          <a:xfrm>
+            <a:off x="365760" y="320040"/>
+            <a:ext cx="11457432" cy="859536"/>
+          </a:xfrm>
+          <a:prstGeom prst="roundRect">
+            <a:avLst>
+              <a:gd name="adj" fmla="val 12000"/>
+            </a:avLst>
+          </a:prstGeom>
+          <a:solidFill>
+            <a:srgbClr val="FFFFFF"/>
+          </a:solidFill>
+          <a:ln>
+            <a:noFill/>
+          </a:ln>
+        </p:spPr>
+        <p:style>
+          <a:lnRef idx="1">
+            <a:schemeClr val="accent1"/>
+          </a:lnRef>
+          <a:fillRef idx="3">
+            <a:schemeClr val="accent1"/>
+          </a:fillRef>
+          <a:effectRef idx="2">
+            <a:schemeClr val="accent1"/>
+          </a:effectRef>
+          <a:fontRef idx="minor">
+            <a:schemeClr val="lt1"/>
+          </a:fontRef>
+        </p:style>
+        <p:txBody>
+          <a:bodyPr rtlCol="0" anchor="ctr"/>
+          <a:lstStyle/>
+          <a:p>
+            <a:pPr algn="ctr"/>
+          </a:p>
+        </p:txBody>
+      </p:sp>
+      <p:sp>
+        <p:nvSpPr>
+          <p:cNvPr id="3" name="TextBox 2"/>
+          <p:cNvSpPr txBox="1"/>
+          <p:nvPr/>
+        </p:nvSpPr>
+        <p:spPr>
+          <a:xfrm>
+            <a:off x="658368" y="493776"/>
+            <a:ext cx="9966960" cy="493776"/>
+          </a:xfrm>
+          <a:prstGeom prst="rect">
+            <a:avLst/>
+          </a:prstGeom>
+          <a:noFill/>
+        </p:spPr>
+        <p:txBody>
+          <a:bodyPr wrap="square" lIns="0" rIns="0" tIns="0" bIns="0">
+            <a:spAutoFit/>
+          </a:bodyPr>
+          <a:lstStyle/>
+          <a:p>
+            <a:pPr>
+              <a:spcAft>
+                <a:spcPts val="1200"/>
+              </a:spcAft>
+            </a:pPr>
+            <a:r>
+              <a:rPr sz="3000" b="1">
+                <a:solidFill>
+                  <a:srgbClr val="17212B"/>
+                </a:solidFill>
+                <a:latin typeface="Microsoft YaHei"/>
+              </a:rPr>
+              <a:t>赛道匹配，补强项与现有能力分开</a:t>
+            </a:r>
+          </a:p>
+        </p:txBody>
+      </p:sp>
+      <p:sp>
+        <p:nvSpPr>
+          <p:cNvPr id="4" name="TextBox 3"/>
+          <p:cNvSpPr txBox="1"/>
+          <p:nvPr/>
+        </p:nvSpPr>
+        <p:spPr>
+          <a:xfrm>
+            <a:off x="10515600" y="548640"/>
+            <a:ext cx="1143000" cy="320040"/>
+          </a:xfrm>
+          <a:prstGeom prst="rect">
+            <a:avLst/>
+          </a:prstGeom>
+          <a:noFill/>
+        </p:spPr>
+        <p:txBody>
+          <a:bodyPr wrap="square" lIns="0" rIns="0" tIns="0" bIns="0">
+            <a:spAutoFit/>
+          </a:bodyPr>
+          <a:lstStyle/>
+          <a:p>
+            <a:pPr>
+              <a:spcAft>
+                <a:spcPts val="1200"/>
+              </a:spcAft>
+            </a:pPr>
+            <a:r>
+              <a:rPr sz="1700" b="1">
+                <a:solidFill>
+                  <a:srgbClr val="3448ED"/>
+                </a:solidFill>
+                <a:latin typeface="Microsoft YaHei"/>
+              </a:rPr>
+              <a:t>FinPilot</a:t>
+            </a:r>
+          </a:p>
+        </p:txBody>
+      </p:sp>
+      <p:sp>
+        <p:nvSpPr>
+          <p:cNvPr id="5" name="TextBox 4"/>
+          <p:cNvSpPr txBox="1"/>
+          <p:nvPr/>
+        </p:nvSpPr>
+        <p:spPr>
+          <a:xfrm>
+            <a:off x="11292840" y="6419088"/>
+            <a:ext cx="457200" cy="182880"/>
+          </a:xfrm>
+          <a:prstGeom prst="rect">
+            <a:avLst/>
+          </a:prstGeom>
+          <a:noFill/>
+        </p:spPr>
+        <p:txBody>
+          <a:bodyPr wrap="square" lIns="0" rIns="0" tIns="0" bIns="0">
+            <a:spAutoFit/>
+          </a:bodyPr>
+          <a:lstStyle/>
+          <a:p>
+            <a:pPr>
+              <a:spcAft>
+                <a:spcPts val="1200"/>
+              </a:spcAft>
+            </a:pPr>
+            <a:r>
+              <a:rPr sz="1000" b="0">
+                <a:solidFill>
+                  <a:srgbClr val="607086"/>
+                </a:solidFill>
+                <a:latin typeface="Microsoft YaHei"/>
+              </a:rPr>
+              <a:t>15</a:t>
+            </a:r>
+          </a:p>
+        </p:txBody>
+      </p:sp>
+      <p:sp>
+        <p:nvSpPr>
+          <p:cNvPr id="6" name="Rectangle 5"/>
+          <p:cNvSpPr/>
+          <p:nvPr/>
+        </p:nvSpPr>
+        <p:spPr>
+          <a:xfrm>
+            <a:off x="777240" y="1572768"/>
+            <a:ext cx="91440" cy="640080"/>
+          </a:xfrm>
+          <a:prstGeom prst="rect">
+            <a:avLst/>
+          </a:prstGeom>
+          <a:solidFill>
+            <a:srgbClr val="3448ED"/>
+          </a:solidFill>
+          <a:ln>
+            <a:noFill/>
+          </a:ln>
+        </p:spPr>
+        <p:style>
+          <a:lnRef idx="1">
+            <a:schemeClr val="accent1"/>
+          </a:lnRef>
+          <a:fillRef idx="3">
+            <a:schemeClr val="accent1"/>
+          </a:fillRef>
+          <a:effectRef idx="2">
+            <a:schemeClr val="accent1"/>
+          </a:effectRef>
+          <a:fontRef idx="minor">
+            <a:schemeClr val="lt1"/>
+          </a:fontRef>
+        </p:style>
+        <p:txBody>
+          <a:bodyPr rtlCol="0" anchor="ctr"/>
+          <a:lstStyle/>
+          <a:p>
+            <a:pPr algn="ctr"/>
+          </a:p>
+        </p:txBody>
+      </p:sp>
+      <p:sp>
+        <p:nvSpPr>
+          <p:cNvPr id="7" name="TextBox 6"/>
+          <p:cNvSpPr txBox="1"/>
+          <p:nvPr/>
+        </p:nvSpPr>
+        <p:spPr>
+          <a:xfrm>
+            <a:off x="1024128" y="1572768"/>
+            <a:ext cx="10241280" cy="320040"/>
+          </a:xfrm>
+          <a:prstGeom prst="rect">
+            <a:avLst/>
+          </a:prstGeom>
+          <a:noFill/>
+        </p:spPr>
+        <p:txBody>
+          <a:bodyPr wrap="square" lIns="0" rIns="0" tIns="0" bIns="0">
+            <a:spAutoFit/>
+          </a:bodyPr>
+          <a:lstStyle/>
+          <a:p>
+            <a:pPr>
+              <a:spcAft>
+                <a:spcPts val="1200"/>
+              </a:spcAft>
+            </a:pPr>
+            <a:r>
+              <a:rPr sz="2100" b="1">
+                <a:solidFill>
+                  <a:srgbClr val="17212B"/>
+                </a:solidFill>
+                <a:latin typeface="Microsoft YaHei"/>
+              </a:rPr>
+              <a:t>已补齐：个人财富视图</a:t>
+            </a:r>
+          </a:p>
+        </p:txBody>
+      </p:sp>
+      <p:sp>
+        <p:nvSpPr>
+          <p:cNvPr id="8" name="TextBox 7"/>
+          <p:cNvSpPr txBox="1"/>
+          <p:nvPr/>
+        </p:nvSpPr>
+        <p:spPr>
+          <a:xfrm>
+            <a:off x="1024128" y="1965960"/>
+            <a:ext cx="10241280" cy="530352"/>
+          </a:xfrm>
+          <a:prstGeom prst="rect">
+            <a:avLst/>
+          </a:prstGeom>
+          <a:noFill/>
+        </p:spPr>
+        <p:txBody>
+          <a:bodyPr wrap="square" lIns="0" rIns="0" tIns="0" bIns="0">
+            <a:spAutoFit/>
+          </a:bodyPr>
+          <a:lstStyle/>
+          <a:p>
+            <a:pPr>
+              <a:spcAft>
+                <a:spcPts val="1200"/>
+              </a:spcAft>
+            </a:pPr>
+            <a:r>
+              <a:rPr sz="1700" b="0">
+                <a:solidFill>
+                  <a:srgbClr val="607086"/>
+                </a:solidFill>
+                <a:latin typeface="Microsoft YaHei"/>
+              </a:rPr>
+              <a:t>资产、负债、净资产与可用现金，连接个人账本规划</a:t>
+            </a:r>
+          </a:p>
+        </p:txBody>
+      </p:sp>
+      <p:sp>
+        <p:nvSpPr>
+          <p:cNvPr id="9" name="Rectangle 8"/>
+          <p:cNvSpPr/>
+          <p:nvPr/>
+        </p:nvSpPr>
+        <p:spPr>
+          <a:xfrm>
+            <a:off x="777240" y="2560320"/>
+            <a:ext cx="91440" cy="640080"/>
+          </a:xfrm>
+          <a:prstGeom prst="rect">
+            <a:avLst/>
+          </a:prstGeom>
+          <a:solidFill>
+            <a:srgbClr val="3448ED"/>
+          </a:solidFill>
+          <a:ln>
+            <a:noFill/>
+          </a:ln>
+        </p:spPr>
+        <p:style>
+          <a:lnRef idx="1">
+            <a:schemeClr val="accent1"/>
+          </a:lnRef>
+          <a:fillRef idx="3">
+            <a:schemeClr val="accent1"/>
+          </a:fillRef>
+          <a:effectRef idx="2">
+            <a:schemeClr val="accent1"/>
+          </a:effectRef>
+          <a:fontRef idx="minor">
+            <a:schemeClr val="lt1"/>
+          </a:fontRef>
+        </p:style>
+        <p:txBody>
+          <a:bodyPr rtlCol="0" anchor="ctr"/>
+          <a:lstStyle/>
+          <a:p>
+            <a:pPr algn="ctr"/>
+          </a:p>
+        </p:txBody>
+      </p:sp>
+      <p:sp>
+        <p:nvSpPr>
+          <p:cNvPr id="10" name="TextBox 9"/>
+          <p:cNvSpPr txBox="1"/>
+          <p:nvPr/>
+        </p:nvSpPr>
+        <p:spPr>
+          <a:xfrm>
+            <a:off x="1024128" y="2560320"/>
+            <a:ext cx="10241280" cy="320040"/>
+          </a:xfrm>
+          <a:prstGeom prst="rect">
+            <a:avLst/>
+          </a:prstGeom>
+          <a:noFill/>
+        </p:spPr>
+        <p:txBody>
+          <a:bodyPr wrap="square" lIns="0" rIns="0" tIns="0" bIns="0">
+            <a:spAutoFit/>
+          </a:bodyPr>
+          <a:lstStyle/>
+          <a:p>
+            <a:pPr>
+              <a:spcAft>
+                <a:spcPts val="1200"/>
+              </a:spcAft>
+            </a:pPr>
+            <a:r>
+              <a:rPr sz="2100" b="1">
+                <a:solidFill>
+                  <a:srgbClr val="17212B"/>
+                </a:solidFill>
+                <a:latin typeface="Microsoft YaHei"/>
+              </a:rPr>
+              <a:t>已补齐：让用户看懂</a:t>
+            </a:r>
+          </a:p>
+        </p:txBody>
+      </p:sp>
+      <p:sp>
+        <p:nvSpPr>
+          <p:cNvPr id="11" name="TextBox 10"/>
+          <p:cNvSpPr txBox="1"/>
+          <p:nvPr/>
+        </p:nvSpPr>
+        <p:spPr>
+          <a:xfrm>
+            <a:off x="1024128" y="2953512"/>
+            <a:ext cx="10241280" cy="530352"/>
+          </a:xfrm>
+          <a:prstGeom prst="rect">
+            <a:avLst/>
+          </a:prstGeom>
+          <a:noFill/>
+        </p:spPr>
+        <p:txBody>
+          <a:bodyPr wrap="square" lIns="0" rIns="0" tIns="0" bIns="0">
+            <a:spAutoFit/>
+          </a:bodyPr>
+          <a:lstStyle/>
+          <a:p>
+            <a:pPr>
+              <a:spcAft>
+                <a:spcPts val="1200"/>
+              </a:spcAft>
+            </a:pPr>
+            <a:r>
+              <a:rPr sz="1700" b="0">
+                <a:solidFill>
+                  <a:srgbClr val="607086"/>
+                </a:solidFill>
+                <a:latin typeface="Microsoft YaHei"/>
+              </a:rPr>
+              <a:t>12 个按需词条与费用试算；解释不占满主界面</a:t>
+            </a:r>
+          </a:p>
+        </p:txBody>
+      </p:sp>
+      <p:sp>
+        <p:nvSpPr>
+          <p:cNvPr id="12" name="Rectangle 11"/>
+          <p:cNvSpPr/>
+          <p:nvPr/>
+        </p:nvSpPr>
+        <p:spPr>
+          <a:xfrm>
+            <a:off x="777240" y="3547872"/>
+            <a:ext cx="91440" cy="640080"/>
+          </a:xfrm>
+          <a:prstGeom prst="rect">
+            <a:avLst/>
+          </a:prstGeom>
+          <a:solidFill>
+            <a:srgbClr val="3448ED"/>
+          </a:solidFill>
+          <a:ln>
+            <a:noFill/>
+          </a:ln>
+        </p:spPr>
+        <p:style>
+          <a:lnRef idx="1">
+            <a:schemeClr val="accent1"/>
+          </a:lnRef>
+          <a:fillRef idx="3">
+            <a:schemeClr val="accent1"/>
+          </a:fillRef>
+          <a:effectRef idx="2">
+            <a:schemeClr val="accent1"/>
+          </a:effectRef>
+          <a:fontRef idx="minor">
+            <a:schemeClr val="lt1"/>
+          </a:fontRef>
+        </p:style>
+        <p:txBody>
+          <a:bodyPr rtlCol="0" anchor="ctr"/>
+          <a:lstStyle/>
+          <a:p>
+            <a:pPr algn="ctr"/>
+          </a:p>
+        </p:txBody>
+      </p:sp>
+      <p:sp>
+        <p:nvSpPr>
+          <p:cNvPr id="13" name="TextBox 12"/>
+          <p:cNvSpPr txBox="1"/>
+          <p:nvPr/>
+        </p:nvSpPr>
+        <p:spPr>
+          <a:xfrm>
+            <a:off x="1024128" y="3547872"/>
+            <a:ext cx="10241280" cy="320040"/>
+          </a:xfrm>
+          <a:prstGeom prst="rect">
+            <a:avLst/>
+          </a:prstGeom>
+          <a:noFill/>
+        </p:spPr>
+        <p:txBody>
+          <a:bodyPr wrap="square" lIns="0" rIns="0" tIns="0" bIns="0">
+            <a:spAutoFit/>
+          </a:bodyPr>
+          <a:lstStyle/>
+          <a:p>
+            <a:pPr>
+              <a:spcAft>
+                <a:spcPts val="1200"/>
+              </a:spcAft>
+            </a:pPr>
+            <a:r>
+              <a:rPr sz="2100" b="1">
+                <a:solidFill>
+                  <a:srgbClr val="17212B"/>
+                </a:solidFill>
+                <a:latin typeface="Microsoft YaHei"/>
+              </a:rPr>
+              <a:t>两人协作，下一步验证</a:t>
+            </a:r>
+          </a:p>
+        </p:txBody>
+      </p:sp>
+      <p:sp>
+        <p:nvSpPr>
+          <p:cNvPr id="14" name="TextBox 13"/>
+          <p:cNvSpPr txBox="1"/>
+          <p:nvPr/>
+        </p:nvSpPr>
+        <p:spPr>
+          <a:xfrm>
+            <a:off x="1024128" y="3941063"/>
+            <a:ext cx="10241280" cy="530352"/>
+          </a:xfrm>
+          <a:prstGeom prst="rect">
+            <a:avLst/>
+          </a:prstGeom>
+          <a:noFill/>
+        </p:spPr>
+        <p:txBody>
+          <a:bodyPr wrap="square" lIns="0" rIns="0" tIns="0" bIns="0">
+            <a:spAutoFit/>
+          </a:bodyPr>
+          <a:lstStyle/>
+          <a:p>
+            <a:pPr>
+              <a:spcAft>
+                <a:spcPts val="1200"/>
+              </a:spcAft>
+            </a:pPr>
+            <a:r>
+              <a:rPr sz="1700" b="0">
+                <a:solidFill>
+                  <a:srgbClr val="607086"/>
+                </a:solidFill>
+                <a:latin typeface="Microsoft YaHei"/>
+              </a:rPr>
+              <a:t>产品交互与模型后端协同；开展自愿用户理解测试</a:t>
+            </a:r>
+          </a:p>
+        </p:txBody>
+      </p:sp>
+      <p:sp>
+        <p:nvSpPr>
+          <p:cNvPr id="15" name="Rectangle 14"/>
+          <p:cNvSpPr/>
+          <p:nvPr/>
+        </p:nvSpPr>
+        <p:spPr>
+          <a:xfrm>
+            <a:off x="777240" y="4535424"/>
+            <a:ext cx="91440" cy="640080"/>
+          </a:xfrm>
+          <a:prstGeom prst="rect">
+            <a:avLst/>
+          </a:prstGeom>
+          <a:solidFill>
+            <a:srgbClr val="3448ED"/>
+          </a:solidFill>
+          <a:ln>
+            <a:noFill/>
+          </a:ln>
+        </p:spPr>
+        <p:style>
+          <a:lnRef idx="1">
+            <a:schemeClr val="accent1"/>
+          </a:lnRef>
+          <a:fillRef idx="3">
+            <a:schemeClr val="accent1"/>
+          </a:fillRef>
+          <a:effectRef idx="2">
+            <a:schemeClr val="accent1"/>
+          </a:effectRef>
+          <a:fontRef idx="minor">
+            <a:schemeClr val="lt1"/>
+          </a:fontRef>
+        </p:style>
+        <p:txBody>
+          <a:bodyPr rtlCol="0" anchor="ctr"/>
+          <a:lstStyle/>
+          <a:p>
+            <a:pPr algn="ctr"/>
+          </a:p>
+        </p:txBody>
+      </p:sp>
+      <p:sp>
+        <p:nvSpPr>
           <p:cNvPr id="16" name="TextBox 15"/>
           <p:cNvSpPr txBox="1"/>
           <p:nvPr/>
@@ -7974,7 +9600,7 @@
                 </a:solidFill>
                 <a:latin typeface="Microsoft YaHei"/>
               </a:rPr>
-              <a:t>单用户模拟原型；没有真实银行接入、正式适当性或收益承诺</a:t>
+              <a:t>手动登记、单用户、模拟银行；无自动资产聚合和收益承诺</a:t>
             </a:r>
           </a:p>
         </p:txBody>
@@ -11167,7 +12793,7 @@
         </p:nvPicPr>
         <p:blipFill>
           <a:blip r:embed="rId2"/>
-          <a:srcRect b="48535"/>
+          <a:srcRect b="4922"/>
           <a:stretch>
             <a:fillRect/>
           </a:stretch>
@@ -11287,7 +12913,7 @@
                 </a:solidFill>
                 <a:latin typeface="Microsoft YaHei"/>
               </a:rPr>
-              <a:t>模型理解与解释，服务器核对事实</a:t>
+              <a:t>拥有多少，和现在能用多少分开看</a:t>
             </a:r>
           </a:p>
         </p:txBody>
@@ -11372,22 +12998,20 @@
       </p:sp>
       <p:sp>
         <p:nvSpPr>
-          <p:cNvPr id="6" name="Rounded Rectangle 5"/>
+          <p:cNvPr id="6" name="Rectangle 5"/>
           <p:cNvSpPr/>
           <p:nvPr/>
         </p:nvSpPr>
         <p:spPr>
           <a:xfrm>
-            <a:off x="914400" y="1719072"/>
-            <a:ext cx="2926080" cy="3200400"/>
-          </a:xfrm>
-          <a:prstGeom prst="roundRect">
-            <a:avLst>
-              <a:gd name="adj" fmla="val 12000"/>
-            </a:avLst>
+            <a:off x="777240" y="1572768"/>
+            <a:ext cx="91440" cy="640080"/>
+          </a:xfrm>
+          <a:prstGeom prst="rect">
+            <a:avLst/>
           </a:prstGeom>
           <a:solidFill>
-            <a:srgbClr val="FFFFFF"/>
+            <a:srgbClr val="3448ED"/>
           </a:solidFill>
           <a:ln>
             <a:noFill/>
@@ -11423,33 +13047,33 @@
         </p:nvSpPr>
         <p:spPr>
           <a:xfrm>
-            <a:off x="1170432" y="1965960"/>
-            <a:ext cx="2423160" cy="457200"/>
-          </a:xfrm>
-          <a:prstGeom prst="rect">
-            <a:avLst/>
-          </a:prstGeom>
-          <a:noFill/>
-        </p:spPr>
-        <p:txBody>
-          <a:bodyPr wrap="square" lIns="0" rIns="0" tIns="0" bIns="0">
-            <a:spAutoFit/>
-          </a:bodyPr>
-          <a:lstStyle/>
-          <a:p>
-            <a:pPr>
-              <a:spcAft>
-                <a:spcPts val="1200"/>
-              </a:spcAft>
-            </a:pPr>
-            <a:r>
-              <a:rPr sz="2500" b="1">
-                <a:solidFill>
-                  <a:srgbClr val="3448ED"/>
-                </a:solidFill>
-                <a:latin typeface="Microsoft YaHei"/>
-              </a:rPr>
-              <a:t>Qwen3 + LoRA</a:t>
+            <a:off x="1024128" y="1572768"/>
+            <a:ext cx="6537959" cy="320040"/>
+          </a:xfrm>
+          <a:prstGeom prst="rect">
+            <a:avLst/>
+          </a:prstGeom>
+          <a:noFill/>
+        </p:spPr>
+        <p:txBody>
+          <a:bodyPr wrap="square" lIns="0" rIns="0" tIns="0" bIns="0">
+            <a:spAutoFit/>
+          </a:bodyPr>
+          <a:lstStyle/>
+          <a:p>
+            <a:pPr>
+              <a:spcAft>
+                <a:spcPts val="1200"/>
+              </a:spcAft>
+            </a:pPr>
+            <a:r>
+              <a:rPr sz="2100" b="1">
+                <a:solidFill>
+                  <a:srgbClr val="17212B"/>
+                </a:solidFill>
+                <a:latin typeface="Microsoft YaHei"/>
+              </a:rPr>
+              <a:t>资产与负债一起盘点</a:t>
             </a:r>
           </a:p>
         </p:txBody>
@@ -11462,87 +13086,53 @@
         </p:nvSpPr>
         <p:spPr>
           <a:xfrm>
-            <a:off x="1170432" y="2697480"/>
-            <a:ext cx="2423160" cy="1920240"/>
-          </a:xfrm>
-          <a:prstGeom prst="rect">
-            <a:avLst/>
-          </a:prstGeom>
-          <a:noFill/>
-        </p:spPr>
-        <p:txBody>
-          <a:bodyPr wrap="square" lIns="0" rIns="0" tIns="0" bIns="0">
-            <a:spAutoFit/>
-          </a:bodyPr>
-          <a:lstStyle/>
-          <a:p>
-            <a:pPr>
-              <a:spcAft>
-                <a:spcPts val="1200"/>
-              </a:spcAft>
-            </a:pPr>
-            <a:r>
-              <a:rPr sz="2300" b="0">
-                <a:solidFill>
-                  <a:srgbClr val="17212B"/>
-                </a:solidFill>
-                <a:latin typeface="Microsoft YaHei"/>
-              </a:rPr>
-              <a:t>意图提取</a:t>
-            </a:r>
-          </a:p>
-          <a:p>
-            <a:pPr>
-              <a:spcAft>
-                <a:spcPts val="1200"/>
-              </a:spcAft>
-            </a:pPr>
-            <a:r>
-              <a:rPr sz="2300" b="0">
-                <a:solidFill>
-                  <a:srgbClr val="17212B"/>
-                </a:solidFill>
-                <a:latin typeface="Microsoft YaHei"/>
-              </a:rPr>
-              <a:t>已知原因排序</a:t>
-            </a:r>
-          </a:p>
-          <a:p>
-            <a:pPr>
-              <a:spcAft>
-                <a:spcPts val="1200"/>
-              </a:spcAft>
-            </a:pPr>
-            <a:r>
-              <a:rPr sz="2300" b="0">
-                <a:solidFill>
-                  <a:srgbClr val="17212B"/>
-                </a:solidFill>
-                <a:latin typeface="Microsoft YaHei"/>
-              </a:rPr>
-              <a:t>研究事实选择</a:t>
-            </a:r>
-          </a:p>
-        </p:txBody>
-      </p:sp>
-      <p:sp>
-        <p:nvSpPr>
-          <p:cNvPr id="9" name="Rounded Rectangle 8"/>
+            <a:off x="1024128" y="1965960"/>
+            <a:ext cx="6537959" cy="530352"/>
+          </a:xfrm>
+          <a:prstGeom prst="rect">
+            <a:avLst/>
+          </a:prstGeom>
+          <a:noFill/>
+        </p:spPr>
+        <p:txBody>
+          <a:bodyPr wrap="square" lIns="0" rIns="0" tIns="0" bIns="0">
+            <a:spAutoFit/>
+          </a:bodyPr>
+          <a:lstStyle/>
+          <a:p>
+            <a:pPr>
+              <a:spcAft>
+                <a:spcPts val="1200"/>
+              </a:spcAft>
+            </a:pPr>
+            <a:r>
+              <a:rPr sz="1700" b="0">
+                <a:solidFill>
+                  <a:srgbClr val="607086"/>
+                </a:solidFill>
+                <a:latin typeface="Microsoft YaHei"/>
+              </a:rPr>
+              <a:t>8 类资产、3 类负债，净资产允许为负</a:t>
+            </a:r>
+          </a:p>
+        </p:txBody>
+      </p:sp>
+      <p:sp>
+        <p:nvSpPr>
+          <p:cNvPr id="9" name="Rectangle 8"/>
           <p:cNvSpPr/>
           <p:nvPr/>
         </p:nvSpPr>
         <p:spPr>
           <a:xfrm>
-            <a:off x="4617720" y="1719072"/>
-            <a:ext cx="2926080" cy="3200400"/>
-          </a:xfrm>
-          <a:prstGeom prst="roundRect">
-            <a:avLst>
-              <a:gd name="adj" fmla="val 12000"/>
-            </a:avLst>
+            <a:off x="777240" y="2560320"/>
+            <a:ext cx="91440" cy="640080"/>
+          </a:xfrm>
+          <a:prstGeom prst="rect">
+            <a:avLst/>
           </a:prstGeom>
           <a:solidFill>
-            <a:srgbClr val="FFFFFF"/>
+            <a:srgbClr val="3448ED"/>
           </a:solidFill>
           <a:ln>
             <a:noFill/>
@@ -11578,33 +13168,33 @@
         </p:nvSpPr>
         <p:spPr>
           <a:xfrm>
-            <a:off x="4873752" y="1965960"/>
-            <a:ext cx="2423160" cy="457200"/>
-          </a:xfrm>
-          <a:prstGeom prst="rect">
-            <a:avLst/>
-          </a:prstGeom>
-          <a:noFill/>
-        </p:spPr>
-        <p:txBody>
-          <a:bodyPr wrap="square" lIns="0" rIns="0" tIns="0" bIns="0">
-            <a:spAutoFit/>
-          </a:bodyPr>
-          <a:lstStyle/>
-          <a:p>
-            <a:pPr>
-              <a:spcAft>
-                <a:spcPts val="1200"/>
-              </a:spcAft>
-            </a:pPr>
-            <a:r>
-              <a:rPr sz="2500" b="1">
-                <a:solidFill>
-                  <a:srgbClr val="3448ED"/>
-                </a:solidFill>
-                <a:latin typeface="Microsoft YaHei"/>
-              </a:rPr>
-              <a:t>可信服务器</a:t>
+            <a:off x="1024128" y="2560320"/>
+            <a:ext cx="6537959" cy="320040"/>
+          </a:xfrm>
+          <a:prstGeom prst="rect">
+            <a:avLst/>
+          </a:prstGeom>
+          <a:noFill/>
+        </p:spPr>
+        <p:txBody>
+          <a:bodyPr wrap="square" lIns="0" rIns="0" tIns="0" bIns="0">
+            <a:spAutoFit/>
+          </a:bodyPr>
+          <a:lstStyle/>
+          <a:p>
+            <a:pPr>
+              <a:spcAft>
+                <a:spcPts val="1200"/>
+              </a:spcAft>
+            </a:pPr>
+            <a:r>
+              <a:rPr sz="2100" b="1">
+                <a:solidFill>
+                  <a:srgbClr val="17212B"/>
+                </a:solidFill>
+                <a:latin typeface="Microsoft YaHei"/>
+              </a:rPr>
+              <a:t>可用现金不等于总资产</a:t>
             </a:r>
           </a:p>
         </p:txBody>
@@ -11617,87 +13207,53 @@
         </p:nvSpPr>
         <p:spPr>
           <a:xfrm>
-            <a:off x="4873752" y="2697480"/>
-            <a:ext cx="2423160" cy="1920240"/>
-          </a:xfrm>
-          <a:prstGeom prst="rect">
-            <a:avLst/>
-          </a:prstGeom>
-          <a:noFill/>
-        </p:spPr>
-        <p:txBody>
-          <a:bodyPr wrap="square" lIns="0" rIns="0" tIns="0" bIns="0">
-            <a:spAutoFit/>
-          </a:bodyPr>
-          <a:lstStyle/>
-          <a:p>
-            <a:pPr>
-              <a:spcAft>
-                <a:spcPts val="1200"/>
-              </a:spcAft>
-            </a:pPr>
-            <a:r>
-              <a:rPr sz="2300" b="0">
-                <a:solidFill>
-                  <a:srgbClr val="17212B"/>
-                </a:solidFill>
-                <a:latin typeface="Microsoft YaHei"/>
-              </a:rPr>
-              <a:t>整数分与现金流</a:t>
-            </a:r>
-          </a:p>
-          <a:p>
-            <a:pPr>
-              <a:spcAft>
-                <a:spcPts val="1200"/>
-              </a:spcAft>
-            </a:pPr>
-            <a:r>
-              <a:rPr sz="2300" b="0">
-                <a:solidFill>
-                  <a:srgbClr val="17212B"/>
-                </a:solidFill>
-                <a:latin typeface="Microsoft YaHei"/>
-              </a:rPr>
-              <a:t>风险与资金上限</a:t>
-            </a:r>
-          </a:p>
-          <a:p>
-            <a:pPr>
-              <a:spcAft>
-                <a:spcPts val="1200"/>
-              </a:spcAft>
-            </a:pPr>
-            <a:r>
-              <a:rPr sz="2300" b="0">
-                <a:solidFill>
-                  <a:srgbClr val="17212B"/>
-                </a:solidFill>
-                <a:latin typeface="Microsoft YaHei"/>
-              </a:rPr>
-              <a:t>完整参数与控制证明</a:t>
-            </a:r>
-          </a:p>
-        </p:txBody>
-      </p:sp>
-      <p:sp>
-        <p:nvSpPr>
-          <p:cNvPr id="12" name="Rounded Rectangle 11"/>
+            <a:off x="1024128" y="2953512"/>
+            <a:ext cx="6537959" cy="530352"/>
+          </a:xfrm>
+          <a:prstGeom prst="rect">
+            <a:avLst/>
+          </a:prstGeom>
+          <a:noFill/>
+        </p:spPr>
+        <p:txBody>
+          <a:bodyPr wrap="square" lIns="0" rIns="0" tIns="0" bIns="0">
+            <a:spAutoFit/>
+          </a:bodyPr>
+          <a:lstStyle/>
+          <a:p>
+            <a:pPr>
+              <a:spcAft>
+                <a:spcPts val="1200"/>
+              </a:spcAft>
+            </a:pPr>
+            <a:r>
+              <a:rPr sz="1700" b="0">
+                <a:solidFill>
+                  <a:srgbClr val="607086"/>
+                </a:solidFill>
+                <a:latin typeface="Microsoft YaHei"/>
+              </a:rPr>
+              <a:t>扣除应急、目标、其他预留与近期还款</a:t>
+            </a:r>
+          </a:p>
+        </p:txBody>
+      </p:sp>
+      <p:sp>
+        <p:nvSpPr>
+          <p:cNvPr id="12" name="Rectangle 11"/>
           <p:cNvSpPr/>
           <p:nvPr/>
         </p:nvSpPr>
         <p:spPr>
           <a:xfrm>
-            <a:off x="8321040" y="1719072"/>
-            <a:ext cx="2926080" cy="3200400"/>
-          </a:xfrm>
-          <a:prstGeom prst="roundRect">
-            <a:avLst>
-              <a:gd name="adj" fmla="val 12000"/>
-            </a:avLst>
+            <a:off x="777240" y="3547872"/>
+            <a:ext cx="91440" cy="640080"/>
+          </a:xfrm>
+          <a:prstGeom prst="rect">
+            <a:avLst/>
           </a:prstGeom>
           <a:solidFill>
-            <a:srgbClr val="FFFFFF"/>
+            <a:srgbClr val="3448ED"/>
           </a:solidFill>
           <a:ln>
             <a:noFill/>
@@ -11733,33 +13289,33 @@
         </p:nvSpPr>
         <p:spPr>
           <a:xfrm>
-            <a:off x="8577072" y="1965960"/>
-            <a:ext cx="2423160" cy="457200"/>
-          </a:xfrm>
-          <a:prstGeom prst="rect">
-            <a:avLst/>
-          </a:prstGeom>
-          <a:noFill/>
-        </p:spPr>
-        <p:txBody>
-          <a:bodyPr wrap="square" lIns="0" rIns="0" tIns="0" bIns="0">
-            <a:spAutoFit/>
-          </a:bodyPr>
-          <a:lstStyle/>
-          <a:p>
-            <a:pPr>
-              <a:spcAft>
-                <a:spcPts val="1200"/>
-              </a:spcAft>
-            </a:pPr>
-            <a:r>
-              <a:rPr sz="2500" b="1">
-                <a:solidFill>
-                  <a:srgbClr val="3448ED"/>
-                </a:solidFill>
-                <a:latin typeface="Microsoft YaHei"/>
-              </a:rPr>
-              <a:t>用户</a:t>
+            <a:off x="1024128" y="3547872"/>
+            <a:ext cx="6537959" cy="320040"/>
+          </a:xfrm>
+          <a:prstGeom prst="rect">
+            <a:avLst/>
+          </a:prstGeom>
+          <a:noFill/>
+        </p:spPr>
+        <p:txBody>
+          <a:bodyPr wrap="square" lIns="0" rIns="0" tIns="0" bIns="0">
+            <a:spAutoFit/>
+          </a:bodyPr>
+          <a:lstStyle/>
+          <a:p>
+            <a:pPr>
+              <a:spcAft>
+                <a:spcPts val="1200"/>
+              </a:spcAft>
+            </a:pPr>
+            <a:r>
+              <a:rPr sz="2100" b="1">
+                <a:solidFill>
+                  <a:srgbClr val="17212B"/>
+                </a:solidFill>
+                <a:latin typeface="Microsoft YaHei"/>
+              </a:rPr>
+              <a:t>缺项先核对</a:t>
             </a:r>
           </a:p>
         </p:txBody>
@@ -11772,108 +13328,228 @@
         </p:nvSpPr>
         <p:spPr>
           <a:xfrm>
-            <a:off x="8577072" y="2697480"/>
-            <a:ext cx="2423160" cy="1920240"/>
-          </a:xfrm>
-          <a:prstGeom prst="rect">
-            <a:avLst/>
-          </a:prstGeom>
-          <a:noFill/>
-        </p:spPr>
-        <p:txBody>
-          <a:bodyPr wrap="square" lIns="0" rIns="0" tIns="0" bIns="0">
-            <a:spAutoFit/>
-          </a:bodyPr>
-          <a:lstStyle/>
-          <a:p>
-            <a:pPr>
-              <a:spcAft>
-                <a:spcPts val="1200"/>
-              </a:spcAft>
-            </a:pPr>
-            <a:r>
-              <a:rPr sz="2300" b="0">
+            <a:off x="1024128" y="3941063"/>
+            <a:ext cx="6537959" cy="530352"/>
+          </a:xfrm>
+          <a:prstGeom prst="rect">
+            <a:avLst/>
+          </a:prstGeom>
+          <a:noFill/>
+        </p:spPr>
+        <p:txBody>
+          <a:bodyPr wrap="square" lIns="0" rIns="0" tIns="0" bIns="0">
+            <a:spAutoFit/>
+          </a:bodyPr>
+          <a:lstStyle/>
+          <a:p>
+            <a:pPr>
+              <a:spcAft>
+                <a:spcPts val="1200"/>
+              </a:spcAft>
+            </a:pPr>
+            <a:r>
+              <a:rPr sz="1700" b="0">
+                <a:solidFill>
+                  <a:srgbClr val="607086"/>
+                </a:solidFill>
+                <a:latin typeface="Microsoft YaHei"/>
+              </a:rPr>
+              <a:t>空值保持未知，过期估值和修改后重新确认</a:t>
+            </a:r>
+          </a:p>
+        </p:txBody>
+      </p:sp>
+      <p:sp>
+        <p:nvSpPr>
+          <p:cNvPr id="15" name="Rectangle 14"/>
+          <p:cNvSpPr/>
+          <p:nvPr/>
+        </p:nvSpPr>
+        <p:spPr>
+          <a:xfrm>
+            <a:off x="777240" y="4535424"/>
+            <a:ext cx="91440" cy="640080"/>
+          </a:xfrm>
+          <a:prstGeom prst="rect">
+            <a:avLst/>
+          </a:prstGeom>
+          <a:solidFill>
+            <a:srgbClr val="3448ED"/>
+          </a:solidFill>
+          <a:ln>
+            <a:noFill/>
+          </a:ln>
+        </p:spPr>
+        <p:style>
+          <a:lnRef idx="1">
+            <a:schemeClr val="accent1"/>
+          </a:lnRef>
+          <a:fillRef idx="3">
+            <a:schemeClr val="accent1"/>
+          </a:fillRef>
+          <a:effectRef idx="2">
+            <a:schemeClr val="accent1"/>
+          </a:effectRef>
+          <a:fontRef idx="minor">
+            <a:schemeClr val="lt1"/>
+          </a:fontRef>
+        </p:style>
+        <p:txBody>
+          <a:bodyPr rtlCol="0" anchor="ctr"/>
+          <a:lstStyle/>
+          <a:p>
+            <a:pPr algn="ctr"/>
+          </a:p>
+        </p:txBody>
+      </p:sp>
+      <p:sp>
+        <p:nvSpPr>
+          <p:cNvPr id="16" name="TextBox 15"/>
+          <p:cNvSpPr txBox="1"/>
+          <p:nvPr/>
+        </p:nvSpPr>
+        <p:spPr>
+          <a:xfrm>
+            <a:off x="1024128" y="4535424"/>
+            <a:ext cx="6537959" cy="320040"/>
+          </a:xfrm>
+          <a:prstGeom prst="rect">
+            <a:avLst/>
+          </a:prstGeom>
+          <a:noFill/>
+        </p:spPr>
+        <p:txBody>
+          <a:bodyPr wrap="square" lIns="0" rIns="0" tIns="0" bIns="0">
+            <a:spAutoFit/>
+          </a:bodyPr>
+          <a:lstStyle/>
+          <a:p>
+            <a:pPr>
+              <a:spcAft>
+                <a:spcPts val="1200"/>
+              </a:spcAft>
+            </a:pPr>
+            <a:r>
+              <a:rPr sz="2100" b="1">
                 <a:solidFill>
                   <a:srgbClr val="17212B"/>
                 </a:solidFill>
                 <a:latin typeface="Microsoft YaHei"/>
               </a:rPr>
-              <a:t>改正草稿</a:t>
-            </a:r>
-          </a:p>
-          <a:p>
-            <a:pPr>
-              <a:spcAft>
-                <a:spcPts val="1200"/>
-              </a:spcAft>
-            </a:pPr>
-            <a:r>
-              <a:rPr sz="2300" b="0">
-                <a:solidFill>
-                  <a:srgbClr val="17212B"/>
-                </a:solidFill>
-                <a:latin typeface="Microsoft YaHei"/>
-              </a:rPr>
-              <a:t>核对参数</a:t>
-            </a:r>
-          </a:p>
-          <a:p>
-            <a:pPr>
-              <a:spcAft>
-                <a:spcPts val="1200"/>
-              </a:spcAft>
-            </a:pPr>
-            <a:r>
-              <a:rPr sz="2300" b="0">
-                <a:solidFill>
-                  <a:srgbClr val="17212B"/>
-                </a:solidFill>
-                <a:latin typeface="Microsoft YaHei"/>
-              </a:rPr>
-              <a:t>动态验证</a:t>
-            </a:r>
-          </a:p>
-        </p:txBody>
-      </p:sp>
-      <p:sp>
-        <p:nvSpPr>
-          <p:cNvPr id="15" name="TextBox 14"/>
-          <p:cNvSpPr txBox="1"/>
-          <p:nvPr/>
-        </p:nvSpPr>
-        <p:spPr>
-          <a:xfrm>
-            <a:off x="960120" y="5330952"/>
-            <a:ext cx="10149840" cy="731520"/>
-          </a:xfrm>
-          <a:prstGeom prst="rect">
-            <a:avLst/>
-          </a:prstGeom>
-          <a:noFill/>
-        </p:spPr>
-        <p:txBody>
-          <a:bodyPr wrap="square" lIns="0" rIns="0" tIns="0" bIns="0">
-            <a:spAutoFit/>
-          </a:bodyPr>
-          <a:lstStyle/>
-          <a:p>
-            <a:pPr>
-              <a:spcAft>
-                <a:spcPts val="1200"/>
-              </a:spcAft>
-            </a:pPr>
-            <a:r>
-              <a:rPr sz="2400" b="1">
-                <a:solidFill>
-                  <a:srgbClr val="17212B"/>
-                </a:solidFill>
-                <a:latin typeface="Microsoft YaHei"/>
-              </a:rPr>
-              <a:t>新增金额或授权字段不被接纳；银行结果只来自回执或核账。</a:t>
-            </a:r>
-          </a:p>
-        </p:txBody>
-      </p:sp>
+              <a:t>与个人账本联动</a:t>
+            </a:r>
+          </a:p>
+        </p:txBody>
+      </p:sp>
+      <p:sp>
+        <p:nvSpPr>
+          <p:cNvPr id="17" name="TextBox 16"/>
+          <p:cNvSpPr txBox="1"/>
+          <p:nvPr/>
+        </p:nvSpPr>
+        <p:spPr>
+          <a:xfrm>
+            <a:off x="1024128" y="4928616"/>
+            <a:ext cx="6537959" cy="530352"/>
+          </a:xfrm>
+          <a:prstGeom prst="rect">
+            <a:avLst/>
+          </a:prstGeom>
+          <a:noFill/>
+        </p:spPr>
+        <p:txBody>
+          <a:bodyPr wrap="square" lIns="0" rIns="0" tIns="0" bIns="0">
+            <a:spAutoFit/>
+          </a:bodyPr>
+          <a:lstStyle/>
+          <a:p>
+            <a:pPr>
+              <a:spcAft>
+                <a:spcPts val="1200"/>
+              </a:spcAft>
+            </a:pPr>
+            <a:r>
+              <a:rPr sz="1700" b="0">
+                <a:solidFill>
+                  <a:srgbClr val="607086"/>
+                </a:solidFill>
+                <a:latin typeface="Microsoft YaHei"/>
+              </a:rPr>
+              <a:t>应急目标对照已留金额；月结余不重复累计</a:t>
+            </a:r>
+          </a:p>
+        </p:txBody>
+      </p:sp>
+      <p:sp>
+        <p:nvSpPr>
+          <p:cNvPr id="18" name="Rounded Rectangle 17"/>
+          <p:cNvSpPr/>
+          <p:nvPr/>
+        </p:nvSpPr>
+        <p:spPr>
+          <a:xfrm>
+            <a:off x="8229600" y="1371600"/>
+            <a:ext cx="2423160" cy="4800600"/>
+          </a:xfrm>
+          <a:prstGeom prst="roundRect">
+            <a:avLst>
+              <a:gd name="adj" fmla="val 12000"/>
+            </a:avLst>
+          </a:prstGeom>
+          <a:solidFill>
+            <a:srgbClr val="17212B"/>
+          </a:solidFill>
+          <a:ln>
+            <a:noFill/>
+          </a:ln>
+        </p:spPr>
+        <p:style>
+          <a:lnRef idx="1">
+            <a:schemeClr val="accent1"/>
+          </a:lnRef>
+          <a:fillRef idx="3">
+            <a:schemeClr val="accent1"/>
+          </a:fillRef>
+          <a:effectRef idx="2">
+            <a:schemeClr val="accent1"/>
+          </a:effectRef>
+          <a:fontRef idx="minor">
+            <a:schemeClr val="lt1"/>
+          </a:fontRef>
+        </p:style>
+        <p:txBody>
+          <a:bodyPr rtlCol="0" anchor="ctr"/>
+          <a:lstStyle/>
+          <a:p>
+            <a:pPr algn="ctr"/>
+          </a:p>
+        </p:txBody>
+      </p:sp>
+      <p:pic>
+        <p:nvPicPr>
+          <p:cNvPr id="19" name="Picture 18" descr="wealth.png"/>
+          <p:cNvPicPr>
+            <a:picLocks noChangeAspect="1"/>
+          </p:cNvPicPr>
+          <p:nvPr/>
+        </p:nvPicPr>
+        <p:blipFill>
+          <a:blip r:embed="rId2"/>
+          <a:srcRect b="4922"/>
+          <a:stretch>
+            <a:fillRect/>
+          </a:stretch>
+        </p:blipFill>
+        <p:spPr>
+          <a:xfrm>
+            <a:off x="8321040" y="1463040"/>
+            <a:ext cx="2240280" cy="4617720"/>
+          </a:xfrm>
+          <a:prstGeom prst="rect">
+            <a:avLst/>
+          </a:prstGeom>
+        </p:spPr>
+      </p:pic>
     </p:spTree>
   </p:cSld>
   <p:clrMapOvr>
@@ -11979,7 +13655,7 @@
                 </a:solidFill>
                 <a:latin typeface="Microsoft YaHei"/>
               </a:rPr>
-              <a:t>比较方案之前，先明确资金用途</a:t>
+              <a:t>模型理解与解释，服务器核对事实</a:t>
             </a:r>
           </a:p>
         </p:txBody>
@@ -12064,20 +13740,22 @@
       </p:sp>
       <p:sp>
         <p:nvSpPr>
-          <p:cNvPr id="6" name="Rectangle 5"/>
+          <p:cNvPr id="6" name="Rounded Rectangle 5"/>
           <p:cNvSpPr/>
           <p:nvPr/>
         </p:nvSpPr>
         <p:spPr>
           <a:xfrm>
-            <a:off x="777240" y="1572768"/>
-            <a:ext cx="91440" cy="640080"/>
-          </a:xfrm>
-          <a:prstGeom prst="rect">
-            <a:avLst/>
+            <a:off x="914400" y="1719072"/>
+            <a:ext cx="2926080" cy="3200400"/>
+          </a:xfrm>
+          <a:prstGeom prst="roundRect">
+            <a:avLst>
+              <a:gd name="adj" fmla="val 12000"/>
+            </a:avLst>
           </a:prstGeom>
           <a:solidFill>
-            <a:srgbClr val="3448ED"/>
+            <a:srgbClr val="FFFFFF"/>
           </a:solidFill>
           <a:ln>
             <a:noFill/>
@@ -12113,92 +13791,126 @@
         </p:nvSpPr>
         <p:spPr>
           <a:xfrm>
-            <a:off x="1024128" y="1572768"/>
-            <a:ext cx="6537959" cy="320040"/>
-          </a:xfrm>
-          <a:prstGeom prst="rect">
-            <a:avLst/>
-          </a:prstGeom>
-          <a:noFill/>
-        </p:spPr>
-        <p:txBody>
-          <a:bodyPr wrap="square" lIns="0" rIns="0" tIns="0" bIns="0">
-            <a:spAutoFit/>
-          </a:bodyPr>
-          <a:lstStyle/>
-          <a:p>
-            <a:pPr>
-              <a:spcAft>
-                <a:spcPts val="1200"/>
-              </a:spcAft>
-            </a:pPr>
-            <a:r>
-              <a:rPr sz="2100" b="1">
+            <a:off x="1170432" y="1965960"/>
+            <a:ext cx="2423160" cy="457200"/>
+          </a:xfrm>
+          <a:prstGeom prst="rect">
+            <a:avLst/>
+          </a:prstGeom>
+          <a:noFill/>
+        </p:spPr>
+        <p:txBody>
+          <a:bodyPr wrap="square" lIns="0" rIns="0" tIns="0" bIns="0">
+            <a:spAutoFit/>
+          </a:bodyPr>
+          <a:lstStyle/>
+          <a:p>
+            <a:pPr>
+              <a:spcAft>
+                <a:spcPts val="1200"/>
+              </a:spcAft>
+            </a:pPr>
+            <a:r>
+              <a:rPr sz="2500" b="1">
+                <a:solidFill>
+                  <a:srgbClr val="3448ED"/>
+                </a:solidFill>
+                <a:latin typeface="Microsoft YaHei"/>
+              </a:rPr>
+              <a:t>Qwen3 + LoRA</a:t>
+            </a:r>
+          </a:p>
+        </p:txBody>
+      </p:sp>
+      <p:sp>
+        <p:nvSpPr>
+          <p:cNvPr id="8" name="TextBox 7"/>
+          <p:cNvSpPr txBox="1"/>
+          <p:nvPr/>
+        </p:nvSpPr>
+        <p:spPr>
+          <a:xfrm>
+            <a:off x="1170432" y="2697480"/>
+            <a:ext cx="2423160" cy="1920240"/>
+          </a:xfrm>
+          <a:prstGeom prst="rect">
+            <a:avLst/>
+          </a:prstGeom>
+          <a:noFill/>
+        </p:spPr>
+        <p:txBody>
+          <a:bodyPr wrap="square" lIns="0" rIns="0" tIns="0" bIns="0">
+            <a:spAutoFit/>
+          </a:bodyPr>
+          <a:lstStyle/>
+          <a:p>
+            <a:pPr>
+              <a:spcAft>
+                <a:spcPts val="1200"/>
+              </a:spcAft>
+            </a:pPr>
+            <a:r>
+              <a:rPr sz="2300" b="0">
                 <a:solidFill>
                   <a:srgbClr val="17212B"/>
                 </a:solidFill>
                 <a:latin typeface="Microsoft YaHei"/>
               </a:rPr>
-              <a:t>风险与期限</a:t>
-            </a:r>
-          </a:p>
-        </p:txBody>
-      </p:sp>
-      <p:sp>
-        <p:nvSpPr>
-          <p:cNvPr id="8" name="TextBox 7"/>
-          <p:cNvSpPr txBox="1"/>
-          <p:nvPr/>
-        </p:nvSpPr>
-        <p:spPr>
-          <a:xfrm>
-            <a:off x="1024128" y="1965960"/>
-            <a:ext cx="6537959" cy="530352"/>
-          </a:xfrm>
-          <a:prstGeom prst="rect">
-            <a:avLst/>
-          </a:prstGeom>
-          <a:noFill/>
-        </p:spPr>
-        <p:txBody>
-          <a:bodyPr wrap="square" lIns="0" rIns="0" tIns="0" bIns="0">
-            <a:spAutoFit/>
-          </a:bodyPr>
-          <a:lstStyle/>
-          <a:p>
-            <a:pPr>
-              <a:spcAft>
-                <a:spcPts val="1200"/>
-              </a:spcAft>
-            </a:pPr>
-            <a:r>
-              <a:rPr sz="1700" b="0">
-                <a:solidFill>
-                  <a:srgbClr val="607086"/>
-                </a:solidFill>
-                <a:latin typeface="Microsoft YaHei"/>
-              </a:rPr>
-              <a:t>并列两种原型方案，不替代正式适当性评估</a:t>
-            </a:r>
-          </a:p>
-        </p:txBody>
-      </p:sp>
-      <p:sp>
-        <p:nvSpPr>
-          <p:cNvPr id="9" name="Rectangle 8"/>
+              <a:t>意图提取</a:t>
+            </a:r>
+          </a:p>
+          <a:p>
+            <a:pPr>
+              <a:spcAft>
+                <a:spcPts val="1200"/>
+              </a:spcAft>
+            </a:pPr>
+            <a:r>
+              <a:rPr sz="2300" b="0">
+                <a:solidFill>
+                  <a:srgbClr val="17212B"/>
+                </a:solidFill>
+                <a:latin typeface="Microsoft YaHei"/>
+              </a:rPr>
+              <a:t>已知原因排序</a:t>
+            </a:r>
+          </a:p>
+          <a:p>
+            <a:pPr>
+              <a:spcAft>
+                <a:spcPts val="1200"/>
+              </a:spcAft>
+            </a:pPr>
+            <a:r>
+              <a:rPr sz="2300" b="0">
+                <a:solidFill>
+                  <a:srgbClr val="17212B"/>
+                </a:solidFill>
+                <a:latin typeface="Microsoft YaHei"/>
+              </a:rPr>
+              <a:t>研究事实选择</a:t>
+            </a:r>
+          </a:p>
+        </p:txBody>
+      </p:sp>
+      <p:sp>
+        <p:nvSpPr>
+          <p:cNvPr id="9" name="Rounded Rectangle 8"/>
           <p:cNvSpPr/>
           <p:nvPr/>
         </p:nvSpPr>
         <p:spPr>
           <a:xfrm>
-            <a:off x="777240" y="2560320"/>
-            <a:ext cx="91440" cy="640080"/>
-          </a:xfrm>
-          <a:prstGeom prst="rect">
-            <a:avLst/>
+            <a:off x="4617720" y="1719072"/>
+            <a:ext cx="2926080" cy="3200400"/>
+          </a:xfrm>
+          <a:prstGeom prst="roundRect">
+            <a:avLst>
+              <a:gd name="adj" fmla="val 12000"/>
+            </a:avLst>
           </a:prstGeom>
           <a:solidFill>
-            <a:srgbClr val="3448ED"/>
+            <a:srgbClr val="FFFFFF"/>
           </a:solidFill>
           <a:ln>
             <a:noFill/>
@@ -12234,92 +13946,126 @@
         </p:nvSpPr>
         <p:spPr>
           <a:xfrm>
-            <a:off x="1024128" y="2560320"/>
-            <a:ext cx="6537959" cy="320040"/>
-          </a:xfrm>
-          <a:prstGeom prst="rect">
-            <a:avLst/>
-          </a:prstGeom>
-          <a:noFill/>
-        </p:spPr>
-        <p:txBody>
-          <a:bodyPr wrap="square" lIns="0" rIns="0" tIns="0" bIns="0">
-            <a:spAutoFit/>
-          </a:bodyPr>
-          <a:lstStyle/>
-          <a:p>
-            <a:pPr>
-              <a:spcAft>
-                <a:spcPts val="1200"/>
-              </a:spcAft>
-            </a:pPr>
-            <a:r>
-              <a:rPr sz="2100" b="1">
+            <a:off x="4873752" y="1965960"/>
+            <a:ext cx="2423160" cy="457200"/>
+          </a:xfrm>
+          <a:prstGeom prst="rect">
+            <a:avLst/>
+          </a:prstGeom>
+          <a:noFill/>
+        </p:spPr>
+        <p:txBody>
+          <a:bodyPr wrap="square" lIns="0" rIns="0" tIns="0" bIns="0">
+            <a:spAutoFit/>
+          </a:bodyPr>
+          <a:lstStyle/>
+          <a:p>
+            <a:pPr>
+              <a:spcAft>
+                <a:spcPts val="1200"/>
+              </a:spcAft>
+            </a:pPr>
+            <a:r>
+              <a:rPr sz="2500" b="1">
+                <a:solidFill>
+                  <a:srgbClr val="3448ED"/>
+                </a:solidFill>
+                <a:latin typeface="Microsoft YaHei"/>
+              </a:rPr>
+              <a:t>可信服务器</a:t>
+            </a:r>
+          </a:p>
+        </p:txBody>
+      </p:sp>
+      <p:sp>
+        <p:nvSpPr>
+          <p:cNvPr id="11" name="TextBox 10"/>
+          <p:cNvSpPr txBox="1"/>
+          <p:nvPr/>
+        </p:nvSpPr>
+        <p:spPr>
+          <a:xfrm>
+            <a:off x="4873752" y="2697480"/>
+            <a:ext cx="2423160" cy="1920240"/>
+          </a:xfrm>
+          <a:prstGeom prst="rect">
+            <a:avLst/>
+          </a:prstGeom>
+          <a:noFill/>
+        </p:spPr>
+        <p:txBody>
+          <a:bodyPr wrap="square" lIns="0" rIns="0" tIns="0" bIns="0">
+            <a:spAutoFit/>
+          </a:bodyPr>
+          <a:lstStyle/>
+          <a:p>
+            <a:pPr>
+              <a:spcAft>
+                <a:spcPts val="1200"/>
+              </a:spcAft>
+            </a:pPr>
+            <a:r>
+              <a:rPr sz="2300" b="0">
                 <a:solidFill>
                   <a:srgbClr val="17212B"/>
                 </a:solidFill>
                 <a:latin typeface="Microsoft YaHei"/>
               </a:rPr>
-              <a:t>流动性与费用</a:t>
-            </a:r>
-          </a:p>
-        </p:txBody>
-      </p:sp>
-      <p:sp>
-        <p:nvSpPr>
-          <p:cNvPr id="11" name="TextBox 10"/>
-          <p:cNvSpPr txBox="1"/>
-          <p:nvPr/>
-        </p:nvSpPr>
-        <p:spPr>
-          <a:xfrm>
-            <a:off x="1024128" y="2953512"/>
-            <a:ext cx="6537959" cy="530352"/>
-          </a:xfrm>
-          <a:prstGeom prst="rect">
-            <a:avLst/>
-          </a:prstGeom>
-          <a:noFill/>
-        </p:spPr>
-        <p:txBody>
-          <a:bodyPr wrap="square" lIns="0" rIns="0" tIns="0" bIns="0">
-            <a:spAutoFit/>
-          </a:bodyPr>
-          <a:lstStyle/>
-          <a:p>
-            <a:pPr>
-              <a:spcAft>
-                <a:spcPts val="1200"/>
-              </a:spcAft>
-            </a:pPr>
-            <a:r>
-              <a:rPr sz="1700" b="0">
-                <a:solidFill>
-                  <a:srgbClr val="607086"/>
-                </a:solidFill>
-                <a:latin typeface="Microsoft YaHei"/>
-              </a:rPr>
-              <a:t>展示模拟规则，不冒充真实金融产品条款</a:t>
-            </a:r>
-          </a:p>
-        </p:txBody>
-      </p:sp>
-      <p:sp>
-        <p:nvSpPr>
-          <p:cNvPr id="12" name="Rectangle 11"/>
+              <a:t>整数分与现金流</a:t>
+            </a:r>
+          </a:p>
+          <a:p>
+            <a:pPr>
+              <a:spcAft>
+                <a:spcPts val="1200"/>
+              </a:spcAft>
+            </a:pPr>
+            <a:r>
+              <a:rPr sz="2300" b="0">
+                <a:solidFill>
+                  <a:srgbClr val="17212B"/>
+                </a:solidFill>
+                <a:latin typeface="Microsoft YaHei"/>
+              </a:rPr>
+              <a:t>风险与资金上限</a:t>
+            </a:r>
+          </a:p>
+          <a:p>
+            <a:pPr>
+              <a:spcAft>
+                <a:spcPts val="1200"/>
+              </a:spcAft>
+            </a:pPr>
+            <a:r>
+              <a:rPr sz="2300" b="0">
+                <a:solidFill>
+                  <a:srgbClr val="17212B"/>
+                </a:solidFill>
+                <a:latin typeface="Microsoft YaHei"/>
+              </a:rPr>
+              <a:t>参数核对与授权</a:t>
+            </a:r>
+          </a:p>
+        </p:txBody>
+      </p:sp>
+      <p:sp>
+        <p:nvSpPr>
+          <p:cNvPr id="12" name="Rounded Rectangle 11"/>
           <p:cNvSpPr/>
           <p:nvPr/>
         </p:nvSpPr>
         <p:spPr>
           <a:xfrm>
-            <a:off x="777240" y="3547872"/>
-            <a:ext cx="91440" cy="640080"/>
-          </a:xfrm>
-          <a:prstGeom prst="rect">
-            <a:avLst/>
+            <a:off x="8321040" y="1719072"/>
+            <a:ext cx="2926080" cy="3200400"/>
+          </a:xfrm>
+          <a:prstGeom prst="roundRect">
+            <a:avLst>
+              <a:gd name="adj" fmla="val 12000"/>
+            </a:avLst>
           </a:prstGeom>
           <a:solidFill>
-            <a:srgbClr val="3448ED"/>
+            <a:srgbClr val="FFFFFF"/>
           </a:solidFill>
           <a:ln>
             <a:noFill/>
@@ -12355,267 +14101,147 @@
         </p:nvSpPr>
         <p:spPr>
           <a:xfrm>
-            <a:off x="1024128" y="3547872"/>
-            <a:ext cx="6537959" cy="320040"/>
-          </a:xfrm>
-          <a:prstGeom prst="rect">
-            <a:avLst/>
-          </a:prstGeom>
-          <a:noFill/>
-        </p:spPr>
-        <p:txBody>
-          <a:bodyPr wrap="square" lIns="0" rIns="0" tIns="0" bIns="0">
-            <a:spAutoFit/>
-          </a:bodyPr>
-          <a:lstStyle/>
-          <a:p>
-            <a:pPr>
-              <a:spcAft>
-                <a:spcPts val="1200"/>
-              </a:spcAft>
-            </a:pPr>
-            <a:r>
-              <a:rPr sz="2100" b="1">
+            <a:off x="8577072" y="1965960"/>
+            <a:ext cx="2423160" cy="457200"/>
+          </a:xfrm>
+          <a:prstGeom prst="rect">
+            <a:avLst/>
+          </a:prstGeom>
+          <a:noFill/>
+        </p:spPr>
+        <p:txBody>
+          <a:bodyPr wrap="square" lIns="0" rIns="0" tIns="0" bIns="0">
+            <a:spAutoFit/>
+          </a:bodyPr>
+          <a:lstStyle/>
+          <a:p>
+            <a:pPr>
+              <a:spcAft>
+                <a:spcPts val="1200"/>
+              </a:spcAft>
+            </a:pPr>
+            <a:r>
+              <a:rPr sz="2500" b="1">
+                <a:solidFill>
+                  <a:srgbClr val="3448ED"/>
+                </a:solidFill>
+                <a:latin typeface="Microsoft YaHei"/>
+              </a:rPr>
+              <a:t>用户</a:t>
+            </a:r>
+          </a:p>
+        </p:txBody>
+      </p:sp>
+      <p:sp>
+        <p:nvSpPr>
+          <p:cNvPr id="14" name="TextBox 13"/>
+          <p:cNvSpPr txBox="1"/>
+          <p:nvPr/>
+        </p:nvSpPr>
+        <p:spPr>
+          <a:xfrm>
+            <a:off x="8577072" y="2697480"/>
+            <a:ext cx="2423160" cy="1920240"/>
+          </a:xfrm>
+          <a:prstGeom prst="rect">
+            <a:avLst/>
+          </a:prstGeom>
+          <a:noFill/>
+        </p:spPr>
+        <p:txBody>
+          <a:bodyPr wrap="square" lIns="0" rIns="0" tIns="0" bIns="0">
+            <a:spAutoFit/>
+          </a:bodyPr>
+          <a:lstStyle/>
+          <a:p>
+            <a:pPr>
+              <a:spcAft>
+                <a:spcPts val="1200"/>
+              </a:spcAft>
+            </a:pPr>
+            <a:r>
+              <a:rPr sz="2300" b="0">
                 <a:solidFill>
                   <a:srgbClr val="17212B"/>
                 </a:solidFill>
                 <a:latin typeface="Microsoft YaHei"/>
               </a:rPr>
-              <a:t>先说明不适合的原因</a:t>
-            </a:r>
-          </a:p>
-        </p:txBody>
-      </p:sp>
-      <p:sp>
-        <p:nvSpPr>
-          <p:cNvPr id="14" name="TextBox 13"/>
-          <p:cNvSpPr txBox="1"/>
-          <p:nvPr/>
-        </p:nvSpPr>
-        <p:spPr>
-          <a:xfrm>
-            <a:off x="1024128" y="3941063"/>
-            <a:ext cx="6537959" cy="530352"/>
-          </a:xfrm>
-          <a:prstGeom prst="rect">
-            <a:avLst/>
-          </a:prstGeom>
-          <a:noFill/>
-        </p:spPr>
-        <p:txBody>
-          <a:bodyPr wrap="square" lIns="0" rIns="0" tIns="0" bIns="0">
-            <a:spAutoFit/>
-          </a:bodyPr>
-          <a:lstStyle/>
-          <a:p>
-            <a:pPr>
-              <a:spcAft>
-                <a:spcPts val="1200"/>
-              </a:spcAft>
-            </a:pPr>
-            <a:r>
-              <a:rPr sz="1700" b="0">
-                <a:solidFill>
-                  <a:srgbClr val="607086"/>
-                </a:solidFill>
-                <a:latin typeface="Microsoft YaHei"/>
-              </a:rPr>
-              <a:t>开销未核对、近期要用或目标压力过大时受限</a:t>
-            </a:r>
-          </a:p>
-        </p:txBody>
-      </p:sp>
-      <p:sp>
-        <p:nvSpPr>
-          <p:cNvPr id="15" name="Rectangle 14"/>
-          <p:cNvSpPr/>
-          <p:nvPr/>
-        </p:nvSpPr>
-        <p:spPr>
-          <a:xfrm>
-            <a:off x="777240" y="4535424"/>
-            <a:ext cx="91440" cy="640080"/>
-          </a:xfrm>
-          <a:prstGeom prst="rect">
-            <a:avLst/>
-          </a:prstGeom>
-          <a:solidFill>
-            <a:srgbClr val="3448ED"/>
-          </a:solidFill>
-          <a:ln>
-            <a:noFill/>
-          </a:ln>
-        </p:spPr>
-        <p:style>
-          <a:lnRef idx="1">
-            <a:schemeClr val="accent1"/>
-          </a:lnRef>
-          <a:fillRef idx="3">
-            <a:schemeClr val="accent1"/>
-          </a:fillRef>
-          <a:effectRef idx="2">
-            <a:schemeClr val="accent1"/>
-          </a:effectRef>
-          <a:fontRef idx="minor">
-            <a:schemeClr val="lt1"/>
-          </a:fontRef>
-        </p:style>
-        <p:txBody>
-          <a:bodyPr rtlCol="0" anchor="ctr"/>
-          <a:lstStyle/>
-          <a:p>
-            <a:pPr algn="ctr"/>
-          </a:p>
-        </p:txBody>
-      </p:sp>
-      <p:sp>
-        <p:nvSpPr>
-          <p:cNvPr id="16" name="TextBox 15"/>
-          <p:cNvSpPr txBox="1"/>
-          <p:nvPr/>
-        </p:nvSpPr>
-        <p:spPr>
-          <a:xfrm>
-            <a:off x="1024128" y="4535424"/>
-            <a:ext cx="6537959" cy="320040"/>
-          </a:xfrm>
-          <a:prstGeom prst="rect">
-            <a:avLst/>
-          </a:prstGeom>
-          <a:noFill/>
-        </p:spPr>
-        <p:txBody>
-          <a:bodyPr wrap="square" lIns="0" rIns="0" tIns="0" bIns="0">
-            <a:spAutoFit/>
-          </a:bodyPr>
-          <a:lstStyle/>
-          <a:p>
-            <a:pPr>
-              <a:spcAft>
-                <a:spcPts val="1200"/>
-              </a:spcAft>
-            </a:pPr>
-            <a:r>
-              <a:rPr sz="2100" b="1">
+              <a:t>改正草稿</a:t>
+            </a:r>
+          </a:p>
+          <a:p>
+            <a:pPr>
+              <a:spcAft>
+                <a:spcPts val="1200"/>
+              </a:spcAft>
+            </a:pPr>
+            <a:r>
+              <a:rPr sz="2300" b="0">
                 <a:solidFill>
                   <a:srgbClr val="17212B"/>
                 </a:solidFill>
                 <a:latin typeface="Microsoft YaHei"/>
               </a:rPr>
-              <a:t>用户自己确认</a:t>
-            </a:r>
-          </a:p>
-        </p:txBody>
-      </p:sp>
-      <p:sp>
-        <p:nvSpPr>
-          <p:cNvPr id="17" name="TextBox 16"/>
-          <p:cNvSpPr txBox="1"/>
-          <p:nvPr/>
-        </p:nvSpPr>
-        <p:spPr>
-          <a:xfrm>
-            <a:off x="1024128" y="4928616"/>
-            <a:ext cx="6537959" cy="530352"/>
-          </a:xfrm>
-          <a:prstGeom prst="rect">
-            <a:avLst/>
-          </a:prstGeom>
-          <a:noFill/>
-        </p:spPr>
-        <p:txBody>
-          <a:bodyPr wrap="square" lIns="0" rIns="0" tIns="0" bIns="0">
-            <a:spAutoFit/>
-          </a:bodyPr>
-          <a:lstStyle/>
-          <a:p>
-            <a:pPr>
-              <a:spcAft>
-                <a:spcPts val="1200"/>
-              </a:spcAft>
-            </a:pPr>
-            <a:r>
-              <a:rPr sz="1700" b="0">
-                <a:solidFill>
-                  <a:srgbClr val="607086"/>
-                </a:solidFill>
-                <a:latin typeface="Microsoft YaHei"/>
-              </a:rPr>
-              <a:t>草稿、参数核对和执行分别发生，结果可追溯</a:t>
-            </a:r>
-          </a:p>
-        </p:txBody>
-      </p:sp>
-      <p:sp>
-        <p:nvSpPr>
-          <p:cNvPr id="18" name="Rounded Rectangle 17"/>
-          <p:cNvSpPr/>
-          <p:nvPr/>
-        </p:nvSpPr>
-        <p:spPr>
-          <a:xfrm>
-            <a:off x="8229600" y="1371600"/>
-            <a:ext cx="2423160" cy="4800600"/>
-          </a:xfrm>
-          <a:prstGeom prst="roundRect">
-            <a:avLst>
-              <a:gd name="adj" fmla="val 12000"/>
-            </a:avLst>
-          </a:prstGeom>
-          <a:solidFill>
-            <a:srgbClr val="17212B"/>
-          </a:solidFill>
-          <a:ln>
-            <a:noFill/>
-          </a:ln>
-        </p:spPr>
-        <p:style>
-          <a:lnRef idx="1">
-            <a:schemeClr val="accent1"/>
-          </a:lnRef>
-          <a:fillRef idx="3">
-            <a:schemeClr val="accent1"/>
-          </a:fillRef>
-          <a:effectRef idx="2">
-            <a:schemeClr val="accent1"/>
-          </a:effectRef>
-          <a:fontRef idx="minor">
-            <a:schemeClr val="lt1"/>
-          </a:fontRef>
-        </p:style>
-        <p:txBody>
-          <a:bodyPr rtlCol="0" anchor="ctr"/>
-          <a:lstStyle/>
-          <a:p>
-            <a:pPr algn="ctr"/>
-          </a:p>
-        </p:txBody>
-      </p:sp>
-      <p:pic>
-        <p:nvPicPr>
-          <p:cNvPr id="19" name="Picture 18" descr="compare.png"/>
-          <p:cNvPicPr>
-            <a:picLocks noChangeAspect="1"/>
-          </p:cNvPicPr>
-          <p:nvPr/>
-        </p:nvPicPr>
-        <p:blipFill>
-          <a:blip r:embed="rId2"/>
-          <a:srcRect b="4922"/>
-          <a:stretch>
-            <a:fillRect/>
-          </a:stretch>
-        </p:blipFill>
-        <p:spPr>
-          <a:xfrm>
-            <a:off x="8321040" y="1463040"/>
-            <a:ext cx="2240280" cy="4617720"/>
-          </a:xfrm>
-          <a:prstGeom prst="rect">
-            <a:avLst/>
-          </a:prstGeom>
-        </p:spPr>
-      </p:pic>
+              <a:t>核对参数</a:t>
+            </a:r>
+          </a:p>
+          <a:p>
+            <a:pPr>
+              <a:spcAft>
+                <a:spcPts val="1200"/>
+              </a:spcAft>
+            </a:pPr>
+            <a:r>
+              <a:rPr sz="2300" b="0">
+                <a:solidFill>
+                  <a:srgbClr val="17212B"/>
+                </a:solidFill>
+                <a:latin typeface="Microsoft YaHei"/>
+              </a:rPr>
+              <a:t>动态验证</a:t>
+            </a:r>
+          </a:p>
+        </p:txBody>
+      </p:sp>
+      <p:sp>
+        <p:nvSpPr>
+          <p:cNvPr id="15" name="TextBox 14"/>
+          <p:cNvSpPr txBox="1"/>
+          <p:nvPr/>
+        </p:nvSpPr>
+        <p:spPr>
+          <a:xfrm>
+            <a:off x="960120" y="5330952"/>
+            <a:ext cx="10149840" cy="731520"/>
+          </a:xfrm>
+          <a:prstGeom prst="rect">
+            <a:avLst/>
+          </a:prstGeom>
+          <a:noFill/>
+        </p:spPr>
+        <p:txBody>
+          <a:bodyPr wrap="square" lIns="0" rIns="0" tIns="0" bIns="0">
+            <a:spAutoFit/>
+          </a:bodyPr>
+          <a:lstStyle/>
+          <a:p>
+            <a:pPr>
+              <a:spcAft>
+                <a:spcPts val="1200"/>
+              </a:spcAft>
+            </a:pPr>
+            <a:r>
+              <a:rPr sz="2400" b="1">
+                <a:solidFill>
+                  <a:srgbClr val="17212B"/>
+                </a:solidFill>
+                <a:latin typeface="Microsoft YaHei"/>
+              </a:rPr>
+              <a:t>新增金额或授权字段不被接纳；银行结果只来自回执或核账。</a:t>
+            </a:r>
+          </a:p>
+        </p:txBody>
+      </p:sp>
     </p:spTree>
   </p:cSld>
   <p:clrMapOvr>
@@ -12721,7 +14347,7 @@
                 </a:solidFill>
                 <a:latin typeface="Microsoft YaHei"/>
               </a:rPr>
-              <a:t>投研先核对数据，再组织报告</a:t>
+              <a:t>比较方案之前，先明确资金用途</a:t>
             </a:r>
           </a:p>
         </p:txBody>
@@ -12881,7 +14507,7 @@
                 </a:solidFill>
                 <a:latin typeface="Microsoft YaHei"/>
               </a:rPr>
-              <a:t>异常行情先隔离</a:t>
+              <a:t>风险与期限</a:t>
             </a:r>
           </a:p>
         </p:txBody>
@@ -12920,7 +14546,7 @@
                 </a:solidFill>
                 <a:latin typeface="Microsoft YaHei"/>
               </a:rPr>
-              <a:t>校验 OHLC 基本关系，保留原文件以便追溯</a:t>
+              <a:t>并列两种原型方案，不替代正式适当性评估</a:t>
             </a:r>
           </a:p>
         </p:txBody>
@@ -13002,7 +14628,7 @@
                 </a:solidFill>
                 <a:latin typeface="Microsoft YaHei"/>
               </a:rPr>
-              <a:t>不臆造成交额</a:t>
+              <a:t>流动性与费用</a:t>
             </a:r>
           </a:p>
         </p:txBody>
@@ -13041,7 +14667,7 @@
                 </a:solidFill>
                 <a:latin typeface="Microsoft YaHei"/>
               </a:rPr>
-              <a:t>成交量单位缺失时，不换算资金或推断流向</a:t>
+              <a:t>展示模拟规则，不冒充真实金融产品条款</a:t>
             </a:r>
           </a:p>
         </p:txBody>
@@ -13123,7 +14749,7 @@
                 </a:solidFill>
                 <a:latin typeface="Microsoft YaHei"/>
               </a:rPr>
-              <a:t>只引用核对后的事实</a:t>
+              <a:t>先说明不适合的原因</a:t>
             </a:r>
           </a:p>
         </p:txBody>
@@ -13162,7 +14788,7 @@
                 </a:solidFill>
                 <a:latin typeface="Microsoft YaHei"/>
               </a:rPr>
-              <a:t>日期、价格、标题来自目录，模型只选择已有条目</a:t>
+              <a:t>开销未核对、近期要用或目标压力过大时受限</a:t>
             </a:r>
           </a:p>
         </p:txBody>
@@ -13244,7 +14870,7 @@
                 </a:solidFill>
                 <a:latin typeface="Microsoft YaHei"/>
               </a:rPr>
-              <a:t>明确历史边界</a:t>
+              <a:t>用户自己确认</a:t>
             </a:r>
           </a:p>
         </p:txBody>
@@ -13283,7 +14909,7 @@
                 </a:solidFill>
                 <a:latin typeface="Microsoft YaHei"/>
               </a:rPr>
-              <a:t>可用图表继续保留，异常个股显示待核对</a:t>
+              <a:t>草稿、参数核对和执行分别发生，结果可追溯</a:t>
             </a:r>
           </a:p>
         </p:txBody>
@@ -13335,7 +14961,7 @@
       </p:sp>
       <p:pic>
         <p:nvPicPr>
-          <p:cNvPr id="19" name="Picture 18" descr="research-quality.png"/>
+          <p:cNvPr id="19" name="Picture 18" descr="compare.png"/>
           <p:cNvPicPr>
             <a:picLocks noChangeAspect="1"/>
           </p:cNvPicPr>
@@ -13463,7 +15089,7 @@
                 </a:solidFill>
                 <a:latin typeface="Microsoft YaHei"/>
               </a:rPr>
-              <a:t>安全保护出现在真实操作节点</a:t>
+              <a:t>点开解释，再用数字试一次</a:t>
             </a:r>
           </a:p>
         </p:txBody>
@@ -13623,7 +15249,7 @@
                 </a:solidFill>
                 <a:latin typeface="Microsoft YaHei"/>
               </a:rPr>
-              <a:t>完整参数确认</a:t>
+              <a:t>12 个按需词条</a:t>
             </a:r>
           </a:p>
         </p:txBody>
@@ -13662,7 +15288,7 @@
                 </a:solidFill>
                 <a:latin typeface="Microsoft YaHei"/>
               </a:rPr>
-              <a:t>收款方、金额、请求摘要与会话绑定</a:t>
+              <a:t>白话解释、具体例子、官方资料入口</a:t>
             </a:r>
           </a:p>
         </p:txBody>
@@ -13744,7 +15370,7 @@
                 </a:solidFill>
                 <a:latin typeface="Microsoft YaHei"/>
               </a:rPr>
-              <a:t>累计大额动态验证</a:t>
+              <a:t>把成本和涨跌算清楚</a:t>
             </a:r>
           </a:p>
         </p:txBody>
@@ -13783,7 +15409,7 @@
                 </a:solidFill>
                 <a:latin typeface="Microsoft YaHei"/>
               </a:rPr>
-              <a:t>真实 TOTP 注册与校验，旧验证码不能再用</a:t>
+              <a:t>1 万元，假设 −10% 涨跌、一次性费用 0.5%</a:t>
             </a:r>
           </a:p>
         </p:txBody>
@@ -13865,7 +15491,7 @@
                 </a:solidFill>
                 <a:latin typeface="Microsoft YaHei"/>
               </a:rPr>
-              <a:t>防重复与持久回执</a:t>
+              <a:t>结果可以核对</a:t>
             </a:r>
           </a:p>
         </p:txBody>
@@ -13904,7 +15530,7 @@
                 </a:solidFill>
                 <a:latin typeface="Microsoft YaHei"/>
               </a:rPr>
-              <a:t>相同草稿再次打开只返回原操作</a:t>
+              <a:t>费用 50 元，期末 8,955 元，变化 −1,045 元</a:t>
             </a:r>
           </a:p>
         </p:txBody>
@@ -13986,7 +15612,7 @@
                 </a:solidFill>
                 <a:latin typeface="Microsoft YaHei"/>
               </a:rPr>
-              <a:t>未知先核账</a:t>
+              <a:t>体验通过不等于效果证明</a:t>
             </a:r>
           </a:p>
         </p:txBody>
@@ -14025,7 +15651,7 @@
                 </a:solidFill>
                 <a:latin typeface="Microsoft YaHei"/>
               </a:rPr>
-              <a:t>暂停后续资金操作，核实后验证恢复，历史不重发</a:t>
+              <a:t>算术情景不是预测；真实用户理解效果待验证</a:t>
             </a:r>
           </a:p>
         </p:txBody>
@@ -14077,7 +15703,7 @@
       </p:sp>
       <p:pic>
         <p:nvPicPr>
-          <p:cNvPr id="19" name="Picture 18" descr="confirmation.png"/>
+          <p:cNvPr id="19" name="Picture 18" descr="scenario.png"/>
           <p:cNvPicPr>
             <a:picLocks noChangeAspect="1"/>
           </p:cNvPicPr>
